--- a/examples/mphf-net/rebuild-v2/mphf_net_v2.pptx
+++ b/examples/mphf-net/rebuild-v2/mphf_net_v2.pptx
@@ -3922,8 +3922,8 @@
         </p:nvSpPr>
         <p:spPr>
           <a:xfrm>
-            <a:off x="2286000" y="1168400"/>
-            <a:ext cx="330200" cy="76200"/>
+            <a:off x="2387600" y="1193800"/>
+            <a:ext cx="342900" cy="76200"/>
           </a:xfrm>
           <a:custGeom>
             <a:avLst/>
@@ -3932,15 +3932,15 @@
             <a:cxnLst/>
             <a:rect l="l" t="t" r="r" b="b"/>
             <a:pathLst>
-              <a:path w="26" h="6">
+              <a:path w="27" h="6">
                 <a:moveTo>
                   <a:pt x="0" y="6"/>
                 </a:moveTo>
                 <a:lnTo>
-                  <a:pt x="5" y="0"/>
+                  <a:pt x="6" y="0"/>
                 </a:lnTo>
                 <a:lnTo>
-                  <a:pt x="26" y="0"/>
+                  <a:pt x="27" y="0"/>
                 </a:lnTo>
                 <a:lnTo>
                   <a:pt x="21" y="6"/>
@@ -3989,8 +3989,8 @@
         </p:nvSpPr>
         <p:spPr>
           <a:xfrm>
-            <a:off x="2286000" y="1244600"/>
-            <a:ext cx="266700" cy="228600"/>
+            <a:off x="2387600" y="1270000"/>
+            <a:ext cx="266700" cy="241300"/>
           </a:xfrm>
           <a:custGeom>
             <a:avLst/>
@@ -3999,7 +3999,7 @@
             <a:cxnLst/>
             <a:rect l="l" t="t" r="r" b="b"/>
             <a:pathLst>
-              <a:path w="21" h="18">
+              <a:path w="21" h="19">
                 <a:moveTo>
                   <a:pt x="0" y="0"/>
                 </a:moveTo>
@@ -4007,10 +4007,10 @@
                   <a:pt x="21" y="0"/>
                 </a:lnTo>
                 <a:lnTo>
-                  <a:pt x="21" y="18"/>
+                  <a:pt x="21" y="19"/>
                 </a:lnTo>
                 <a:lnTo>
-                  <a:pt x="0" y="18"/>
+                  <a:pt x="0" y="19"/>
                 </a:lnTo>
                 <a:close/>
               </a:path>
@@ -4064,8 +4064,8 @@
         </p:nvSpPr>
         <p:spPr>
           <a:xfrm>
-            <a:off x="2552700" y="1168400"/>
-            <a:ext cx="63500" cy="304800"/>
+            <a:off x="2654300" y="1193800"/>
+            <a:ext cx="76200" cy="317500"/>
           </a:xfrm>
           <a:custGeom>
             <a:avLst/>
@@ -4074,18 +4074,18 @@
             <a:cxnLst/>
             <a:rect l="l" t="t" r="r" b="b"/>
             <a:pathLst>
-              <a:path w="5" h="24">
+              <a:path w="6" h="25">
                 <a:moveTo>
                   <a:pt x="0" y="6"/>
                 </a:moveTo>
                 <a:lnTo>
-                  <a:pt x="5" y="0"/>
+                  <a:pt x="6" y="0"/>
                 </a:lnTo>
                 <a:lnTo>
-                  <a:pt x="5" y="19"/>
+                  <a:pt x="6" y="18"/>
                 </a:lnTo>
                 <a:lnTo>
-                  <a:pt x="0" y="24"/>
+                  <a:pt x="0" y="25"/>
                 </a:lnTo>
                 <a:close/>
               </a:path>
@@ -4131,8 +4131,8 @@
         </p:nvSpPr>
         <p:spPr>
           <a:xfrm>
-            <a:off x="2159000" y="1460500"/>
-            <a:ext cx="482600" cy="88900"/>
+            <a:off x="2260600" y="1778000"/>
+            <a:ext cx="457200" cy="101600"/>
           </a:xfrm>
           <a:custGeom>
             <a:avLst/>
@@ -4141,18 +4141,18 @@
             <a:cxnLst/>
             <a:rect l="l" t="t" r="r" b="b"/>
             <a:pathLst>
-              <a:path w="38" h="7">
+              <a:path w="36" h="8">
                 <a:moveTo>
-                  <a:pt x="0" y="7"/>
+                  <a:pt x="0" y="8"/>
                 </a:moveTo>
                 <a:lnTo>
-                  <a:pt x="8" y="0"/>
+                  <a:pt x="7" y="0"/>
                 </a:lnTo>
                 <a:lnTo>
-                  <a:pt x="38" y="0"/>
+                  <a:pt x="36" y="0"/>
                 </a:lnTo>
                 <a:lnTo>
-                  <a:pt x="30" y="7"/>
+                  <a:pt x="28" y="8"/>
                 </a:lnTo>
                 <a:close/>
               </a:path>
@@ -4198,8 +4198,8 @@
         </p:nvSpPr>
         <p:spPr>
           <a:xfrm>
-            <a:off x="2159000" y="1549400"/>
-            <a:ext cx="381000" cy="368300"/>
+            <a:off x="2260600" y="1879600"/>
+            <a:ext cx="355600" cy="304800"/>
           </a:xfrm>
           <a:custGeom>
             <a:avLst/>
@@ -4208,18 +4208,18 @@
             <a:cxnLst/>
             <a:rect l="l" t="t" r="r" b="b"/>
             <a:pathLst>
-              <a:path w="30" h="29">
+              <a:path w="28" h="24">
                 <a:moveTo>
                   <a:pt x="0" y="0"/>
                 </a:moveTo>
                 <a:lnTo>
-                  <a:pt x="30" y="0"/>
+                  <a:pt x="28" y="0"/>
                 </a:lnTo>
                 <a:lnTo>
-                  <a:pt x="30" y="29"/>
+                  <a:pt x="28" y="24"/>
                 </a:lnTo>
                 <a:lnTo>
-                  <a:pt x="0" y="29"/>
+                  <a:pt x="0" y="24"/>
                 </a:lnTo>
                 <a:close/>
               </a:path>
@@ -4273,8 +4273,8 @@
         </p:nvSpPr>
         <p:spPr>
           <a:xfrm>
-            <a:off x="2540000" y="1460500"/>
-            <a:ext cx="101600" cy="457200"/>
+            <a:off x="2616200" y="1778000"/>
+            <a:ext cx="101600" cy="406400"/>
           </a:xfrm>
           <a:custGeom>
             <a:avLst/>
@@ -4283,18 +4283,18 @@
             <a:cxnLst/>
             <a:rect l="l" t="t" r="r" b="b"/>
             <a:pathLst>
-              <a:path w="8" h="36">
+              <a:path w="8" h="32">
                 <a:moveTo>
-                  <a:pt x="0" y="7"/>
+                  <a:pt x="0" y="8"/>
                 </a:moveTo>
                 <a:lnTo>
                   <a:pt x="8" y="0"/>
                 </a:lnTo>
                 <a:lnTo>
-                  <a:pt x="8" y="29"/>
+                  <a:pt x="8" y="25"/>
                 </a:lnTo>
                 <a:lnTo>
-                  <a:pt x="0" y="36"/>
+                  <a:pt x="0" y="32"/>
                 </a:lnTo>
                 <a:close/>
               </a:path>
@@ -4340,8 +4340,8 @@
         </p:nvSpPr>
         <p:spPr>
           <a:xfrm>
-            <a:off x="2006600" y="1879600"/>
-            <a:ext cx="635000" cy="127000"/>
+            <a:off x="2108200" y="2387600"/>
+            <a:ext cx="622300" cy="127000"/>
           </a:xfrm>
           <a:custGeom>
             <a:avLst/>
@@ -4350,7 +4350,7 @@
             <a:cxnLst/>
             <a:rect l="l" t="t" r="r" b="b"/>
             <a:pathLst>
-              <a:path w="50" h="10">
+              <a:path w="49" h="10">
                 <a:moveTo>
                   <a:pt x="0" y="10"/>
                 </a:moveTo>
@@ -4358,10 +4358,10 @@
                   <a:pt x="10" y="0"/>
                 </a:lnTo>
                 <a:lnTo>
-                  <a:pt x="50" y="0"/>
+                  <a:pt x="49" y="0"/>
                 </a:lnTo>
                 <a:lnTo>
-                  <a:pt x="40" y="10"/>
+                  <a:pt x="39" y="10"/>
                 </a:lnTo>
                 <a:close/>
               </a:path>
@@ -4407,8 +4407,8 @@
         </p:nvSpPr>
         <p:spPr>
           <a:xfrm>
-            <a:off x="2006600" y="2006600"/>
-            <a:ext cx="508000" cy="482600"/>
+            <a:off x="2108200" y="2514600"/>
+            <a:ext cx="495300" cy="393700"/>
           </a:xfrm>
           <a:custGeom>
             <a:avLst/>
@@ -4417,18 +4417,18 @@
             <a:cxnLst/>
             <a:rect l="l" t="t" r="r" b="b"/>
             <a:pathLst>
-              <a:path w="40" h="38">
+              <a:path w="39" h="31">
                 <a:moveTo>
                   <a:pt x="0" y="0"/>
                 </a:moveTo>
                 <a:lnTo>
-                  <a:pt x="40" y="0"/>
+                  <a:pt x="39" y="0"/>
                 </a:lnTo>
                 <a:lnTo>
-                  <a:pt x="40" y="38"/>
+                  <a:pt x="39" y="31"/>
                 </a:lnTo>
                 <a:lnTo>
-                  <a:pt x="0" y="38"/>
+                  <a:pt x="0" y="31"/>
                 </a:lnTo>
                 <a:close/>
               </a:path>
@@ -4482,8 +4482,8 @@
         </p:nvSpPr>
         <p:spPr>
           <a:xfrm>
-            <a:off x="2514600" y="1879600"/>
-            <a:ext cx="127000" cy="609600"/>
+            <a:off x="2603500" y="2387600"/>
+            <a:ext cx="127000" cy="520700"/>
           </a:xfrm>
           <a:custGeom>
             <a:avLst/>
@@ -4492,7 +4492,7 @@
             <a:cxnLst/>
             <a:rect l="l" t="t" r="r" b="b"/>
             <a:pathLst>
-              <a:path w="10" h="48">
+              <a:path w="10" h="41">
                 <a:moveTo>
                   <a:pt x="0" y="10"/>
                 </a:moveTo>
@@ -4500,10 +4500,10 @@
                   <a:pt x="10" y="0"/>
                 </a:lnTo>
                 <a:lnTo>
-                  <a:pt x="10" y="38"/>
+                  <a:pt x="10" y="31"/>
                 </a:lnTo>
                 <a:lnTo>
-                  <a:pt x="0" y="48"/>
+                  <a:pt x="0" y="41"/>
                 </a:lnTo>
                 <a:close/>
               </a:path>
@@ -4549,8 +4549,8 @@
         </p:nvSpPr>
         <p:spPr>
           <a:xfrm>
-            <a:off x="1803400" y="2387600"/>
-            <a:ext cx="850900" cy="165100"/>
+            <a:off x="1905000" y="3073400"/>
+            <a:ext cx="838200" cy="177800"/>
           </a:xfrm>
           <a:custGeom>
             <a:avLst/>
@@ -4559,18 +4559,18 @@
             <a:cxnLst/>
             <a:rect l="l" t="t" r="r" b="b"/>
             <a:pathLst>
-              <a:path w="67" h="13">
+              <a:path w="66" h="14">
                 <a:moveTo>
-                  <a:pt x="0" y="13"/>
+                  <a:pt x="0" y="14"/>
                 </a:moveTo>
                 <a:lnTo>
                   <a:pt x="14" y="0"/>
                 </a:lnTo>
                 <a:lnTo>
-                  <a:pt x="67" y="0"/>
+                  <a:pt x="66" y="0"/>
                 </a:lnTo>
                 <a:lnTo>
-                  <a:pt x="53" y="13"/>
+                  <a:pt x="52" y="14"/>
                 </a:lnTo>
                 <a:close/>
               </a:path>
@@ -4616,8 +4616,8 @@
         </p:nvSpPr>
         <p:spPr>
           <a:xfrm>
-            <a:off x="1803400" y="2552700"/>
-            <a:ext cx="673100" cy="635000"/>
+            <a:off x="1905000" y="3251200"/>
+            <a:ext cx="660400" cy="508000"/>
           </a:xfrm>
           <a:custGeom>
             <a:avLst/>
@@ -4626,18 +4626,18 @@
             <a:cxnLst/>
             <a:rect l="l" t="t" r="r" b="b"/>
             <a:pathLst>
-              <a:path w="53" h="50">
+              <a:path w="52" h="40">
                 <a:moveTo>
                   <a:pt x="0" y="0"/>
                 </a:moveTo>
                 <a:lnTo>
-                  <a:pt x="53" y="0"/>
+                  <a:pt x="52" y="0"/>
                 </a:lnTo>
                 <a:lnTo>
-                  <a:pt x="53" y="50"/>
+                  <a:pt x="52" y="40"/>
                 </a:lnTo>
                 <a:lnTo>
-                  <a:pt x="0" y="50"/>
+                  <a:pt x="0" y="40"/>
                 </a:lnTo>
                 <a:close/>
               </a:path>
@@ -4691,8 +4691,8 @@
         </p:nvSpPr>
         <p:spPr>
           <a:xfrm>
-            <a:off x="2476500" y="2387600"/>
-            <a:ext cx="177800" cy="800100"/>
+            <a:off x="2565400" y="3073400"/>
+            <a:ext cx="177800" cy="685800"/>
           </a:xfrm>
           <a:custGeom>
             <a:avLst/>
@@ -4701,18 +4701,18 @@
             <a:cxnLst/>
             <a:rect l="l" t="t" r="r" b="b"/>
             <a:pathLst>
-              <a:path w="14" h="63">
+              <a:path w="14" h="54">
                 <a:moveTo>
-                  <a:pt x="0" y="13"/>
+                  <a:pt x="0" y="14"/>
                 </a:moveTo>
                 <a:lnTo>
                   <a:pt x="14" y="0"/>
                 </a:lnTo>
                 <a:lnTo>
-                  <a:pt x="14" y="50"/>
+                  <a:pt x="14" y="40"/>
                 </a:lnTo>
                 <a:lnTo>
-                  <a:pt x="0" y="63"/>
+                  <a:pt x="0" y="54"/>
                 </a:lnTo>
                 <a:close/>
               </a:path>
@@ -4750,16 +4750,697 @@
           </a:p>
         </p:txBody>
       </p:sp>
-      <p:sp>
-        <p:nvSpPr>
-          <p:cNvPr id="33" name="FIG_T_backbone_dots"/>
+      <p:cxnSp>
+        <p:nvCxnSpPr>
+          <p:cNvPr id="33" name="FIG_L_bb_chain1"/>
+          <p:cNvCxnSpPr/>
+          <p:nvPr/>
+        </p:nvCxnSpPr>
+        <p:spPr>
+          <a:xfrm>
+            <a:off x="2516187" y="1508125"/>
+            <a:ext cx="0" cy="269875"/>
+          </a:xfrm>
+          <a:prstGeom prst="line">
+            <a:avLst/>
+          </a:prstGeom>
+          <a:ln w="15240">
+            <a:solidFill>
+              <a:srgbClr val="282C3C"/>
+            </a:solidFill>
+            <a:tailEnd type="triangle" w="sm" len="sm"/>
+          </a:ln>
+        </p:spPr>
+        <p:style>
+          <a:lnRef idx="2">
+            <a:schemeClr val="accent1"/>
+          </a:lnRef>
+          <a:fillRef idx="0">
+            <a:schemeClr val="accent1"/>
+          </a:fillRef>
+          <a:effectRef idx="1">
+            <a:schemeClr val="accent1"/>
+          </a:effectRef>
+          <a:fontRef idx="minor">
+            <a:schemeClr val="tx1"/>
+          </a:fontRef>
+        </p:style>
+      </p:cxnSp>
+      <p:cxnSp>
+        <p:nvCxnSpPr>
+          <p:cNvPr id="34" name="FIG_L_bb_chain2"/>
+          <p:cNvCxnSpPr/>
+          <p:nvPr/>
+        </p:nvCxnSpPr>
+        <p:spPr>
+          <a:xfrm>
+            <a:off x="2436812" y="2190750"/>
+            <a:ext cx="0" cy="190500"/>
+          </a:xfrm>
+          <a:prstGeom prst="line">
+            <a:avLst/>
+          </a:prstGeom>
+          <a:ln w="15240">
+            <a:solidFill>
+              <a:srgbClr val="282C3C"/>
+            </a:solidFill>
+            <a:tailEnd type="triangle" w="sm" len="sm"/>
+          </a:ln>
+        </p:spPr>
+        <p:style>
+          <a:lnRef idx="2">
+            <a:schemeClr val="accent1"/>
+          </a:lnRef>
+          <a:fillRef idx="0">
+            <a:schemeClr val="accent1"/>
+          </a:fillRef>
+          <a:effectRef idx="1">
+            <a:schemeClr val="accent1"/>
+          </a:effectRef>
+          <a:fontRef idx="minor">
+            <a:schemeClr val="tx1"/>
+          </a:fontRef>
+        </p:style>
+      </p:cxnSp>
+      <p:cxnSp>
+        <p:nvCxnSpPr>
+          <p:cNvPr id="35" name="FIG_L_bb_chain3"/>
+          <p:cNvCxnSpPr/>
+          <p:nvPr/>
+        </p:nvCxnSpPr>
+        <p:spPr>
+          <a:xfrm>
+            <a:off x="2357437" y="2905125"/>
+            <a:ext cx="0" cy="174625"/>
+          </a:xfrm>
+          <a:prstGeom prst="line">
+            <a:avLst/>
+          </a:prstGeom>
+          <a:ln w="15240">
+            <a:solidFill>
+              <a:srgbClr val="282C3C"/>
+            </a:solidFill>
+            <a:tailEnd type="triangle" w="sm" len="sm"/>
+          </a:ln>
+        </p:spPr>
+        <p:style>
+          <a:lnRef idx="2">
+            <a:schemeClr val="accent1"/>
+          </a:lnRef>
+          <a:fillRef idx="0">
+            <a:schemeClr val="accent1"/>
+          </a:fillRef>
+          <a:effectRef idx="1">
+            <a:schemeClr val="accent1"/>
+          </a:effectRef>
+          <a:fontRef idx="minor">
+            <a:schemeClr val="tx1"/>
+          </a:fontRef>
+        </p:style>
+      </p:cxnSp>
+      <p:cxnSp>
+        <p:nvCxnSpPr>
+          <p:cNvPr id="36" name="FIG_L_bb_bus_in1"/>
+          <p:cNvCxnSpPr/>
+          <p:nvPr/>
+        </p:nvCxnSpPr>
+        <p:spPr>
+          <a:xfrm>
+            <a:off x="2730500" y="1389062"/>
+            <a:ext cx="222250" cy="0"/>
+          </a:xfrm>
+          <a:prstGeom prst="line">
+            <a:avLst/>
+          </a:prstGeom>
+          <a:ln w="15240">
+            <a:solidFill>
+              <a:srgbClr val="282C3C"/>
+            </a:solidFill>
+          </a:ln>
+        </p:spPr>
+        <p:style>
+          <a:lnRef idx="2">
+            <a:schemeClr val="accent1"/>
+          </a:lnRef>
+          <a:fillRef idx="0">
+            <a:schemeClr val="accent1"/>
+          </a:fillRef>
+          <a:effectRef idx="1">
+            <a:schemeClr val="accent1"/>
+          </a:effectRef>
+          <a:fontRef idx="minor">
+            <a:schemeClr val="tx1"/>
+          </a:fontRef>
+        </p:style>
+      </p:cxnSp>
+      <p:cxnSp>
+        <p:nvCxnSpPr>
+          <p:cNvPr id="37" name="FIG_L_bb_bus"/>
+          <p:cNvCxnSpPr/>
+          <p:nvPr/>
+        </p:nvCxnSpPr>
+        <p:spPr>
+          <a:xfrm>
+            <a:off x="2952750" y="1389062"/>
+            <a:ext cx="0" cy="1897063"/>
+          </a:xfrm>
+          <a:prstGeom prst="line">
+            <a:avLst/>
+          </a:prstGeom>
+          <a:ln w="15240">
+            <a:solidFill>
+              <a:srgbClr val="282C3C"/>
+            </a:solidFill>
+          </a:ln>
+        </p:spPr>
+        <p:style>
+          <a:lnRef idx="2">
+            <a:schemeClr val="accent1"/>
+          </a:lnRef>
+          <a:fillRef idx="0">
+            <a:schemeClr val="accent1"/>
+          </a:fillRef>
+          <a:effectRef idx="1">
+            <a:schemeClr val="accent1"/>
+          </a:effectRef>
+          <a:fontRef idx="minor">
+            <a:schemeClr val="tx1"/>
+          </a:fontRef>
+        </p:style>
+      </p:cxnSp>
+      <p:cxnSp>
+        <p:nvCxnSpPr>
+          <p:cNvPr id="38" name="FIG_L_bb_bus_in3"/>
+          <p:cNvCxnSpPr/>
+          <p:nvPr/>
+        </p:nvCxnSpPr>
+        <p:spPr>
+          <a:xfrm>
+            <a:off x="2730500" y="2706687"/>
+            <a:ext cx="222250" cy="0"/>
+          </a:xfrm>
+          <a:prstGeom prst="line">
+            <a:avLst/>
+          </a:prstGeom>
+          <a:ln w="15240">
+            <a:solidFill>
+              <a:srgbClr val="282C3C"/>
+            </a:solidFill>
+          </a:ln>
+        </p:spPr>
+        <p:style>
+          <a:lnRef idx="2">
+            <a:schemeClr val="accent1"/>
+          </a:lnRef>
+          <a:fillRef idx="0">
+            <a:schemeClr val="accent1"/>
+          </a:fillRef>
+          <a:effectRef idx="1">
+            <a:schemeClr val="accent1"/>
+          </a:effectRef>
+          <a:fontRef idx="minor">
+            <a:schemeClr val="tx1"/>
+          </a:fontRef>
+        </p:style>
+      </p:cxnSp>
+      <p:sp>
+        <p:nvSpPr>
+          <p:cNvPr id="39" name="FIG_E_bb_c5"/>
+          <p:cNvSpPr/>
+          <p:nvPr/>
+        </p:nvSpPr>
+        <p:spPr>
+          <a:xfrm>
+            <a:off x="3143250" y="1627187"/>
+            <a:ext cx="460375" cy="349250"/>
+          </a:xfrm>
+          <a:prstGeom prst="roundRect">
+            <a:avLst>
+              <a:gd name="adj" fmla="val 8000"/>
+            </a:avLst>
+          </a:prstGeom>
+          <a:solidFill>
+            <a:srgbClr val="F5F8FF"/>
+          </a:solidFill>
+          <a:ln w="17780">
+            <a:solidFill>
+              <a:srgbClr val="2550D8"/>
+            </a:solidFill>
+          </a:ln>
+          <a:effectLst/>
+        </p:spPr>
+        <p:style>
+          <a:lnRef idx="1">
+            <a:schemeClr val="accent1"/>
+          </a:lnRef>
+          <a:fillRef idx="3">
+            <a:schemeClr val="accent1"/>
+          </a:fillRef>
+          <a:effectRef idx="0">
+            <a:schemeClr val="accent1"/>
+          </a:effectRef>
+          <a:fontRef idx="minor">
+            <a:schemeClr val="lt1"/>
+          </a:fontRef>
+        </p:style>
+        <p:txBody>
+          <a:bodyPr rtlCol="0" anchor="ctr"/>
+          <a:lstStyle/>
+          <a:p>
+            <a:pPr algn="ctr"/>
+          </a:p>
+        </p:txBody>
+      </p:sp>
+      <p:sp>
+        <p:nvSpPr>
+          <p:cNvPr id="40" name="FIG_T_bb_c5"/>
           <p:cNvSpPr txBox="1"/>
           <p:nvPr/>
         </p:nvSpPr>
         <p:spPr>
           <a:xfrm>
-            <a:off x="2143125" y="3587750"/>
-            <a:ext cx="317500" cy="142875"/>
+            <a:off x="3143250" y="1658937"/>
+            <a:ext cx="460375" cy="158750"/>
+          </a:xfrm>
+          <a:prstGeom prst="rect">
+            <a:avLst/>
+          </a:prstGeom>
+          <a:noFill/>
+          <a:effectLst/>
+        </p:spPr>
+        <p:txBody>
+          <a:bodyPr wrap="square" lIns="0" rIns="0" tIns="0" bIns="0" anchor="ctr">
+            <a:spAutoFit/>
+          </a:bodyPr>
+          <a:lstStyle/>
+          <a:p>
+            <a:pPr algn="ctr"/>
+            <a:r>
+              <a:rPr sz="1000" b="1">
+                <a:solidFill>
+                  <a:srgbClr val="2550D8"/>
+                </a:solidFill>
+                <a:latin typeface="PingFang SC"/>
+              </a:rPr>
+              <a:t>C5</a:t>
+            </a:r>
+          </a:p>
+        </p:txBody>
+      </p:sp>
+      <p:sp>
+        <p:nvSpPr>
+          <p:cNvPr id="41" name="FIG_T_bb_c5_dim"/>
+          <p:cNvSpPr txBox="1"/>
+          <p:nvPr/>
+        </p:nvSpPr>
+        <p:spPr>
+          <a:xfrm>
+            <a:off x="3143250" y="1801812"/>
+            <a:ext cx="460375" cy="142875"/>
+          </a:xfrm>
+          <a:prstGeom prst="rect">
+            <a:avLst/>
+          </a:prstGeom>
+          <a:noFill/>
+          <a:effectLst/>
+        </p:spPr>
+        <p:txBody>
+          <a:bodyPr wrap="square" lIns="0" rIns="0" tIns="0" bIns="0" anchor="ctr">
+            <a:spAutoFit/>
+          </a:bodyPr>
+          <a:lstStyle/>
+          <a:p>
+            <a:pPr algn="ctr"/>
+            <a:r>
+              <a:rPr sz="800" b="0">
+                <a:solidFill>
+                  <a:srgbClr val="2550D8"/>
+                </a:solidFill>
+                <a:latin typeface="PingFang SC"/>
+              </a:rPr>
+              <a:t>20×C</a:t>
+            </a:r>
+          </a:p>
+        </p:txBody>
+      </p:sp>
+      <p:cxnSp>
+        <p:nvCxnSpPr>
+          <p:cNvPr id="42" name="FIG_L_bb_to_c5"/>
+          <p:cNvCxnSpPr/>
+          <p:nvPr/>
+        </p:nvCxnSpPr>
+        <p:spPr>
+          <a:xfrm>
+            <a:off x="2952750" y="1801812"/>
+            <a:ext cx="190500" cy="0"/>
+          </a:xfrm>
+          <a:prstGeom prst="line">
+            <a:avLst/>
+          </a:prstGeom>
+          <a:ln w="15240">
+            <a:solidFill>
+              <a:srgbClr val="282C3C"/>
+            </a:solidFill>
+            <a:tailEnd type="triangle" w="sm" len="sm"/>
+          </a:ln>
+        </p:spPr>
+        <p:style>
+          <a:lnRef idx="2">
+            <a:schemeClr val="accent1"/>
+          </a:lnRef>
+          <a:fillRef idx="0">
+            <a:schemeClr val="accent1"/>
+          </a:fillRef>
+          <a:effectRef idx="1">
+            <a:schemeClr val="accent1"/>
+          </a:effectRef>
+          <a:fontRef idx="minor">
+            <a:schemeClr val="tx1"/>
+          </a:fontRef>
+        </p:style>
+      </p:cxnSp>
+      <p:sp>
+        <p:nvSpPr>
+          <p:cNvPr id="43" name="FIG_E_bb_c4"/>
+          <p:cNvSpPr/>
+          <p:nvPr/>
+        </p:nvSpPr>
+        <p:spPr>
+          <a:xfrm>
+            <a:off x="3143250" y="2373312"/>
+            <a:ext cx="460375" cy="349250"/>
+          </a:xfrm>
+          <a:prstGeom prst="roundRect">
+            <a:avLst>
+              <a:gd name="adj" fmla="val 8000"/>
+            </a:avLst>
+          </a:prstGeom>
+          <a:solidFill>
+            <a:srgbClr val="F5F8FF"/>
+          </a:solidFill>
+          <a:ln w="17780">
+            <a:solidFill>
+              <a:srgbClr val="2550D8"/>
+            </a:solidFill>
+          </a:ln>
+          <a:effectLst/>
+        </p:spPr>
+        <p:style>
+          <a:lnRef idx="1">
+            <a:schemeClr val="accent1"/>
+          </a:lnRef>
+          <a:fillRef idx="3">
+            <a:schemeClr val="accent1"/>
+          </a:fillRef>
+          <a:effectRef idx="0">
+            <a:schemeClr val="accent1"/>
+          </a:effectRef>
+          <a:fontRef idx="minor">
+            <a:schemeClr val="lt1"/>
+          </a:fontRef>
+        </p:style>
+        <p:txBody>
+          <a:bodyPr rtlCol="0" anchor="ctr"/>
+          <a:lstStyle/>
+          <a:p>
+            <a:pPr algn="ctr"/>
+          </a:p>
+        </p:txBody>
+      </p:sp>
+      <p:sp>
+        <p:nvSpPr>
+          <p:cNvPr id="44" name="FIG_T_bb_c4"/>
+          <p:cNvSpPr txBox="1"/>
+          <p:nvPr/>
+        </p:nvSpPr>
+        <p:spPr>
+          <a:xfrm>
+            <a:off x="3143250" y="2405062"/>
+            <a:ext cx="460375" cy="158750"/>
+          </a:xfrm>
+          <a:prstGeom prst="rect">
+            <a:avLst/>
+          </a:prstGeom>
+          <a:noFill/>
+          <a:effectLst/>
+        </p:spPr>
+        <p:txBody>
+          <a:bodyPr wrap="square" lIns="0" rIns="0" tIns="0" bIns="0" anchor="ctr">
+            <a:spAutoFit/>
+          </a:bodyPr>
+          <a:lstStyle/>
+          <a:p>
+            <a:pPr algn="ctr"/>
+            <a:r>
+              <a:rPr sz="1000" b="1">
+                <a:solidFill>
+                  <a:srgbClr val="2550D8"/>
+                </a:solidFill>
+                <a:latin typeface="PingFang SC"/>
+              </a:rPr>
+              <a:t>C4</a:t>
+            </a:r>
+          </a:p>
+        </p:txBody>
+      </p:sp>
+      <p:sp>
+        <p:nvSpPr>
+          <p:cNvPr id="45" name="FIG_T_bb_c4_dim"/>
+          <p:cNvSpPr txBox="1"/>
+          <p:nvPr/>
+        </p:nvSpPr>
+        <p:spPr>
+          <a:xfrm>
+            <a:off x="3143250" y="2547937"/>
+            <a:ext cx="460375" cy="142875"/>
+          </a:xfrm>
+          <a:prstGeom prst="rect">
+            <a:avLst/>
+          </a:prstGeom>
+          <a:noFill/>
+          <a:effectLst/>
+        </p:spPr>
+        <p:txBody>
+          <a:bodyPr wrap="square" lIns="0" rIns="0" tIns="0" bIns="0" anchor="ctr">
+            <a:spAutoFit/>
+          </a:bodyPr>
+          <a:lstStyle/>
+          <a:p>
+            <a:pPr algn="ctr"/>
+            <a:r>
+              <a:rPr sz="800" b="0">
+                <a:solidFill>
+                  <a:srgbClr val="2550D8"/>
+                </a:solidFill>
+                <a:latin typeface="PingFang SC"/>
+              </a:rPr>
+              <a:t>40×C</a:t>
+            </a:r>
+          </a:p>
+        </p:txBody>
+      </p:sp>
+      <p:cxnSp>
+        <p:nvCxnSpPr>
+          <p:cNvPr id="46" name="FIG_L_bb_to_c4"/>
+          <p:cNvCxnSpPr/>
+          <p:nvPr/>
+        </p:nvCxnSpPr>
+        <p:spPr>
+          <a:xfrm>
+            <a:off x="2952750" y="2547937"/>
+            <a:ext cx="190500" cy="0"/>
+          </a:xfrm>
+          <a:prstGeom prst="line">
+            <a:avLst/>
+          </a:prstGeom>
+          <a:ln w="15240">
+            <a:solidFill>
+              <a:srgbClr val="282C3C"/>
+            </a:solidFill>
+            <a:tailEnd type="triangle" w="sm" len="sm"/>
+          </a:ln>
+        </p:spPr>
+        <p:style>
+          <a:lnRef idx="2">
+            <a:schemeClr val="accent1"/>
+          </a:lnRef>
+          <a:fillRef idx="0">
+            <a:schemeClr val="accent1"/>
+          </a:fillRef>
+          <a:effectRef idx="1">
+            <a:schemeClr val="accent1"/>
+          </a:effectRef>
+          <a:fontRef idx="minor">
+            <a:schemeClr val="tx1"/>
+          </a:fontRef>
+        </p:style>
+      </p:cxnSp>
+      <p:sp>
+        <p:nvSpPr>
+          <p:cNvPr id="47" name="FIG_E_bb_c3"/>
+          <p:cNvSpPr/>
+          <p:nvPr/>
+        </p:nvSpPr>
+        <p:spPr>
+          <a:xfrm>
+            <a:off x="3143250" y="3111500"/>
+            <a:ext cx="460375" cy="349250"/>
+          </a:xfrm>
+          <a:prstGeom prst="roundRect">
+            <a:avLst>
+              <a:gd name="adj" fmla="val 8000"/>
+            </a:avLst>
+          </a:prstGeom>
+          <a:solidFill>
+            <a:srgbClr val="F5F8FF"/>
+          </a:solidFill>
+          <a:ln w="17780">
+            <a:solidFill>
+              <a:srgbClr val="E03A26"/>
+            </a:solidFill>
+          </a:ln>
+          <a:effectLst/>
+        </p:spPr>
+        <p:style>
+          <a:lnRef idx="1">
+            <a:schemeClr val="accent1"/>
+          </a:lnRef>
+          <a:fillRef idx="3">
+            <a:schemeClr val="accent1"/>
+          </a:fillRef>
+          <a:effectRef idx="0">
+            <a:schemeClr val="accent1"/>
+          </a:effectRef>
+          <a:fontRef idx="minor">
+            <a:schemeClr val="lt1"/>
+          </a:fontRef>
+        </p:style>
+        <p:txBody>
+          <a:bodyPr rtlCol="0" anchor="ctr"/>
+          <a:lstStyle/>
+          <a:p>
+            <a:pPr algn="ctr"/>
+          </a:p>
+        </p:txBody>
+      </p:sp>
+      <p:sp>
+        <p:nvSpPr>
+          <p:cNvPr id="48" name="FIG_T_bb_c3"/>
+          <p:cNvSpPr txBox="1"/>
+          <p:nvPr/>
+        </p:nvSpPr>
+        <p:spPr>
+          <a:xfrm>
+            <a:off x="3143250" y="3143250"/>
+            <a:ext cx="460375" cy="158750"/>
+          </a:xfrm>
+          <a:prstGeom prst="rect">
+            <a:avLst/>
+          </a:prstGeom>
+          <a:noFill/>
+          <a:effectLst/>
+        </p:spPr>
+        <p:txBody>
+          <a:bodyPr wrap="square" lIns="0" rIns="0" tIns="0" bIns="0" anchor="ctr">
+            <a:spAutoFit/>
+          </a:bodyPr>
+          <a:lstStyle/>
+          <a:p>
+            <a:pPr algn="ctr"/>
+            <a:r>
+              <a:rPr sz="1000" b="1">
+                <a:solidFill>
+                  <a:srgbClr val="E03A26"/>
+                </a:solidFill>
+                <a:latin typeface="PingFang SC"/>
+              </a:rPr>
+              <a:t>C3</a:t>
+            </a:r>
+          </a:p>
+        </p:txBody>
+      </p:sp>
+      <p:sp>
+        <p:nvSpPr>
+          <p:cNvPr id="49" name="FIG_T_bb_c3_dim"/>
+          <p:cNvSpPr txBox="1"/>
+          <p:nvPr/>
+        </p:nvSpPr>
+        <p:spPr>
+          <a:xfrm>
+            <a:off x="3143250" y="3286125"/>
+            <a:ext cx="460375" cy="142875"/>
+          </a:xfrm>
+          <a:prstGeom prst="rect">
+            <a:avLst/>
+          </a:prstGeom>
+          <a:noFill/>
+          <a:effectLst/>
+        </p:spPr>
+        <p:txBody>
+          <a:bodyPr wrap="square" lIns="0" rIns="0" tIns="0" bIns="0" anchor="ctr">
+            <a:spAutoFit/>
+          </a:bodyPr>
+          <a:lstStyle/>
+          <a:p>
+            <a:pPr algn="ctr"/>
+            <a:r>
+              <a:rPr sz="800" b="0">
+                <a:solidFill>
+                  <a:srgbClr val="E03A26"/>
+                </a:solidFill>
+                <a:latin typeface="PingFang SC"/>
+              </a:rPr>
+              <a:t>80×C</a:t>
+            </a:r>
+          </a:p>
+        </p:txBody>
+      </p:sp>
+      <p:cxnSp>
+        <p:nvCxnSpPr>
+          <p:cNvPr id="50" name="FIG_L_bb_to_c3"/>
+          <p:cNvCxnSpPr/>
+          <p:nvPr/>
+        </p:nvCxnSpPr>
+        <p:spPr>
+          <a:xfrm>
+            <a:off x="2746375" y="3286125"/>
+            <a:ext cx="396875" cy="0"/>
+          </a:xfrm>
+          <a:prstGeom prst="line">
+            <a:avLst/>
+          </a:prstGeom>
+          <a:ln w="15240">
+            <a:solidFill>
+              <a:srgbClr val="282C3C"/>
+            </a:solidFill>
+            <a:tailEnd type="triangle" w="sm" len="sm"/>
+          </a:ln>
+        </p:spPr>
+        <p:style>
+          <a:lnRef idx="2">
+            <a:schemeClr val="accent1"/>
+          </a:lnRef>
+          <a:fillRef idx="0">
+            <a:schemeClr val="accent1"/>
+          </a:fillRef>
+          <a:effectRef idx="1">
+            <a:schemeClr val="accent1"/>
+          </a:effectRef>
+          <a:fontRef idx="minor">
+            <a:schemeClr val="tx1"/>
+          </a:fontRef>
+        </p:style>
+      </p:cxnSp>
+      <p:sp>
+        <p:nvSpPr>
+          <p:cNvPr id="51" name="FIG_T_backbone_dots"/>
+          <p:cNvSpPr txBox="1"/>
+          <p:nvPr/>
+        </p:nvSpPr>
+        <p:spPr>
+          <a:xfrm>
+            <a:off x="2143125" y="3762375"/>
+            <a:ext cx="317500" cy="127000"/>
           </a:xfrm>
           <a:prstGeom prst="rect">
             <a:avLst/>
@@ -4788,14 +5469,14 @@
       </p:sp>
       <p:sp>
         <p:nvSpPr>
-          <p:cNvPr id="34" name="FIG_E_bb_c5"/>
+          <p:cNvPr id="52" name="FIG_E_bb_outbar"/>
           <p:cNvSpPr/>
           <p:nvPr/>
         </p:nvSpPr>
         <p:spPr>
           <a:xfrm>
-            <a:off x="3143250" y="1563687"/>
-            <a:ext cx="460375" cy="349250"/>
+            <a:off x="1905000" y="3952875"/>
+            <a:ext cx="1714500" cy="238125"/>
           </a:xfrm>
           <a:prstGeom prst="roundRect">
             <a:avLst>
@@ -4803,474 +5484,6 @@
             </a:avLst>
           </a:prstGeom>
           <a:solidFill>
-            <a:srgbClr val="F5F8FF"/>
-          </a:solidFill>
-          <a:ln w="17780">
-            <a:solidFill>
-              <a:srgbClr val="2550D8"/>
-            </a:solidFill>
-          </a:ln>
-          <a:effectLst/>
-        </p:spPr>
-        <p:style>
-          <a:lnRef idx="1">
-            <a:schemeClr val="accent1"/>
-          </a:lnRef>
-          <a:fillRef idx="3">
-            <a:schemeClr val="accent1"/>
-          </a:fillRef>
-          <a:effectRef idx="0">
-            <a:schemeClr val="accent1"/>
-          </a:effectRef>
-          <a:fontRef idx="minor">
-            <a:schemeClr val="lt1"/>
-          </a:fontRef>
-        </p:style>
-        <p:txBody>
-          <a:bodyPr rtlCol="0" anchor="ctr"/>
-          <a:lstStyle/>
-          <a:p>
-            <a:pPr algn="ctr"/>
-          </a:p>
-        </p:txBody>
-      </p:sp>
-      <p:sp>
-        <p:nvSpPr>
-          <p:cNvPr id="35" name="FIG_T_bb_c5"/>
-          <p:cNvSpPr txBox="1"/>
-          <p:nvPr/>
-        </p:nvSpPr>
-        <p:spPr>
-          <a:xfrm>
-            <a:off x="3143250" y="1595437"/>
-            <a:ext cx="460375" cy="158750"/>
-          </a:xfrm>
-          <a:prstGeom prst="rect">
-            <a:avLst/>
-          </a:prstGeom>
-          <a:noFill/>
-          <a:effectLst/>
-        </p:spPr>
-        <p:txBody>
-          <a:bodyPr wrap="square" lIns="0" rIns="0" tIns="0" bIns="0" anchor="ctr">
-            <a:spAutoFit/>
-          </a:bodyPr>
-          <a:lstStyle/>
-          <a:p>
-            <a:pPr algn="ctr"/>
-            <a:r>
-              <a:rPr sz="1000" b="1">
-                <a:solidFill>
-                  <a:srgbClr val="2550D8"/>
-                </a:solidFill>
-                <a:latin typeface="PingFang SC"/>
-              </a:rPr>
-              <a:t>C5</a:t>
-            </a:r>
-          </a:p>
-        </p:txBody>
-      </p:sp>
-      <p:sp>
-        <p:nvSpPr>
-          <p:cNvPr id="36" name="FIG_T_bb_c5_dim"/>
-          <p:cNvSpPr txBox="1"/>
-          <p:nvPr/>
-        </p:nvSpPr>
-        <p:spPr>
-          <a:xfrm>
-            <a:off x="3143250" y="1738312"/>
-            <a:ext cx="460375" cy="142875"/>
-          </a:xfrm>
-          <a:prstGeom prst="rect">
-            <a:avLst/>
-          </a:prstGeom>
-          <a:noFill/>
-          <a:effectLst/>
-        </p:spPr>
-        <p:txBody>
-          <a:bodyPr wrap="square" lIns="0" rIns="0" tIns="0" bIns="0" anchor="ctr">
-            <a:spAutoFit/>
-          </a:bodyPr>
-          <a:lstStyle/>
-          <a:p>
-            <a:pPr algn="ctr"/>
-            <a:r>
-              <a:rPr sz="800" b="0">
-                <a:solidFill>
-                  <a:srgbClr val="2550D8"/>
-                </a:solidFill>
-                <a:latin typeface="PingFang SC"/>
-              </a:rPr>
-              <a:t>20×C</a:t>
-            </a:r>
-          </a:p>
-        </p:txBody>
-      </p:sp>
-      <p:cxnSp>
-        <p:nvCxnSpPr>
-          <p:cNvPr id="37" name="FIG_L_bb_to_c5"/>
-          <p:cNvCxnSpPr/>
-          <p:nvPr/>
-        </p:nvCxnSpPr>
-        <p:spPr>
-          <a:xfrm>
-            <a:off x="2635250" y="1738312"/>
-            <a:ext cx="508000" cy="0"/>
-          </a:xfrm>
-          <a:prstGeom prst="line">
-            <a:avLst/>
-          </a:prstGeom>
-          <a:ln w="15240">
-            <a:solidFill>
-              <a:srgbClr val="282C3C"/>
-            </a:solidFill>
-            <a:tailEnd type="triangle" w="sm" len="sm"/>
-          </a:ln>
-        </p:spPr>
-        <p:style>
-          <a:lnRef idx="2">
-            <a:schemeClr val="accent1"/>
-          </a:lnRef>
-          <a:fillRef idx="0">
-            <a:schemeClr val="accent1"/>
-          </a:fillRef>
-          <a:effectRef idx="1">
-            <a:schemeClr val="accent1"/>
-          </a:effectRef>
-          <a:fontRef idx="minor">
-            <a:schemeClr val="tx1"/>
-          </a:fontRef>
-        </p:style>
-      </p:cxnSp>
-      <p:sp>
-        <p:nvSpPr>
-          <p:cNvPr id="38" name="FIG_E_bb_c4"/>
-          <p:cNvSpPr/>
-          <p:nvPr/>
-        </p:nvSpPr>
-        <p:spPr>
-          <a:xfrm>
-            <a:off x="3143250" y="2071687"/>
-            <a:ext cx="460375" cy="349250"/>
-          </a:xfrm>
-          <a:prstGeom prst="roundRect">
-            <a:avLst>
-              <a:gd name="adj" fmla="val 8000"/>
-            </a:avLst>
-          </a:prstGeom>
-          <a:solidFill>
-            <a:srgbClr val="F5F8FF"/>
-          </a:solidFill>
-          <a:ln w="17780">
-            <a:solidFill>
-              <a:srgbClr val="2550D8"/>
-            </a:solidFill>
-          </a:ln>
-          <a:effectLst/>
-        </p:spPr>
-        <p:style>
-          <a:lnRef idx="1">
-            <a:schemeClr val="accent1"/>
-          </a:lnRef>
-          <a:fillRef idx="3">
-            <a:schemeClr val="accent1"/>
-          </a:fillRef>
-          <a:effectRef idx="0">
-            <a:schemeClr val="accent1"/>
-          </a:effectRef>
-          <a:fontRef idx="minor">
-            <a:schemeClr val="lt1"/>
-          </a:fontRef>
-        </p:style>
-        <p:txBody>
-          <a:bodyPr rtlCol="0" anchor="ctr"/>
-          <a:lstStyle/>
-          <a:p>
-            <a:pPr algn="ctr"/>
-          </a:p>
-        </p:txBody>
-      </p:sp>
-      <p:sp>
-        <p:nvSpPr>
-          <p:cNvPr id="39" name="FIG_T_bb_c4"/>
-          <p:cNvSpPr txBox="1"/>
-          <p:nvPr/>
-        </p:nvSpPr>
-        <p:spPr>
-          <a:xfrm>
-            <a:off x="3143250" y="2103437"/>
-            <a:ext cx="460375" cy="158750"/>
-          </a:xfrm>
-          <a:prstGeom prst="rect">
-            <a:avLst/>
-          </a:prstGeom>
-          <a:noFill/>
-          <a:effectLst/>
-        </p:spPr>
-        <p:txBody>
-          <a:bodyPr wrap="square" lIns="0" rIns="0" tIns="0" bIns="0" anchor="ctr">
-            <a:spAutoFit/>
-          </a:bodyPr>
-          <a:lstStyle/>
-          <a:p>
-            <a:pPr algn="ctr"/>
-            <a:r>
-              <a:rPr sz="1000" b="1">
-                <a:solidFill>
-                  <a:srgbClr val="2550D8"/>
-                </a:solidFill>
-                <a:latin typeface="PingFang SC"/>
-              </a:rPr>
-              <a:t>C4</a:t>
-            </a:r>
-          </a:p>
-        </p:txBody>
-      </p:sp>
-      <p:sp>
-        <p:nvSpPr>
-          <p:cNvPr id="40" name="FIG_T_bb_c4_dim"/>
-          <p:cNvSpPr txBox="1"/>
-          <p:nvPr/>
-        </p:nvSpPr>
-        <p:spPr>
-          <a:xfrm>
-            <a:off x="3143250" y="2246312"/>
-            <a:ext cx="460375" cy="142875"/>
-          </a:xfrm>
-          <a:prstGeom prst="rect">
-            <a:avLst/>
-          </a:prstGeom>
-          <a:noFill/>
-          <a:effectLst/>
-        </p:spPr>
-        <p:txBody>
-          <a:bodyPr wrap="square" lIns="0" rIns="0" tIns="0" bIns="0" anchor="ctr">
-            <a:spAutoFit/>
-          </a:bodyPr>
-          <a:lstStyle/>
-          <a:p>
-            <a:pPr algn="ctr"/>
-            <a:r>
-              <a:rPr sz="800" b="0">
-                <a:solidFill>
-                  <a:srgbClr val="2550D8"/>
-                </a:solidFill>
-                <a:latin typeface="PingFang SC"/>
-              </a:rPr>
-              <a:t>40×C</a:t>
-            </a:r>
-          </a:p>
-        </p:txBody>
-      </p:sp>
-      <p:cxnSp>
-        <p:nvCxnSpPr>
-          <p:cNvPr id="41" name="FIG_L_bb_to_c4"/>
-          <p:cNvCxnSpPr/>
-          <p:nvPr/>
-        </p:nvCxnSpPr>
-        <p:spPr>
-          <a:xfrm>
-            <a:off x="2635250" y="2246312"/>
-            <a:ext cx="508000" cy="0"/>
-          </a:xfrm>
-          <a:prstGeom prst="line">
-            <a:avLst/>
-          </a:prstGeom>
-          <a:ln w="15240">
-            <a:solidFill>
-              <a:srgbClr val="282C3C"/>
-            </a:solidFill>
-            <a:tailEnd type="triangle" w="sm" len="sm"/>
-          </a:ln>
-        </p:spPr>
-        <p:style>
-          <a:lnRef idx="2">
-            <a:schemeClr val="accent1"/>
-          </a:lnRef>
-          <a:fillRef idx="0">
-            <a:schemeClr val="accent1"/>
-          </a:fillRef>
-          <a:effectRef idx="1">
-            <a:schemeClr val="accent1"/>
-          </a:effectRef>
-          <a:fontRef idx="minor">
-            <a:schemeClr val="tx1"/>
-          </a:fontRef>
-        </p:style>
-      </p:cxnSp>
-      <p:sp>
-        <p:nvSpPr>
-          <p:cNvPr id="42" name="FIG_E_bb_c3"/>
-          <p:cNvSpPr/>
-          <p:nvPr/>
-        </p:nvSpPr>
-        <p:spPr>
-          <a:xfrm>
-            <a:off x="3143250" y="2698750"/>
-            <a:ext cx="460375" cy="349250"/>
-          </a:xfrm>
-          <a:prstGeom prst="roundRect">
-            <a:avLst>
-              <a:gd name="adj" fmla="val 8000"/>
-            </a:avLst>
-          </a:prstGeom>
-          <a:solidFill>
-            <a:srgbClr val="F5F8FF"/>
-          </a:solidFill>
-          <a:ln w="17780">
-            <a:solidFill>
-              <a:srgbClr val="E03A26"/>
-            </a:solidFill>
-          </a:ln>
-          <a:effectLst/>
-        </p:spPr>
-        <p:style>
-          <a:lnRef idx="1">
-            <a:schemeClr val="accent1"/>
-          </a:lnRef>
-          <a:fillRef idx="3">
-            <a:schemeClr val="accent1"/>
-          </a:fillRef>
-          <a:effectRef idx="0">
-            <a:schemeClr val="accent1"/>
-          </a:effectRef>
-          <a:fontRef idx="minor">
-            <a:schemeClr val="lt1"/>
-          </a:fontRef>
-        </p:style>
-        <p:txBody>
-          <a:bodyPr rtlCol="0" anchor="ctr"/>
-          <a:lstStyle/>
-          <a:p>
-            <a:pPr algn="ctr"/>
-          </a:p>
-        </p:txBody>
-      </p:sp>
-      <p:sp>
-        <p:nvSpPr>
-          <p:cNvPr id="43" name="FIG_T_bb_c3"/>
-          <p:cNvSpPr txBox="1"/>
-          <p:nvPr/>
-        </p:nvSpPr>
-        <p:spPr>
-          <a:xfrm>
-            <a:off x="3143250" y="2730500"/>
-            <a:ext cx="460375" cy="158750"/>
-          </a:xfrm>
-          <a:prstGeom prst="rect">
-            <a:avLst/>
-          </a:prstGeom>
-          <a:noFill/>
-          <a:effectLst/>
-        </p:spPr>
-        <p:txBody>
-          <a:bodyPr wrap="square" lIns="0" rIns="0" tIns="0" bIns="0" anchor="ctr">
-            <a:spAutoFit/>
-          </a:bodyPr>
-          <a:lstStyle/>
-          <a:p>
-            <a:pPr algn="ctr"/>
-            <a:r>
-              <a:rPr sz="1000" b="1">
-                <a:solidFill>
-                  <a:srgbClr val="E03A26"/>
-                </a:solidFill>
-                <a:latin typeface="PingFang SC"/>
-              </a:rPr>
-              <a:t>C3</a:t>
-            </a:r>
-          </a:p>
-        </p:txBody>
-      </p:sp>
-      <p:sp>
-        <p:nvSpPr>
-          <p:cNvPr id="44" name="FIG_T_bb_c3_dim"/>
-          <p:cNvSpPr txBox="1"/>
-          <p:nvPr/>
-        </p:nvSpPr>
-        <p:spPr>
-          <a:xfrm>
-            <a:off x="3143250" y="2873375"/>
-            <a:ext cx="460375" cy="142875"/>
-          </a:xfrm>
-          <a:prstGeom prst="rect">
-            <a:avLst/>
-          </a:prstGeom>
-          <a:noFill/>
-          <a:effectLst/>
-        </p:spPr>
-        <p:txBody>
-          <a:bodyPr wrap="square" lIns="0" rIns="0" tIns="0" bIns="0" anchor="ctr">
-            <a:spAutoFit/>
-          </a:bodyPr>
-          <a:lstStyle/>
-          <a:p>
-            <a:pPr algn="ctr"/>
-            <a:r>
-              <a:rPr sz="800" b="0">
-                <a:solidFill>
-                  <a:srgbClr val="E03A26"/>
-                </a:solidFill>
-                <a:latin typeface="PingFang SC"/>
-              </a:rPr>
-              <a:t>80×C</a:t>
-            </a:r>
-          </a:p>
-        </p:txBody>
-      </p:sp>
-      <p:cxnSp>
-        <p:nvCxnSpPr>
-          <p:cNvPr id="45" name="FIG_L_bb_to_c3"/>
-          <p:cNvCxnSpPr/>
-          <p:nvPr/>
-        </p:nvCxnSpPr>
-        <p:spPr>
-          <a:xfrm>
-            <a:off x="2651125" y="2873375"/>
-            <a:ext cx="492125" cy="0"/>
-          </a:xfrm>
-          <a:prstGeom prst="line">
-            <a:avLst/>
-          </a:prstGeom>
-          <a:ln w="15240">
-            <a:solidFill>
-              <a:srgbClr val="282C3C"/>
-            </a:solidFill>
-            <a:tailEnd type="triangle" w="sm" len="sm"/>
-          </a:ln>
-        </p:spPr>
-        <p:style>
-          <a:lnRef idx="2">
-            <a:schemeClr val="accent1"/>
-          </a:lnRef>
-          <a:fillRef idx="0">
-            <a:schemeClr val="accent1"/>
-          </a:fillRef>
-          <a:effectRef idx="1">
-            <a:schemeClr val="accent1"/>
-          </a:effectRef>
-          <a:fontRef idx="minor">
-            <a:schemeClr val="tx1"/>
-          </a:fontRef>
-        </p:style>
-      </p:cxnSp>
-      <p:sp>
-        <p:nvSpPr>
-          <p:cNvPr id="46" name="FIG_E_bb_outbar"/>
-          <p:cNvSpPr/>
-          <p:nvPr/>
-        </p:nvSpPr>
-        <p:spPr>
-          <a:xfrm>
-            <a:off x="1905000" y="3857625"/>
-            <a:ext cx="1714500" cy="238125"/>
-          </a:xfrm>
-          <a:prstGeom prst="roundRect">
-            <a:avLst>
-              <a:gd name="adj" fmla="val 8000"/>
-            </a:avLst>
-          </a:prstGeom>
-          <a:solidFill>
             <a:srgbClr val="EBF1FF"/>
           </a:solidFill>
           <a:ln w="10160">
@@ -5304,13 +5517,13 @@
       </p:sp>
       <p:sp>
         <p:nvSpPr>
-          <p:cNvPr id="47" name="FIG_T_bb_outbar"/>
+          <p:cNvPr id="53" name="FIG_T_bb_outbar"/>
           <p:cNvSpPr txBox="1"/>
           <p:nvPr/>
         </p:nvSpPr>
         <p:spPr>
           <a:xfrm>
-            <a:off x="1905000" y="3889375"/>
+            <a:off x="1905000" y="3984625"/>
             <a:ext cx="1714500" cy="174625"/>
           </a:xfrm>
           <a:prstGeom prst="rect">
@@ -5340,7 +5553,7 @@
       </p:sp>
       <p:sp>
         <p:nvSpPr>
-          <p:cNvPr id="48" name="FIG_T_neck_title"/>
+          <p:cNvPr id="54" name="FIG_T_neck_title"/>
           <p:cNvSpPr txBox="1"/>
           <p:nvPr/>
         </p:nvSpPr>
@@ -5376,7 +5589,7 @@
       </p:sp>
       <p:sp>
         <p:nvSpPr>
-          <p:cNvPr id="49" name="FIG_E_neck_td"/>
+          <p:cNvPr id="55" name="FIG_E_neck_td"/>
           <p:cNvSpPr/>
           <p:nvPr/>
         </p:nvSpPr>
@@ -5424,7 +5637,7 @@
       </p:sp>
       <p:sp>
         <p:nvSpPr>
-          <p:cNvPr id="50" name="FIG_T_neck_td"/>
+          <p:cNvPr id="56" name="FIG_T_neck_td"/>
           <p:cNvSpPr txBox="1"/>
           <p:nvPr/>
         </p:nvSpPr>
@@ -5460,7 +5673,7 @@
       </p:sp>
       <p:sp>
         <p:nvSpPr>
-          <p:cNvPr id="51" name="FIG_E_neck_bu"/>
+          <p:cNvPr id="57" name="FIG_E_neck_bu"/>
           <p:cNvSpPr/>
           <p:nvPr/>
         </p:nvSpPr>
@@ -5508,7 +5721,7 @@
       </p:sp>
       <p:sp>
         <p:nvSpPr>
-          <p:cNvPr id="52" name="FIG_T_neck_bu"/>
+          <p:cNvPr id="58" name="FIG_T_neck_bu"/>
           <p:cNvSpPr txBox="1"/>
           <p:nvPr/>
         </p:nvSpPr>
@@ -5544,7 +5757,7 @@
       </p:sp>
       <p:sp>
         <p:nvSpPr>
-          <p:cNvPr id="53" name="FIG_E_neck_c5"/>
+          <p:cNvPr id="59" name="FIG_E_neck_c5"/>
           <p:cNvSpPr/>
           <p:nvPr/>
         </p:nvSpPr>
@@ -5592,7 +5805,7 @@
       </p:sp>
       <p:sp>
         <p:nvSpPr>
-          <p:cNvPr id="54" name="FIG_T_neck_c5"/>
+          <p:cNvPr id="60" name="FIG_T_neck_c5"/>
           <p:cNvSpPr txBox="1"/>
           <p:nvPr/>
         </p:nvSpPr>
@@ -5628,7 +5841,7 @@
       </p:sp>
       <p:sp>
         <p:nvSpPr>
-          <p:cNvPr id="55" name="FIG_E_neck_c4"/>
+          <p:cNvPr id="61" name="FIG_E_neck_c4"/>
           <p:cNvSpPr/>
           <p:nvPr/>
         </p:nvSpPr>
@@ -5676,7 +5889,7 @@
       </p:sp>
       <p:sp>
         <p:nvSpPr>
-          <p:cNvPr id="56" name="FIG_T_neck_c4"/>
+          <p:cNvPr id="62" name="FIG_T_neck_c4"/>
           <p:cNvSpPr txBox="1"/>
           <p:nvPr/>
         </p:nvSpPr>
@@ -5712,7 +5925,7 @@
       </p:sp>
       <p:sp>
         <p:nvSpPr>
-          <p:cNvPr id="57" name="FIG_E_neck_c3"/>
+          <p:cNvPr id="63" name="FIG_E_neck_c3"/>
           <p:cNvSpPr/>
           <p:nvPr/>
         </p:nvSpPr>
@@ -5760,7 +5973,7 @@
       </p:sp>
       <p:sp>
         <p:nvSpPr>
-          <p:cNvPr id="58" name="FIG_T_neck_c3"/>
+          <p:cNvPr id="64" name="FIG_T_neck_c3"/>
           <p:cNvSpPr txBox="1"/>
           <p:nvPr/>
         </p:nvSpPr>
@@ -5796,7 +6009,7 @@
       </p:sp>
       <p:sp>
         <p:nvSpPr>
-          <p:cNvPr id="59" name="FIG_E_neck_up1"/>
+          <p:cNvPr id="65" name="FIG_E_neck_up1"/>
           <p:cNvSpPr/>
           <p:nvPr/>
         </p:nvSpPr>
@@ -5842,7 +6055,7 @@
       </p:sp>
       <p:sp>
         <p:nvSpPr>
-          <p:cNvPr id="60" name="FIG_E_neck_up1_text"/>
+          <p:cNvPr id="66" name="FIG_E_neck_up1_text"/>
           <p:cNvSpPr txBox="1"/>
           <p:nvPr/>
         </p:nvSpPr>
@@ -5879,7 +6092,7 @@
       </p:sp>
       <p:sp>
         <p:nvSpPr>
-          <p:cNvPr id="61" name="FIG_E_neck_up2"/>
+          <p:cNvPr id="67" name="FIG_E_neck_up2"/>
           <p:cNvSpPr/>
           <p:nvPr/>
         </p:nvSpPr>
@@ -5925,7 +6138,7 @@
       </p:sp>
       <p:sp>
         <p:nvSpPr>
-          <p:cNvPr id="62" name="FIG_E_neck_up2_text"/>
+          <p:cNvPr id="68" name="FIG_E_neck_up2_text"/>
           <p:cNvSpPr txBox="1"/>
           <p:nvPr/>
         </p:nvSpPr>
@@ -5962,7 +6175,7 @@
       </p:sp>
       <p:sp>
         <p:nvSpPr>
-          <p:cNvPr id="63" name="FIG_E_neck_add_td1"/>
+          <p:cNvPr id="69" name="FIG_E_neck_add_td1"/>
           <p:cNvSpPr/>
           <p:nvPr/>
         </p:nvSpPr>
@@ -6008,7 +6221,7 @@
       </p:sp>
       <p:sp>
         <p:nvSpPr>
-          <p:cNvPr id="64" name="FIG_E_neck_add_td1_text"/>
+          <p:cNvPr id="70" name="FIG_E_neck_add_td1_text"/>
           <p:cNvSpPr txBox="1"/>
           <p:nvPr/>
         </p:nvSpPr>
@@ -6044,7 +6257,7 @@
       </p:sp>
       <p:sp>
         <p:nvSpPr>
-          <p:cNvPr id="65" name="FIG_E_neck_add_td2"/>
+          <p:cNvPr id="71" name="FIG_E_neck_add_td2"/>
           <p:cNvSpPr/>
           <p:nvPr/>
         </p:nvSpPr>
@@ -6090,7 +6303,7 @@
       </p:sp>
       <p:sp>
         <p:nvSpPr>
-          <p:cNvPr id="66" name="FIG_E_neck_add_td2_text"/>
+          <p:cNvPr id="72" name="FIG_E_neck_add_td2_text"/>
           <p:cNvSpPr txBox="1"/>
           <p:nvPr/>
         </p:nvSpPr>
@@ -6126,7 +6339,7 @@
       </p:sp>
       <p:sp>
         <p:nvSpPr>
-          <p:cNvPr id="67" name="FIG_E_neck_fusion1"/>
+          <p:cNvPr id="73" name="FIG_E_neck_fusion1"/>
           <p:cNvSpPr/>
           <p:nvPr/>
         </p:nvSpPr>
@@ -6174,7 +6387,7 @@
       </p:sp>
       <p:sp>
         <p:nvSpPr>
-          <p:cNvPr id="68" name="FIG_T_neck_fusion1"/>
+          <p:cNvPr id="74" name="FIG_T_neck_fusion1"/>
           <p:cNvSpPr txBox="1"/>
           <p:nvPr/>
         </p:nvSpPr>
@@ -6210,7 +6423,7 @@
       </p:sp>
       <p:sp>
         <p:nvSpPr>
-          <p:cNvPr id="69" name="FIG_E_neck_fusion2"/>
+          <p:cNvPr id="75" name="FIG_E_neck_fusion2"/>
           <p:cNvSpPr/>
           <p:nvPr/>
         </p:nvSpPr>
@@ -6258,7 +6471,7 @@
       </p:sp>
       <p:sp>
         <p:nvSpPr>
-          <p:cNvPr id="70" name="FIG_T_neck_fusion2"/>
+          <p:cNvPr id="76" name="FIG_T_neck_fusion2"/>
           <p:cNvSpPr txBox="1"/>
           <p:nvPr/>
         </p:nvSpPr>
@@ -6294,7 +6507,7 @@
       </p:sp>
       <p:sp>
         <p:nvSpPr>
-          <p:cNvPr id="71" name="FIG_E_neck_add_p5"/>
+          <p:cNvPr id="77" name="FIG_E_neck_add_p5"/>
           <p:cNvSpPr/>
           <p:nvPr/>
         </p:nvSpPr>
@@ -6340,7 +6553,7 @@
       </p:sp>
       <p:sp>
         <p:nvSpPr>
-          <p:cNvPr id="72" name="FIG_E_neck_add_p5_text"/>
+          <p:cNvPr id="78" name="FIG_E_neck_add_p5_text"/>
           <p:cNvSpPr txBox="1"/>
           <p:nvPr/>
         </p:nvSpPr>
@@ -6376,7 +6589,7 @@
       </p:sp>
       <p:sp>
         <p:nvSpPr>
-          <p:cNvPr id="73" name="FIG_E_neck_add_p4"/>
+          <p:cNvPr id="79" name="FIG_E_neck_add_p4"/>
           <p:cNvSpPr/>
           <p:nvPr/>
         </p:nvSpPr>
@@ -6422,7 +6635,7 @@
       </p:sp>
       <p:sp>
         <p:nvSpPr>
-          <p:cNvPr id="74" name="FIG_E_neck_add_p4_text"/>
+          <p:cNvPr id="80" name="FIG_E_neck_add_p4_text"/>
           <p:cNvSpPr txBox="1"/>
           <p:nvPr/>
         </p:nvSpPr>
@@ -6458,7 +6671,7 @@
       </p:sp>
       <p:sp>
         <p:nvSpPr>
-          <p:cNvPr id="75" name="FIG_E_neck_add_p3"/>
+          <p:cNvPr id="81" name="FIG_E_neck_add_p3"/>
           <p:cNvSpPr/>
           <p:nvPr/>
         </p:nvSpPr>
@@ -6504,7 +6717,7 @@
       </p:sp>
       <p:sp>
         <p:nvSpPr>
-          <p:cNvPr id="76" name="FIG_E_neck_add_p3_text"/>
+          <p:cNvPr id="82" name="FIG_E_neck_add_p3_text"/>
           <p:cNvSpPr txBox="1"/>
           <p:nvPr/>
         </p:nvSpPr>
@@ -6540,7 +6753,7 @@
       </p:sp>
       <p:sp>
         <p:nvSpPr>
-          <p:cNvPr id="77" name="FIG_E_neck_down1"/>
+          <p:cNvPr id="83" name="FIG_E_neck_down1"/>
           <p:cNvSpPr/>
           <p:nvPr/>
         </p:nvSpPr>
@@ -6586,7 +6799,7 @@
       </p:sp>
       <p:sp>
         <p:nvSpPr>
-          <p:cNvPr id="78" name="FIG_E_neck_down1_text"/>
+          <p:cNvPr id="84" name="FIG_E_neck_down1_text"/>
           <p:cNvSpPr txBox="1"/>
           <p:nvPr/>
         </p:nvSpPr>
@@ -6623,7 +6836,7 @@
       </p:sp>
       <p:sp>
         <p:nvSpPr>
-          <p:cNvPr id="79" name="FIG_E_neck_down2"/>
+          <p:cNvPr id="85" name="FIG_E_neck_down2"/>
           <p:cNvSpPr/>
           <p:nvPr/>
         </p:nvSpPr>
@@ -6669,7 +6882,7 @@
       </p:sp>
       <p:sp>
         <p:nvSpPr>
-          <p:cNvPr id="80" name="FIG_E_neck_down2_text"/>
+          <p:cNvPr id="86" name="FIG_E_neck_down2_text"/>
           <p:cNvSpPr txBox="1"/>
           <p:nvPr/>
         </p:nvSpPr>
@@ -6706,7 +6919,7 @@
       </p:sp>
       <p:sp>
         <p:nvSpPr>
-          <p:cNvPr id="81" name="FIG_E_neck_losc"/>
+          <p:cNvPr id="87" name="FIG_E_neck_losc"/>
           <p:cNvSpPr/>
           <p:nvPr/>
         </p:nvSpPr>
@@ -6754,7 +6967,7 @@
       </p:sp>
       <p:sp>
         <p:nvSpPr>
-          <p:cNvPr id="82" name="FIG_T_neck_losc"/>
+          <p:cNvPr id="88" name="FIG_T_neck_losc"/>
           <p:cNvSpPr txBox="1"/>
           <p:nvPr/>
         </p:nvSpPr>
@@ -6790,7 +7003,7 @@
       </p:sp>
       <p:sp>
         <p:nvSpPr>
-          <p:cNvPr id="83" name="FIG_E_neck_p5_top"/>
+          <p:cNvPr id="89" name="FIG_E_neck_p5_top"/>
           <p:cNvSpPr/>
           <p:nvPr/>
         </p:nvSpPr>
@@ -6857,7 +7070,7 @@
       </p:sp>
       <p:sp>
         <p:nvSpPr>
-          <p:cNvPr id="84" name="FIG_E_neck_p5_front"/>
+          <p:cNvPr id="90" name="FIG_E_neck_p5_front"/>
           <p:cNvSpPr/>
           <p:nvPr/>
         </p:nvSpPr>
@@ -6932,7 +7145,7 @@
       </p:sp>
       <p:sp>
         <p:nvSpPr>
-          <p:cNvPr id="85" name="FIG_E_neck_p5_right"/>
+          <p:cNvPr id="91" name="FIG_E_neck_p5_right"/>
           <p:cNvSpPr/>
           <p:nvPr/>
         </p:nvSpPr>
@@ -6999,7 +7212,7 @@
       </p:sp>
       <p:sp>
         <p:nvSpPr>
-          <p:cNvPr id="86" name="FIG_T_neck_p5"/>
+          <p:cNvPr id="92" name="FIG_T_neck_p5"/>
           <p:cNvSpPr txBox="1"/>
           <p:nvPr/>
         </p:nvSpPr>
@@ -7035,7 +7248,7 @@
       </p:sp>
       <p:sp>
         <p:nvSpPr>
-          <p:cNvPr id="87" name="FIG_T_neck_p5_dim"/>
+          <p:cNvPr id="93" name="FIG_T_neck_p5_dim"/>
           <p:cNvSpPr txBox="1"/>
           <p:nvPr/>
         </p:nvSpPr>
@@ -7071,7 +7284,7 @@
       </p:sp>
       <p:sp>
         <p:nvSpPr>
-          <p:cNvPr id="88" name="FIG_E_neck_p4_top"/>
+          <p:cNvPr id="94" name="FIG_E_neck_p4_top"/>
           <p:cNvSpPr/>
           <p:nvPr/>
         </p:nvSpPr>
@@ -7138,7 +7351,7 @@
       </p:sp>
       <p:sp>
         <p:nvSpPr>
-          <p:cNvPr id="89" name="FIG_E_neck_p4_front"/>
+          <p:cNvPr id="95" name="FIG_E_neck_p4_front"/>
           <p:cNvSpPr/>
           <p:nvPr/>
         </p:nvSpPr>
@@ -7213,7 +7426,7 @@
       </p:sp>
       <p:sp>
         <p:nvSpPr>
-          <p:cNvPr id="90" name="FIG_E_neck_p4_right"/>
+          <p:cNvPr id="96" name="FIG_E_neck_p4_right"/>
           <p:cNvSpPr/>
           <p:nvPr/>
         </p:nvSpPr>
@@ -7280,7 +7493,7 @@
       </p:sp>
       <p:sp>
         <p:nvSpPr>
-          <p:cNvPr id="91" name="FIG_T_neck_p4"/>
+          <p:cNvPr id="97" name="FIG_T_neck_p4"/>
           <p:cNvSpPr txBox="1"/>
           <p:nvPr/>
         </p:nvSpPr>
@@ -7316,7 +7529,7 @@
       </p:sp>
       <p:sp>
         <p:nvSpPr>
-          <p:cNvPr id="92" name="FIG_T_neck_p4_dim"/>
+          <p:cNvPr id="98" name="FIG_T_neck_p4_dim"/>
           <p:cNvSpPr txBox="1"/>
           <p:nvPr/>
         </p:nvSpPr>
@@ -7352,7 +7565,7 @@
       </p:sp>
       <p:sp>
         <p:nvSpPr>
-          <p:cNvPr id="93" name="FIG_E_neck_p3_top"/>
+          <p:cNvPr id="99" name="FIG_E_neck_p3_top"/>
           <p:cNvSpPr/>
           <p:nvPr/>
         </p:nvSpPr>
@@ -7419,7 +7632,7 @@
       </p:sp>
       <p:sp>
         <p:nvSpPr>
-          <p:cNvPr id="94" name="FIG_E_neck_p3_front"/>
+          <p:cNvPr id="100" name="FIG_E_neck_p3_front"/>
           <p:cNvSpPr/>
           <p:nvPr/>
         </p:nvSpPr>
@@ -7494,7 +7707,7 @@
       </p:sp>
       <p:sp>
         <p:nvSpPr>
-          <p:cNvPr id="95" name="FIG_E_neck_p3_right"/>
+          <p:cNvPr id="101" name="FIG_E_neck_p3_right"/>
           <p:cNvSpPr/>
           <p:nvPr/>
         </p:nvSpPr>
@@ -7561,7 +7774,7 @@
       </p:sp>
       <p:sp>
         <p:nvSpPr>
-          <p:cNvPr id="96" name="FIG_T_neck_p3"/>
+          <p:cNvPr id="102" name="FIG_T_neck_p3"/>
           <p:cNvSpPr txBox="1"/>
           <p:nvPr/>
         </p:nvSpPr>
@@ -7597,7 +7810,7 @@
       </p:sp>
       <p:sp>
         <p:nvSpPr>
-          <p:cNvPr id="97" name="FIG_T_neck_p3_dim"/>
+          <p:cNvPr id="103" name="FIG_T_neck_p3_dim"/>
           <p:cNvSpPr txBox="1"/>
           <p:nvPr/>
         </p:nvSpPr>
@@ -7633,7 +7846,7 @@
       </p:sp>
       <p:cxnSp>
         <p:nvCxnSpPr>
-          <p:cNvPr id="98" name="FIG_L_neck_c5_up"/>
+          <p:cNvPr id="104" name="FIG_L_neck_c5_up"/>
           <p:cNvCxnSpPr/>
           <p:nvPr/>
         </p:nvCxnSpPr>
@@ -7669,7 +7882,7 @@
       </p:cxnSp>
       <p:cxnSp>
         <p:nvCxnSpPr>
-          <p:cNvPr id="99" name="FIG_L_neck_up1_add"/>
+          <p:cNvPr id="105" name="FIG_L_neck_up1_add"/>
           <p:cNvCxnSpPr/>
           <p:nvPr/>
         </p:nvCxnSpPr>
@@ -7705,7 +7918,7 @@
       </p:cxnSp>
       <p:cxnSp>
         <p:nvCxnSpPr>
-          <p:cNvPr id="100" name="FIG_L_neck_c4_add"/>
+          <p:cNvPr id="106" name="FIG_L_neck_c4_add"/>
           <p:cNvCxnSpPr/>
           <p:nvPr/>
         </p:nvCxnSpPr>
@@ -7741,7 +7954,7 @@
       </p:cxnSp>
       <p:cxnSp>
         <p:nvCxnSpPr>
-          <p:cNvPr id="101" name="FIG_L_neck_add1_fusion"/>
+          <p:cNvPr id="107" name="FIG_L_neck_add1_fusion"/>
           <p:cNvCxnSpPr/>
           <p:nvPr/>
         </p:nvCxnSpPr>
@@ -7777,7 +7990,7 @@
       </p:cxnSp>
       <p:cxnSp>
         <p:nvCxnSpPr>
-          <p:cNvPr id="102" name="FIG_L_neck_up2_add"/>
+          <p:cNvPr id="108" name="FIG_L_neck_up2_add"/>
           <p:cNvCxnSpPr/>
           <p:nvPr/>
         </p:nvCxnSpPr>
@@ -7813,7 +8026,7 @@
       </p:cxnSp>
       <p:cxnSp>
         <p:nvCxnSpPr>
-          <p:cNvPr id="103" name="FIG_L_neck_c3_add"/>
+          <p:cNvPr id="109" name="FIG_L_neck_c3_add"/>
           <p:cNvCxnSpPr/>
           <p:nvPr/>
         </p:nvCxnSpPr>
@@ -7849,7 +8062,7 @@
       </p:cxnSp>
       <p:cxnSp>
         <p:nvCxnSpPr>
-          <p:cNvPr id="104" name="FIG_L_neck_add2_fusion"/>
+          <p:cNvPr id="110" name="FIG_L_neck_add2_fusion"/>
           <p:cNvCxnSpPr/>
           <p:nvPr/>
         </p:nvCxnSpPr>
@@ -7885,7 +8098,7 @@
       </p:cxnSp>
       <p:cxnSp>
         <p:nvCxnSpPr>
-          <p:cNvPr id="105" name="FIG_L_neck_addp5_cube"/>
+          <p:cNvPr id="111" name="FIG_L_neck_addp5_cube"/>
           <p:cNvCxnSpPr/>
           <p:nvPr/>
         </p:nvCxnSpPr>
@@ -7921,7 +8134,7 @@
       </p:cxnSp>
       <p:cxnSp>
         <p:nvCxnSpPr>
-          <p:cNvPr id="106" name="FIG_L_neck_addp4_cube"/>
+          <p:cNvPr id="112" name="FIG_L_neck_addp4_cube"/>
           <p:cNvCxnSpPr/>
           <p:nvPr/>
         </p:nvCxnSpPr>
@@ -7957,7 +8170,7 @@
       </p:cxnSp>
       <p:cxnSp>
         <p:nvCxnSpPr>
-          <p:cNvPr id="107" name="FIG_L_neck_addp3_cube"/>
+          <p:cNvPr id="113" name="FIG_L_neck_addp3_cube"/>
           <p:cNvCxnSpPr/>
           <p:nvPr/>
         </p:nvCxnSpPr>
@@ -7993,7 +8206,7 @@
       </p:cxnSp>
       <p:cxnSp>
         <p:nvCxnSpPr>
-          <p:cNvPr id="108" name="FIG_L_neck_addp5_down"/>
+          <p:cNvPr id="114" name="FIG_L_neck_addp5_down"/>
           <p:cNvCxnSpPr/>
           <p:nvPr/>
         </p:nvCxnSpPr>
@@ -8029,7 +8242,7 @@
       </p:cxnSp>
       <p:cxnSp>
         <p:nvCxnSpPr>
-          <p:cNvPr id="109" name="FIG_L_neck_down_losc"/>
+          <p:cNvPr id="115" name="FIG_L_neck_down_losc"/>
           <p:cNvCxnSpPr/>
           <p:nvPr/>
         </p:nvCxnSpPr>
@@ -8065,7 +8278,7 @@
       </p:cxnSp>
       <p:cxnSp>
         <p:nvCxnSpPr>
-          <p:cNvPr id="110" name="FIG_L_neck_losc_addp4"/>
+          <p:cNvPr id="116" name="FIG_L_neck_losc_addp4"/>
           <p:cNvCxnSpPr/>
           <p:nvPr/>
         </p:nvCxnSpPr>
@@ -8101,7 +8314,7 @@
       </p:cxnSp>
       <p:cxnSp>
         <p:nvCxnSpPr>
-          <p:cNvPr id="111" name="FIG_L_neck_addp4_down2"/>
+          <p:cNvPr id="117" name="FIG_L_neck_addp4_down2"/>
           <p:cNvCxnSpPr/>
           <p:nvPr/>
         </p:nvCxnSpPr>
@@ -8137,7 +8350,7 @@
       </p:cxnSp>
       <p:cxnSp>
         <p:nvCxnSpPr>
-          <p:cNvPr id="112" name="FIG_L_neck_down2_addp3"/>
+          <p:cNvPr id="118" name="FIG_L_neck_down2_addp3"/>
           <p:cNvCxnSpPr/>
           <p:nvPr/>
         </p:nvCxnSpPr>
@@ -8173,7 +8386,7 @@
       </p:cxnSp>
       <p:cxnSp>
         <p:nvCxnSpPr>
-          <p:cNvPr id="113" name="FIG_LD_fusion1_addp5_1"/>
+          <p:cNvPr id="119" name="FIG_LD_fusion1_addp5_1"/>
           <p:cNvCxnSpPr/>
           <p:nvPr/>
         </p:nvCxnSpPr>
@@ -8209,7 +8422,7 @@
       </p:cxnSp>
       <p:cxnSp>
         <p:nvCxnSpPr>
-          <p:cNvPr id="114" name="FIG_LD_fusion1_addp5_2"/>
+          <p:cNvPr id="120" name="FIG_LD_fusion1_addp5_2"/>
           <p:cNvCxnSpPr/>
           <p:nvPr/>
         </p:nvCxnSpPr>
@@ -8245,7 +8458,7 @@
       </p:cxnSp>
       <p:cxnSp>
         <p:nvCxnSpPr>
-          <p:cNvPr id="115" name="FIG_LD_fusion1_addp5_3"/>
+          <p:cNvPr id="121" name="FIG_LD_fusion1_addp5_3"/>
           <p:cNvCxnSpPr/>
           <p:nvPr/>
         </p:nvCxnSpPr>
@@ -8282,7 +8495,7 @@
       </p:cxnSp>
       <p:cxnSp>
         <p:nvCxnSpPr>
-          <p:cNvPr id="116" name="FIG_LD_fusion2_addp3_1"/>
+          <p:cNvPr id="122" name="FIG_LD_fusion2_addp3_1"/>
           <p:cNvCxnSpPr/>
           <p:nvPr/>
         </p:nvCxnSpPr>
@@ -8318,7 +8531,7 @@
       </p:cxnSp>
       <p:cxnSp>
         <p:nvCxnSpPr>
-          <p:cNvPr id="117" name="FIG_LD_fusion2_addp3_2"/>
+          <p:cNvPr id="123" name="FIG_LD_fusion2_addp3_2"/>
           <p:cNvCxnSpPr/>
           <p:nvPr/>
         </p:nvCxnSpPr>
@@ -8354,7 +8567,7 @@
       </p:cxnSp>
       <p:cxnSp>
         <p:nvCxnSpPr>
-          <p:cNvPr id="118" name="FIG_LD_fusion2_addp3_3"/>
+          <p:cNvPr id="124" name="FIG_LD_fusion2_addp3_3"/>
           <p:cNvCxnSpPr/>
           <p:nvPr/>
         </p:nvCxnSpPr>
@@ -8391,7 +8604,7 @@
       </p:cxnSp>
       <p:cxnSp>
         <p:nvCxnSpPr>
-          <p:cNvPr id="119" name="FIG_LD_fusion1_fusion2_1"/>
+          <p:cNvPr id="125" name="FIG_LD_fusion1_fusion2_1"/>
           <p:cNvCxnSpPr/>
           <p:nvPr/>
         </p:nvCxnSpPr>
@@ -8428,7 +8641,7 @@
       </p:cxnSp>
       <p:sp>
         <p:nvSpPr>
-          <p:cNvPr id="120" name="FIG_E_neck_note_cga"/>
+          <p:cNvPr id="126" name="FIG_E_neck_note_cga"/>
           <p:cNvSpPr/>
           <p:nvPr/>
         </p:nvSpPr>
@@ -8476,7 +8689,7 @@
       </p:sp>
       <p:sp>
         <p:nvSpPr>
-          <p:cNvPr id="121" name="FIG_T_neck_note_cga"/>
+          <p:cNvPr id="127" name="FIG_T_neck_note_cga"/>
           <p:cNvSpPr txBox="1"/>
           <p:nvPr/>
         </p:nvSpPr>
@@ -8512,7 +8725,7 @@
       </p:sp>
       <p:sp>
         <p:nvSpPr>
-          <p:cNvPr id="122" name="FIG_E_neck_note_losc"/>
+          <p:cNvPr id="128" name="FIG_E_neck_note_losc"/>
           <p:cNvSpPr/>
           <p:nvPr/>
         </p:nvSpPr>
@@ -8560,7 +8773,7 @@
       </p:sp>
       <p:sp>
         <p:nvSpPr>
-          <p:cNvPr id="123" name="FIG_T_neck_note_losc"/>
+          <p:cNvPr id="129" name="FIG_T_neck_note_losc"/>
           <p:cNvSpPr txBox="1"/>
           <p:nvPr/>
         </p:nvSpPr>
@@ -8596,7 +8809,7 @@
       </p:sp>
       <p:sp>
         <p:nvSpPr>
-          <p:cNvPr id="124" name="FIG_T_head_title"/>
+          <p:cNvPr id="130" name="FIG_T_head_title"/>
           <p:cNvSpPr txBox="1"/>
           <p:nvPr/>
         </p:nvSpPr>
@@ -8632,7 +8845,7 @@
       </p:sp>
       <p:sp>
         <p:nvSpPr>
-          <p:cNvPr id="125" name="FIG_E_head_iou"/>
+          <p:cNvPr id="131" name="FIG_E_head_iou"/>
           <p:cNvSpPr/>
           <p:nvPr/>
         </p:nvSpPr>
@@ -8680,7 +8893,7 @@
       </p:sp>
       <p:sp>
         <p:nvSpPr>
-          <p:cNvPr id="126" name="FIG_T_head_iou"/>
+          <p:cNvPr id="132" name="FIG_T_head_iou"/>
           <p:cNvSpPr txBox="1"/>
           <p:nvPr/>
         </p:nvSpPr>
@@ -8717,7 +8930,7 @@
       </p:sp>
       <p:sp>
         <p:nvSpPr>
-          <p:cNvPr id="127" name="FIG_E_head_iou_sq_0"/>
+          <p:cNvPr id="133" name="FIG_E_head_iou_sq_0"/>
           <p:cNvSpPr/>
           <p:nvPr/>
         </p:nvSpPr>
@@ -8763,7 +8976,7 @@
       </p:sp>
       <p:sp>
         <p:nvSpPr>
-          <p:cNvPr id="128" name="FIG_E_head_iou_sq_1"/>
+          <p:cNvPr id="134" name="FIG_E_head_iou_sq_1"/>
           <p:cNvSpPr/>
           <p:nvPr/>
         </p:nvSpPr>
@@ -8809,7 +9022,7 @@
       </p:sp>
       <p:sp>
         <p:nvSpPr>
-          <p:cNvPr id="129" name="FIG_E_head_iou_sq_2"/>
+          <p:cNvPr id="135" name="FIG_E_head_iou_sq_2"/>
           <p:cNvSpPr/>
           <p:nvPr/>
         </p:nvSpPr>
@@ -8855,7 +9068,7 @@
       </p:sp>
       <p:sp>
         <p:nvSpPr>
-          <p:cNvPr id="130" name="FIG_E_head_iou_sq_3"/>
+          <p:cNvPr id="136" name="FIG_E_head_iou_sq_3"/>
           <p:cNvSpPr/>
           <p:nvPr/>
         </p:nvSpPr>
@@ -8901,7 +9114,7 @@
       </p:sp>
       <p:sp>
         <p:nvSpPr>
-          <p:cNvPr id="131" name="FIG_E_head_iou_sq_4"/>
+          <p:cNvPr id="137" name="FIG_E_head_iou_sq_4"/>
           <p:cNvSpPr/>
           <p:nvPr/>
         </p:nvSpPr>
@@ -8947,7 +9160,7 @@
       </p:sp>
       <p:sp>
         <p:nvSpPr>
-          <p:cNvPr id="132" name="FIG_E_head_iou_sq_5"/>
+          <p:cNvPr id="138" name="FIG_E_head_iou_sq_5"/>
           <p:cNvSpPr/>
           <p:nvPr/>
         </p:nvSpPr>
@@ -8993,7 +9206,7 @@
       </p:sp>
       <p:sp>
         <p:nvSpPr>
-          <p:cNvPr id="133" name="FIG_E_head_iou_sq_6"/>
+          <p:cNvPr id="139" name="FIG_E_head_iou_sq_6"/>
           <p:cNvSpPr/>
           <p:nvPr/>
         </p:nvSpPr>
@@ -9039,7 +9252,7 @@
       </p:sp>
       <p:sp>
         <p:nvSpPr>
-          <p:cNvPr id="134" name="FIG_E_head_iou_sq_dots"/>
+          <p:cNvPr id="140" name="FIG_E_head_iou_sq_dots"/>
           <p:cNvSpPr txBox="1"/>
           <p:nvPr/>
         </p:nvSpPr>
@@ -9075,7 +9288,7 @@
       </p:sp>
       <p:cxnSp>
         <p:nvCxnSpPr>
-          <p:cNvPr id="135" name="FIG_L_head_iou_dec"/>
+          <p:cNvPr id="141" name="FIG_L_head_iou_dec"/>
           <p:cNvCxnSpPr/>
           <p:nvPr/>
         </p:nvCxnSpPr>
@@ -9111,7 +9324,7 @@
       </p:cxnSp>
       <p:sp>
         <p:nvSpPr>
-          <p:cNvPr id="136" name="FIG_E_head_dec"/>
+          <p:cNvPr id="142" name="FIG_E_head_dec"/>
           <p:cNvSpPr/>
           <p:nvPr/>
         </p:nvSpPr>
@@ -9159,7 +9372,7 @@
       </p:sp>
       <p:sp>
         <p:nvSpPr>
-          <p:cNvPr id="137" name="FIG_T_head_dec"/>
+          <p:cNvPr id="143" name="FIG_T_head_dec"/>
           <p:cNvSpPr txBox="1"/>
           <p:nvPr/>
         </p:nvSpPr>
@@ -9195,7 +9408,7 @@
       </p:sp>
       <p:sp>
         <p:nvSpPr>
-          <p:cNvPr id="138" name="FIG_E_head_dec_sq_0"/>
+          <p:cNvPr id="144" name="FIG_E_head_dec_sq_0"/>
           <p:cNvSpPr/>
           <p:nvPr/>
         </p:nvSpPr>
@@ -9241,7 +9454,7 @@
       </p:sp>
       <p:sp>
         <p:nvSpPr>
-          <p:cNvPr id="139" name="FIG_E_head_dec_sq_1"/>
+          <p:cNvPr id="145" name="FIG_E_head_dec_sq_1"/>
           <p:cNvSpPr/>
           <p:nvPr/>
         </p:nvSpPr>
@@ -9287,7 +9500,7 @@
       </p:sp>
       <p:sp>
         <p:nvSpPr>
-          <p:cNvPr id="140" name="FIG_E_head_dec_sq_2"/>
+          <p:cNvPr id="146" name="FIG_E_head_dec_sq_2"/>
           <p:cNvSpPr/>
           <p:nvPr/>
         </p:nvSpPr>
@@ -9333,7 +9546,7 @@
       </p:sp>
       <p:sp>
         <p:nvSpPr>
-          <p:cNvPr id="141" name="FIG_E_head_dec_sq_3"/>
+          <p:cNvPr id="147" name="FIG_E_head_dec_sq_3"/>
           <p:cNvSpPr/>
           <p:nvPr/>
         </p:nvSpPr>
@@ -9379,7 +9592,7 @@
       </p:sp>
       <p:sp>
         <p:nvSpPr>
-          <p:cNvPr id="142" name="FIG_E_head_dec_sq_4"/>
+          <p:cNvPr id="148" name="FIG_E_head_dec_sq_4"/>
           <p:cNvSpPr/>
           <p:nvPr/>
         </p:nvSpPr>
@@ -9425,7 +9638,7 @@
       </p:sp>
       <p:sp>
         <p:nvSpPr>
-          <p:cNvPr id="143" name="FIG_E_head_dec_sq_5"/>
+          <p:cNvPr id="149" name="FIG_E_head_dec_sq_5"/>
           <p:cNvSpPr/>
           <p:nvPr/>
         </p:nvSpPr>
@@ -9471,7 +9684,7 @@
       </p:sp>
       <p:sp>
         <p:nvSpPr>
-          <p:cNvPr id="144" name="FIG_E_head_dec_sq_dots"/>
+          <p:cNvPr id="150" name="FIG_E_head_dec_sq_dots"/>
           <p:cNvSpPr txBox="1"/>
           <p:nvPr/>
         </p:nvSpPr>
@@ -9507,7 +9720,7 @@
       </p:sp>
       <p:cxnSp>
         <p:nvCxnSpPr>
-          <p:cNvPr id="145" name="FIG_L_head_dec_out"/>
+          <p:cNvPr id="151" name="FIG_L_head_dec_out"/>
           <p:cNvCxnSpPr/>
           <p:nvPr/>
         </p:nvCxnSpPr>
@@ -9543,7 +9756,7 @@
       </p:cxnSp>
       <p:sp>
         <p:nvSpPr>
-          <p:cNvPr id="146" name="FIG_E_head_out"/>
+          <p:cNvPr id="152" name="FIG_E_head_out"/>
           <p:cNvSpPr/>
           <p:nvPr/>
         </p:nvSpPr>
@@ -9591,7 +9804,7 @@
       </p:sp>
       <p:sp>
         <p:nvSpPr>
-          <p:cNvPr id="147" name="FIG_T_head_out"/>
+          <p:cNvPr id="153" name="FIG_T_head_out"/>
           <p:cNvSpPr txBox="1"/>
           <p:nvPr/>
         </p:nvSpPr>
@@ -9628,7 +9841,7 @@
       </p:sp>
       <p:sp>
         <p:nvSpPr>
-          <p:cNvPr id="148" name="FIG_E_head_bars_0"/>
+          <p:cNvPr id="154" name="FIG_E_head_bars_0"/>
           <p:cNvSpPr/>
           <p:nvPr/>
         </p:nvSpPr>
@@ -9672,7 +9885,7 @@
       </p:sp>
       <p:sp>
         <p:nvSpPr>
-          <p:cNvPr id="149" name="FIG_E_head_bars_1"/>
+          <p:cNvPr id="155" name="FIG_E_head_bars_1"/>
           <p:cNvSpPr/>
           <p:nvPr/>
         </p:nvSpPr>
@@ -9716,7 +9929,7 @@
       </p:sp>
       <p:sp>
         <p:nvSpPr>
-          <p:cNvPr id="150" name="FIG_E_head_bars_2"/>
+          <p:cNvPr id="156" name="FIG_E_head_bars_2"/>
           <p:cNvSpPr/>
           <p:nvPr/>
         </p:nvSpPr>
@@ -9760,7 +9973,7 @@
       </p:sp>
       <p:sp>
         <p:nvSpPr>
-          <p:cNvPr id="151" name="FIG_E_head_bars_3"/>
+          <p:cNvPr id="157" name="FIG_E_head_bars_3"/>
           <p:cNvSpPr/>
           <p:nvPr/>
         </p:nvSpPr>
@@ -9804,7 +10017,7 @@
       </p:sp>
       <p:cxnSp>
         <p:nvCxnSpPr>
-          <p:cNvPr id="152" name="FIG_E_head_bars_axis"/>
+          <p:cNvPr id="158" name="FIG_E_head_bars_axis"/>
           <p:cNvCxnSpPr/>
           <p:nvPr/>
         </p:nvCxnSpPr>
@@ -9839,7 +10052,7 @@
       </p:cxnSp>
       <p:sp>
         <p:nvSpPr>
-          <p:cNvPr id="153" name="FIG_E_head_bbox"/>
+          <p:cNvPr id="159" name="FIG_E_head_bbox"/>
           <p:cNvSpPr/>
           <p:nvPr/>
         </p:nvSpPr>
@@ -9884,7 +10097,7 @@
       </p:sp>
       <p:sp>
         <p:nvSpPr>
-          <p:cNvPr id="154" name="FIG_T_legend_title"/>
+          <p:cNvPr id="160" name="FIG_T_legend_title"/>
           <p:cNvSpPr txBox="1"/>
           <p:nvPr/>
         </p:nvSpPr>
@@ -9920,7 +10133,7 @@
       </p:sp>
       <p:sp>
         <p:nvSpPr>
-          <p:cNvPr id="155" name="FIG_E_lg_p5_top"/>
+          <p:cNvPr id="161" name="FIG_E_lg_p5_top"/>
           <p:cNvSpPr/>
           <p:nvPr/>
         </p:nvSpPr>
@@ -9987,7 +10200,7 @@
       </p:sp>
       <p:sp>
         <p:nvSpPr>
-          <p:cNvPr id="156" name="FIG_E_lg_p5_front"/>
+          <p:cNvPr id="162" name="FIG_E_lg_p5_front"/>
           <p:cNvSpPr/>
           <p:nvPr/>
         </p:nvSpPr>
@@ -10062,7 +10275,7 @@
       </p:sp>
       <p:sp>
         <p:nvSpPr>
-          <p:cNvPr id="157" name="FIG_E_lg_p5_right"/>
+          <p:cNvPr id="163" name="FIG_E_lg_p5_right"/>
           <p:cNvSpPr/>
           <p:nvPr/>
         </p:nvSpPr>
@@ -10129,7 +10342,7 @@
       </p:sp>
       <p:sp>
         <p:nvSpPr>
-          <p:cNvPr id="158" name="FIG_T_lg_p5"/>
+          <p:cNvPr id="164" name="FIG_T_lg_p5"/>
           <p:cNvSpPr txBox="1"/>
           <p:nvPr/>
         </p:nvSpPr>
@@ -10165,7 +10378,7 @@
       </p:sp>
       <p:sp>
         <p:nvSpPr>
-          <p:cNvPr id="159" name="FIG_E_lg_p4_top"/>
+          <p:cNvPr id="165" name="FIG_E_lg_p4_top"/>
           <p:cNvSpPr/>
           <p:nvPr/>
         </p:nvSpPr>
@@ -10232,7 +10445,7 @@
       </p:sp>
       <p:sp>
         <p:nvSpPr>
-          <p:cNvPr id="160" name="FIG_E_lg_p4_front"/>
+          <p:cNvPr id="166" name="FIG_E_lg_p4_front"/>
           <p:cNvSpPr/>
           <p:nvPr/>
         </p:nvSpPr>
@@ -10307,7 +10520,7 @@
       </p:sp>
       <p:sp>
         <p:nvSpPr>
-          <p:cNvPr id="161" name="FIG_E_lg_p4_right"/>
+          <p:cNvPr id="167" name="FIG_E_lg_p4_right"/>
           <p:cNvSpPr/>
           <p:nvPr/>
         </p:nvSpPr>
@@ -10374,7 +10587,7 @@
       </p:sp>
       <p:sp>
         <p:nvSpPr>
-          <p:cNvPr id="162" name="FIG_T_lg_p4"/>
+          <p:cNvPr id="168" name="FIG_T_lg_p4"/>
           <p:cNvSpPr txBox="1"/>
           <p:nvPr/>
         </p:nvSpPr>
@@ -10410,7 +10623,7 @@
       </p:sp>
       <p:sp>
         <p:nvSpPr>
-          <p:cNvPr id="163" name="FIG_E_lg_p3_top"/>
+          <p:cNvPr id="169" name="FIG_E_lg_p3_top"/>
           <p:cNvSpPr/>
           <p:nvPr/>
         </p:nvSpPr>
@@ -10477,7 +10690,7 @@
       </p:sp>
       <p:sp>
         <p:nvSpPr>
-          <p:cNvPr id="164" name="FIG_E_lg_p3_front"/>
+          <p:cNvPr id="170" name="FIG_E_lg_p3_front"/>
           <p:cNvSpPr/>
           <p:nvPr/>
         </p:nvSpPr>
@@ -10552,7 +10765,7 @@
       </p:sp>
       <p:sp>
         <p:nvSpPr>
-          <p:cNvPr id="165" name="FIG_E_lg_p3_right"/>
+          <p:cNvPr id="171" name="FIG_E_lg_p3_right"/>
           <p:cNvSpPr/>
           <p:nvPr/>
         </p:nvSpPr>
@@ -10619,7 +10832,7 @@
       </p:sp>
       <p:sp>
         <p:nvSpPr>
-          <p:cNvPr id="166" name="FIG_T_lg_p3"/>
+          <p:cNvPr id="172" name="FIG_T_lg_p3"/>
           <p:cNvSpPr txBox="1"/>
           <p:nvPr/>
         </p:nvSpPr>
@@ -10655,7 +10868,7 @@
       </p:sp>
       <p:sp>
         <p:nvSpPr>
-          <p:cNvPr id="167" name="FIG_E_lg_up"/>
+          <p:cNvPr id="173" name="FIG_E_lg_up"/>
           <p:cNvSpPr/>
           <p:nvPr/>
         </p:nvSpPr>
@@ -10701,7 +10914,7 @@
       </p:sp>
       <p:sp>
         <p:nvSpPr>
-          <p:cNvPr id="168" name="FIG_E_lg_up_text"/>
+          <p:cNvPr id="174" name="FIG_E_lg_up_text"/>
           <p:cNvSpPr txBox="1"/>
           <p:nvPr/>
         </p:nvSpPr>
@@ -10737,7 +10950,7 @@
       </p:sp>
       <p:sp>
         <p:nvSpPr>
-          <p:cNvPr id="169" name="FIG_T_lg_up"/>
+          <p:cNvPr id="175" name="FIG_T_lg_up"/>
           <p:cNvSpPr txBox="1"/>
           <p:nvPr/>
         </p:nvSpPr>
@@ -10773,7 +10986,7 @@
       </p:sp>
       <p:sp>
         <p:nvSpPr>
-          <p:cNvPr id="170" name="FIG_E_lg_down"/>
+          <p:cNvPr id="176" name="FIG_E_lg_down"/>
           <p:cNvSpPr/>
           <p:nvPr/>
         </p:nvSpPr>
@@ -10819,7 +11032,7 @@
       </p:sp>
       <p:sp>
         <p:nvSpPr>
-          <p:cNvPr id="171" name="FIG_E_lg_down_text"/>
+          <p:cNvPr id="177" name="FIG_E_lg_down_text"/>
           <p:cNvSpPr txBox="1"/>
           <p:nvPr/>
         </p:nvSpPr>
@@ -10855,7 +11068,7 @@
       </p:sp>
       <p:sp>
         <p:nvSpPr>
-          <p:cNvPr id="172" name="FIG_T_lg_down"/>
+          <p:cNvPr id="178" name="FIG_T_lg_down"/>
           <p:cNvSpPr txBox="1"/>
           <p:nvPr/>
         </p:nvSpPr>
@@ -10891,7 +11104,7 @@
       </p:sp>
       <p:sp>
         <p:nvSpPr>
-          <p:cNvPr id="173" name="FIG_E_lg_add"/>
+          <p:cNvPr id="179" name="FIG_E_lg_add"/>
           <p:cNvSpPr/>
           <p:nvPr/>
         </p:nvSpPr>
@@ -10937,7 +11150,7 @@
       </p:sp>
       <p:sp>
         <p:nvSpPr>
-          <p:cNvPr id="174" name="FIG_E_lg_add_text"/>
+          <p:cNvPr id="180" name="FIG_E_lg_add_text"/>
           <p:cNvSpPr txBox="1"/>
           <p:nvPr/>
         </p:nvSpPr>
@@ -10973,7 +11186,7 @@
       </p:sp>
       <p:sp>
         <p:nvSpPr>
-          <p:cNvPr id="175" name="FIG_T_lg_add"/>
+          <p:cNvPr id="181" name="FIG_T_lg_add"/>
           <p:cNvSpPr txBox="1"/>
           <p:nvPr/>
         </p:nvSpPr>
@@ -11009,7 +11222,7 @@
       </p:sp>
       <p:sp>
         <p:nvSpPr>
-          <p:cNvPr id="176" name="FIG_E_lg_losc"/>
+          <p:cNvPr id="182" name="FIG_E_lg_losc"/>
           <p:cNvSpPr/>
           <p:nvPr/>
         </p:nvSpPr>
@@ -11057,7 +11270,7 @@
       </p:sp>
       <p:sp>
         <p:nvSpPr>
-          <p:cNvPr id="177" name="FIG_T_lg_losc_tag"/>
+          <p:cNvPr id="183" name="FIG_T_lg_losc_tag"/>
           <p:cNvSpPr txBox="1"/>
           <p:nvPr/>
         </p:nvSpPr>
@@ -11093,7 +11306,7 @@
       </p:sp>
       <p:sp>
         <p:nvSpPr>
-          <p:cNvPr id="178" name="FIG_T_lg_losc"/>
+          <p:cNvPr id="184" name="FIG_T_lg_losc"/>
           <p:cNvSpPr txBox="1"/>
           <p:nvPr/>
         </p:nvSpPr>
@@ -11129,7 +11342,7 @@
       </p:sp>
       <p:sp>
         <p:nvSpPr>
-          <p:cNvPr id="179" name="FIG_E_lg_cga"/>
+          <p:cNvPr id="185" name="FIG_E_lg_cga"/>
           <p:cNvSpPr/>
           <p:nvPr/>
         </p:nvSpPr>
@@ -11177,7 +11390,7 @@
       </p:sp>
       <p:sp>
         <p:nvSpPr>
-          <p:cNvPr id="180" name="FIG_T_lg_cga_tag"/>
+          <p:cNvPr id="186" name="FIG_T_lg_cga_tag"/>
           <p:cNvSpPr txBox="1"/>
           <p:nvPr/>
         </p:nvSpPr>
@@ -11213,7 +11426,7 @@
       </p:sp>
       <p:sp>
         <p:nvSpPr>
-          <p:cNvPr id="181" name="FIG_T_lg_cga"/>
+          <p:cNvPr id="187" name="FIG_T_lg_cga"/>
           <p:cNvSpPr txBox="1"/>
           <p:nvPr/>
         </p:nvSpPr>
@@ -11249,7 +11462,7 @@
       </p:sp>
       <p:cxnSp>
         <p:nvCxnSpPr>
-          <p:cNvPr id="182" name="FIG_LD_lg_solid"/>
+          <p:cNvPr id="188" name="FIG_LD_lg_solid"/>
           <p:cNvCxnSpPr/>
           <p:nvPr/>
         </p:nvCxnSpPr>
@@ -11285,7 +11498,7 @@
       </p:cxnSp>
       <p:sp>
         <p:nvSpPr>
-          <p:cNvPr id="183" name="FIG_T_lg_solid"/>
+          <p:cNvPr id="189" name="FIG_T_lg_solid"/>
           <p:cNvSpPr txBox="1"/>
           <p:nvPr/>
         </p:nvSpPr>
@@ -11321,7 +11534,7 @@
       </p:sp>
       <p:cxnSp>
         <p:nvCxnSpPr>
-          <p:cNvPr id="184" name="FIG_LD_lg_dash"/>
+          <p:cNvPr id="190" name="FIG_LD_lg_dash"/>
           <p:cNvCxnSpPr/>
           <p:nvPr/>
         </p:nvCxnSpPr>
@@ -11358,7 +11571,7 @@
       </p:cxnSp>
       <p:sp>
         <p:nvSpPr>
-          <p:cNvPr id="185" name="FIG_T_lg_dash"/>
+          <p:cNvPr id="191" name="FIG_T_lg_dash"/>
           <p:cNvSpPr txBox="1"/>
           <p:nvPr/>
         </p:nvSpPr>
@@ -11394,7 +11607,7 @@
       </p:sp>
       <p:cxnSp>
         <p:nvCxnSpPr>
-          <p:cNvPr id="186" name="FIG_L_input_backbone"/>
+          <p:cNvPr id="192" name="FIG_L_input_backbone"/>
           <p:cNvCxnSpPr/>
           <p:nvPr/>
         </p:nvCxnSpPr>
@@ -11430,7 +11643,7 @@
       </p:cxnSp>
       <p:cxnSp>
         <p:nvCxnSpPr>
-          <p:cNvPr id="187" name="FIG_L_backbone_neck"/>
+          <p:cNvPr id="193" name="FIG_L_backbone_neck"/>
           <p:cNvCxnSpPr/>
           <p:nvPr/>
         </p:nvCxnSpPr>
@@ -11466,7 +11679,7 @@
       </p:cxnSp>
       <p:cxnSp>
         <p:nvCxnSpPr>
-          <p:cNvPr id="188" name="FIG_L_neck_head"/>
+          <p:cNvPr id="194" name="FIG_L_neck_head"/>
           <p:cNvCxnSpPr/>
           <p:nvPr/>
         </p:nvCxnSpPr>
@@ -11502,7 +11715,7 @@
       </p:cxnSp>
       <p:sp>
         <p:nvSpPr>
-          <p:cNvPr id="189" name="FIG_T_m1_title"/>
+          <p:cNvPr id="195" name="FIG_T_m1_title"/>
           <p:cNvSpPr txBox="1"/>
           <p:nvPr/>
         </p:nvSpPr>
@@ -11538,7 +11751,7 @@
       </p:sp>
       <p:sp>
         <p:nvSpPr>
-          <p:cNvPr id="190" name="FIG_T_m1_in"/>
+          <p:cNvPr id="196" name="FIG_T_m1_in"/>
           <p:cNvSpPr txBox="1"/>
           <p:nvPr/>
         </p:nvSpPr>
@@ -11574,7 +11787,7 @@
       </p:sp>
       <p:sp>
         <p:nvSpPr>
-          <p:cNvPr id="191" name="FIG_E_m1_csp"/>
+          <p:cNvPr id="197" name="FIG_E_m1_csp"/>
           <p:cNvSpPr/>
           <p:nvPr/>
         </p:nvSpPr>
@@ -11622,7 +11835,7 @@
       </p:sp>
       <p:sp>
         <p:nvSpPr>
-          <p:cNvPr id="192" name="FIG_T_m1_csp"/>
+          <p:cNvPr id="198" name="FIG_T_m1_csp"/>
           <p:cNvSpPr txBox="1"/>
           <p:nvPr/>
         </p:nvSpPr>
@@ -11658,7 +11871,7 @@
       </p:sp>
       <p:sp>
         <p:nvSpPr>
-          <p:cNvPr id="193" name="FIG_E_m1_b0"/>
+          <p:cNvPr id="199" name="FIG_E_m1_b0"/>
           <p:cNvSpPr/>
           <p:nvPr/>
         </p:nvSpPr>
@@ -11706,7 +11919,7 @@
       </p:sp>
       <p:sp>
         <p:nvSpPr>
-          <p:cNvPr id="194" name="FIG_T_m1_b0"/>
+          <p:cNvPr id="200" name="FIG_T_m1_b0"/>
           <p:cNvSpPr txBox="1"/>
           <p:nvPr/>
         </p:nvSpPr>
@@ -11742,7 +11955,7 @@
       </p:sp>
       <p:sp>
         <p:nvSpPr>
-          <p:cNvPr id="195" name="FIG_E_m1_b1"/>
+          <p:cNvPr id="201" name="FIG_E_m1_b1"/>
           <p:cNvSpPr/>
           <p:nvPr/>
         </p:nvSpPr>
@@ -11790,7 +12003,7 @@
       </p:sp>
       <p:sp>
         <p:nvSpPr>
-          <p:cNvPr id="196" name="FIG_T_m1_b1"/>
+          <p:cNvPr id="202" name="FIG_T_m1_b1"/>
           <p:cNvSpPr txBox="1"/>
           <p:nvPr/>
         </p:nvSpPr>
@@ -11826,7 +12039,7 @@
       </p:sp>
       <p:sp>
         <p:nvSpPr>
-          <p:cNvPr id="197" name="FIG_E_m1_b2"/>
+          <p:cNvPr id="203" name="FIG_E_m1_b2"/>
           <p:cNvSpPr/>
           <p:nvPr/>
         </p:nvSpPr>
@@ -11874,7 +12087,7 @@
       </p:sp>
       <p:sp>
         <p:nvSpPr>
-          <p:cNvPr id="198" name="FIG_T_m1_b2"/>
+          <p:cNvPr id="204" name="FIG_T_m1_b2"/>
           <p:cNvSpPr txBox="1"/>
           <p:nvPr/>
         </p:nvSpPr>
@@ -11910,7 +12123,7 @@
       </p:sp>
       <p:sp>
         <p:nvSpPr>
-          <p:cNvPr id="199" name="FIG_T_m1_bdots"/>
+          <p:cNvPr id="205" name="FIG_T_m1_bdots"/>
           <p:cNvSpPr txBox="1"/>
           <p:nvPr/>
         </p:nvSpPr>
@@ -11946,7 +12159,7 @@
       </p:sp>
       <p:sp>
         <p:nvSpPr>
-          <p:cNvPr id="200" name="FIG_E_m1_fuse"/>
+          <p:cNvPr id="206" name="FIG_E_m1_fuse"/>
           <p:cNvSpPr/>
           <p:nvPr/>
         </p:nvSpPr>
@@ -11994,7 +12207,7 @@
       </p:sp>
       <p:sp>
         <p:nvSpPr>
-          <p:cNvPr id="201" name="FIG_T_m1_fuse"/>
+          <p:cNvPr id="207" name="FIG_T_m1_fuse"/>
           <p:cNvSpPr txBox="1"/>
           <p:nvPr/>
         </p:nvSpPr>
@@ -12030,7 +12243,7 @@
       </p:sp>
       <p:sp>
         <p:nvSpPr>
-          <p:cNvPr id="202" name="FIG_E_m1_ema"/>
+          <p:cNvPr id="208" name="FIG_E_m1_ema"/>
           <p:cNvSpPr/>
           <p:nvPr/>
         </p:nvSpPr>
@@ -12078,7 +12291,7 @@
       </p:sp>
       <p:sp>
         <p:nvSpPr>
-          <p:cNvPr id="203" name="FIG_T_m1_ema"/>
+          <p:cNvPr id="209" name="FIG_T_m1_ema"/>
           <p:cNvSpPr txBox="1"/>
           <p:nvPr/>
         </p:nvSpPr>
@@ -12114,7 +12327,7 @@
       </p:sp>
       <p:sp>
         <p:nvSpPr>
-          <p:cNvPr id="204" name="FIG_T_m1_out"/>
+          <p:cNvPr id="210" name="FIG_T_m1_out"/>
           <p:cNvSpPr txBox="1"/>
           <p:nvPr/>
         </p:nvSpPr>
@@ -12150,7 +12363,7 @@
       </p:sp>
       <p:cxnSp>
         <p:nvCxnSpPr>
-          <p:cNvPr id="205" name="FIG_L_m1_f1"/>
+          <p:cNvPr id="211" name="FIG_L_m1_f1"/>
           <p:cNvCxnSpPr/>
           <p:nvPr/>
         </p:nvCxnSpPr>
@@ -12186,7 +12399,7 @@
       </p:cxnSp>
       <p:cxnSp>
         <p:nvCxnSpPr>
-          <p:cNvPr id="206" name="FIG_L_m1_f2"/>
+          <p:cNvPr id="212" name="FIG_L_m1_f2"/>
           <p:cNvCxnSpPr/>
           <p:nvPr/>
         </p:nvCxnSpPr>
@@ -12222,7 +12435,7 @@
       </p:cxnSp>
       <p:cxnSp>
         <p:nvCxnSpPr>
-          <p:cNvPr id="207" name="FIG_L_m1_f3"/>
+          <p:cNvPr id="213" name="FIG_L_m1_f3"/>
           <p:cNvCxnSpPr/>
           <p:nvPr/>
         </p:nvCxnSpPr>
@@ -12258,7 +12471,7 @@
       </p:cxnSp>
       <p:cxnSp>
         <p:nvCxnSpPr>
-          <p:cNvPr id="208" name="FIG_L_m1_f4"/>
+          <p:cNvPr id="214" name="FIG_L_m1_f4"/>
           <p:cNvCxnSpPr/>
           <p:nvPr/>
         </p:nvCxnSpPr>
@@ -12294,7 +12507,7 @@
       </p:cxnSp>
       <p:cxnSp>
         <p:nvCxnSpPr>
-          <p:cNvPr id="209" name="FIG_L_m1_f5"/>
+          <p:cNvPr id="215" name="FIG_L_m1_f5"/>
           <p:cNvCxnSpPr/>
           <p:nvPr/>
         </p:nvCxnSpPr>
@@ -12330,7 +12543,7 @@
       </p:cxnSp>
       <p:sp>
         <p:nvSpPr>
-          <p:cNvPr id="210" name="FIG_T_m1_p0"/>
+          <p:cNvPr id="216" name="FIG_T_m1_p0"/>
           <p:cNvSpPr txBox="1"/>
           <p:nvPr/>
         </p:nvSpPr>
@@ -12366,7 +12579,7 @@
       </p:sp>
       <p:sp>
         <p:nvSpPr>
-          <p:cNvPr id="211" name="FIG_T_m1_p1"/>
+          <p:cNvPr id="217" name="FIG_T_m1_p1"/>
           <p:cNvSpPr txBox="1"/>
           <p:nvPr/>
         </p:nvSpPr>
@@ -12402,7 +12615,7 @@
       </p:sp>
       <p:sp>
         <p:nvSpPr>
-          <p:cNvPr id="212" name="FIG_T_m1_p2"/>
+          <p:cNvPr id="218" name="FIG_T_m1_p2"/>
           <p:cNvSpPr txBox="1"/>
           <p:nvPr/>
         </p:nvSpPr>
@@ -12438,7 +12651,7 @@
       </p:sp>
       <p:sp>
         <p:nvSpPr>
-          <p:cNvPr id="213" name="FIG_T_m2_title"/>
+          <p:cNvPr id="219" name="FIG_T_m2_title"/>
           <p:cNvSpPr txBox="1"/>
           <p:nvPr/>
         </p:nvSpPr>
@@ -12474,7 +12687,7 @@
       </p:sp>
       <p:sp>
         <p:nvSpPr>
-          <p:cNvPr id="214" name="FIG_T_m2_in"/>
+          <p:cNvPr id="220" name="FIG_T_m2_in"/>
           <p:cNvSpPr txBox="1"/>
           <p:nvPr/>
         </p:nvSpPr>
@@ -12510,7 +12723,7 @@
       </p:sp>
       <p:sp>
         <p:nvSpPr>
-          <p:cNvPr id="215" name="FIG_G_m2_in_bg"/>
+          <p:cNvPr id="221" name="FIG_G_m2_in_bg"/>
           <p:cNvSpPr/>
           <p:nvPr/>
         </p:nvSpPr>
@@ -12556,7 +12769,7 @@
       </p:sp>
       <p:cxnSp>
         <p:nvCxnSpPr>
-          <p:cNvPr id="216" name="FIG_G_m2_in_v1"/>
+          <p:cNvPr id="222" name="FIG_G_m2_in_v1"/>
           <p:cNvCxnSpPr/>
           <p:nvPr/>
         </p:nvCxnSpPr>
@@ -12591,7 +12804,7 @@
       </p:cxnSp>
       <p:cxnSp>
         <p:nvCxnSpPr>
-          <p:cNvPr id="217" name="FIG_G_m2_in_v2"/>
+          <p:cNvPr id="223" name="FIG_G_m2_in_v2"/>
           <p:cNvCxnSpPr/>
           <p:nvPr/>
         </p:nvCxnSpPr>
@@ -12626,7 +12839,7 @@
       </p:cxnSp>
       <p:cxnSp>
         <p:nvCxnSpPr>
-          <p:cNvPr id="218" name="FIG_G_m2_in_v3"/>
+          <p:cNvPr id="224" name="FIG_G_m2_in_v3"/>
           <p:cNvCxnSpPr/>
           <p:nvPr/>
         </p:nvCxnSpPr>
@@ -12661,7 +12874,7 @@
       </p:cxnSp>
       <p:cxnSp>
         <p:nvCxnSpPr>
-          <p:cNvPr id="219" name="FIG_G_m2_in_h1"/>
+          <p:cNvPr id="225" name="FIG_G_m2_in_h1"/>
           <p:cNvCxnSpPr/>
           <p:nvPr/>
         </p:nvCxnSpPr>
@@ -12696,7 +12909,7 @@
       </p:cxnSp>
       <p:cxnSp>
         <p:nvCxnSpPr>
-          <p:cNvPr id="220" name="FIG_G_m2_in_h2"/>
+          <p:cNvPr id="226" name="FIG_G_m2_in_h2"/>
           <p:cNvCxnSpPr/>
           <p:nvPr/>
         </p:nvCxnSpPr>
@@ -12731,7 +12944,7 @@
       </p:cxnSp>
       <p:sp>
         <p:nvSpPr>
-          <p:cNvPr id="221" name="FIG_E_m2_down"/>
+          <p:cNvPr id="227" name="FIG_E_m2_down"/>
           <p:cNvSpPr/>
           <p:nvPr/>
         </p:nvSpPr>
@@ -12777,7 +12990,7 @@
       </p:sp>
       <p:sp>
         <p:nvSpPr>
-          <p:cNvPr id="222" name="FIG_E_m2_down_text"/>
+          <p:cNvPr id="228" name="FIG_E_m2_down_text"/>
           <p:cNvSpPr txBox="1"/>
           <p:nvPr/>
         </p:nvSpPr>
@@ -12814,7 +13027,7 @@
       </p:sp>
       <p:sp>
         <p:nvSpPr>
-          <p:cNvPr id="223" name="FIG_G_m2_out_bg"/>
+          <p:cNvPr id="229" name="FIG_G_m2_out_bg"/>
           <p:cNvSpPr/>
           <p:nvPr/>
         </p:nvSpPr>
@@ -12860,7 +13073,7 @@
       </p:sp>
       <p:cxnSp>
         <p:nvCxnSpPr>
-          <p:cNvPr id="224" name="FIG_G_m2_out_v1"/>
+          <p:cNvPr id="230" name="FIG_G_m2_out_v1"/>
           <p:cNvCxnSpPr/>
           <p:nvPr/>
         </p:nvCxnSpPr>
@@ -12895,7 +13108,7 @@
       </p:cxnSp>
       <p:cxnSp>
         <p:nvCxnSpPr>
-          <p:cNvPr id="225" name="FIG_G_m2_out_v2"/>
+          <p:cNvPr id="231" name="FIG_G_m2_out_v2"/>
           <p:cNvCxnSpPr/>
           <p:nvPr/>
         </p:nvCxnSpPr>
@@ -12930,7 +13143,7 @@
       </p:cxnSp>
       <p:cxnSp>
         <p:nvCxnSpPr>
-          <p:cNvPr id="226" name="FIG_G_m2_out_h1"/>
+          <p:cNvPr id="232" name="FIG_G_m2_out_h1"/>
           <p:cNvCxnSpPr/>
           <p:nvPr/>
         </p:nvCxnSpPr>
@@ -12965,7 +13178,7 @@
       </p:cxnSp>
       <p:sp>
         <p:nvSpPr>
-          <p:cNvPr id="227" name="FIG_T_m2_out"/>
+          <p:cNvPr id="233" name="FIG_T_m2_out"/>
           <p:cNvSpPr txBox="1"/>
           <p:nvPr/>
         </p:nvSpPr>
@@ -13001,7 +13214,7 @@
       </p:sp>
       <p:cxnSp>
         <p:nvCxnSpPr>
-          <p:cNvPr id="228" name="FIG_L_m2_f1"/>
+          <p:cNvPr id="234" name="FIG_L_m2_f1"/>
           <p:cNvCxnSpPr/>
           <p:nvPr/>
         </p:nvCxnSpPr>
@@ -13037,7 +13250,7 @@
       </p:cxnSp>
       <p:cxnSp>
         <p:nvCxnSpPr>
-          <p:cNvPr id="229" name="FIG_L_m2_f2"/>
+          <p:cNvPr id="235" name="FIG_L_m2_f2"/>
           <p:cNvCxnSpPr/>
           <p:nvPr/>
         </p:nvCxnSpPr>
@@ -13073,7 +13286,7 @@
       </p:cxnSp>
       <p:sp>
         <p:nvSpPr>
-          <p:cNvPr id="230" name="FIG_T_m2_p0"/>
+          <p:cNvPr id="236" name="FIG_T_m2_p0"/>
           <p:cNvSpPr txBox="1"/>
           <p:nvPr/>
         </p:nvSpPr>
@@ -13109,7 +13322,7 @@
       </p:sp>
       <p:sp>
         <p:nvSpPr>
-          <p:cNvPr id="231" name="FIG_T_m2_p1"/>
+          <p:cNvPr id="237" name="FIG_T_m2_p1"/>
           <p:cNvSpPr txBox="1"/>
           <p:nvPr/>
         </p:nvSpPr>
@@ -13145,7 +13358,7 @@
       </p:sp>
       <p:sp>
         <p:nvSpPr>
-          <p:cNvPr id="232" name="FIG_T_m2_p2"/>
+          <p:cNvPr id="238" name="FIG_T_m2_p2"/>
           <p:cNvSpPr txBox="1"/>
           <p:nvPr/>
         </p:nvSpPr>
@@ -13181,7 +13394,7 @@
       </p:sp>
       <p:sp>
         <p:nvSpPr>
-          <p:cNvPr id="233" name="FIG_T_m2_p3"/>
+          <p:cNvPr id="239" name="FIG_T_m2_p3"/>
           <p:cNvSpPr txBox="1"/>
           <p:nvPr/>
         </p:nvSpPr>
@@ -13217,7 +13430,7 @@
       </p:sp>
       <p:sp>
         <p:nvSpPr>
-          <p:cNvPr id="234" name="FIG_T_m3_title"/>
+          <p:cNvPr id="240" name="FIG_T_m3_title"/>
           <p:cNvSpPr txBox="1"/>
           <p:nvPr/>
         </p:nvSpPr>
@@ -13253,7 +13466,7 @@
       </p:sp>
       <p:sp>
         <p:nvSpPr>
-          <p:cNvPr id="235" name="FIG_T_m3_fh"/>
+          <p:cNvPr id="241" name="FIG_T_m3_fh"/>
           <p:cNvSpPr txBox="1"/>
           <p:nvPr/>
         </p:nvSpPr>
@@ -13289,7 +13502,7 @@
       </p:sp>
       <p:sp>
         <p:nvSpPr>
-          <p:cNvPr id="236" name="FIG_G_m3_fh_bg"/>
+          <p:cNvPr id="242" name="FIG_G_m3_fh_bg"/>
           <p:cNvSpPr/>
           <p:nvPr/>
         </p:nvSpPr>
@@ -13335,7 +13548,7 @@
       </p:sp>
       <p:cxnSp>
         <p:nvCxnSpPr>
-          <p:cNvPr id="237" name="FIG_G_m3_fh_v1"/>
+          <p:cNvPr id="243" name="FIG_G_m3_fh_v1"/>
           <p:cNvCxnSpPr/>
           <p:nvPr/>
         </p:nvCxnSpPr>
@@ -13370,7 +13583,7 @@
       </p:cxnSp>
       <p:cxnSp>
         <p:nvCxnSpPr>
-          <p:cNvPr id="238" name="FIG_G_m3_fh_v2"/>
+          <p:cNvPr id="244" name="FIG_G_m3_fh_v2"/>
           <p:cNvCxnSpPr/>
           <p:nvPr/>
         </p:nvCxnSpPr>
@@ -13405,7 +13618,7 @@
       </p:cxnSp>
       <p:cxnSp>
         <p:nvCxnSpPr>
-          <p:cNvPr id="239" name="FIG_G_m3_fh_v3"/>
+          <p:cNvPr id="245" name="FIG_G_m3_fh_v3"/>
           <p:cNvCxnSpPr/>
           <p:nvPr/>
         </p:nvCxnSpPr>
@@ -13440,7 +13653,7 @@
       </p:cxnSp>
       <p:cxnSp>
         <p:nvCxnSpPr>
-          <p:cNvPr id="240" name="FIG_G_m3_fh_h1"/>
+          <p:cNvPr id="246" name="FIG_G_m3_fh_h1"/>
           <p:cNvCxnSpPr/>
           <p:nvPr/>
         </p:nvCxnSpPr>
@@ -13475,7 +13688,7 @@
       </p:cxnSp>
       <p:cxnSp>
         <p:nvCxnSpPr>
-          <p:cNvPr id="241" name="FIG_G_m3_fh_h2"/>
+          <p:cNvPr id="247" name="FIG_G_m3_fh_h2"/>
           <p:cNvCxnSpPr/>
           <p:nvPr/>
         </p:nvCxnSpPr>
@@ -13510,7 +13723,7 @@
       </p:cxnSp>
       <p:sp>
         <p:nvSpPr>
-          <p:cNvPr id="242" name="FIG_E_m3_high"/>
+          <p:cNvPr id="248" name="FIG_E_m3_high"/>
           <p:cNvSpPr/>
           <p:nvPr/>
         </p:nvSpPr>
@@ -13558,7 +13771,7 @@
       </p:sp>
       <p:sp>
         <p:nvSpPr>
-          <p:cNvPr id="243" name="FIG_T_m3_high"/>
+          <p:cNvPr id="249" name="FIG_T_m3_high"/>
           <p:cNvSpPr txBox="1"/>
           <p:nvPr/>
         </p:nvSpPr>
@@ -13595,7 +13808,7 @@
       </p:sp>
       <p:sp>
         <p:nvSpPr>
-          <p:cNvPr id="244" name="FIG_T_m3_fl"/>
+          <p:cNvPr id="250" name="FIG_T_m3_fl"/>
           <p:cNvSpPr txBox="1"/>
           <p:nvPr/>
         </p:nvSpPr>
@@ -13631,7 +13844,7 @@
       </p:sp>
       <p:sp>
         <p:nvSpPr>
-          <p:cNvPr id="245" name="FIG_G_m3_fl_bg"/>
+          <p:cNvPr id="251" name="FIG_G_m3_fl_bg"/>
           <p:cNvSpPr/>
           <p:nvPr/>
         </p:nvSpPr>
@@ -13677,7 +13890,7 @@
       </p:sp>
       <p:cxnSp>
         <p:nvCxnSpPr>
-          <p:cNvPr id="246" name="FIG_G_m3_fl_v1"/>
+          <p:cNvPr id="252" name="FIG_G_m3_fl_v1"/>
           <p:cNvCxnSpPr/>
           <p:nvPr/>
         </p:nvCxnSpPr>
@@ -13712,7 +13925,7 @@
       </p:cxnSp>
       <p:cxnSp>
         <p:nvCxnSpPr>
-          <p:cNvPr id="247" name="FIG_G_m3_fl_v2"/>
+          <p:cNvPr id="253" name="FIG_G_m3_fl_v2"/>
           <p:cNvCxnSpPr/>
           <p:nvPr/>
         </p:nvCxnSpPr>
@@ -13747,7 +13960,7 @@
       </p:cxnSp>
       <p:cxnSp>
         <p:nvCxnSpPr>
-          <p:cNvPr id="248" name="FIG_G_m3_fl_v3"/>
+          <p:cNvPr id="254" name="FIG_G_m3_fl_v3"/>
           <p:cNvCxnSpPr/>
           <p:nvPr/>
         </p:nvCxnSpPr>
@@ -13782,7 +13995,7 @@
       </p:cxnSp>
       <p:cxnSp>
         <p:nvCxnSpPr>
-          <p:cNvPr id="249" name="FIG_G_m3_fl_h1"/>
+          <p:cNvPr id="255" name="FIG_G_m3_fl_h1"/>
           <p:cNvCxnSpPr/>
           <p:nvPr/>
         </p:nvCxnSpPr>
@@ -13817,7 +14030,7 @@
       </p:cxnSp>
       <p:cxnSp>
         <p:nvCxnSpPr>
-          <p:cNvPr id="250" name="FIG_G_m3_fl_h2"/>
+          <p:cNvPr id="256" name="FIG_G_m3_fl_h2"/>
           <p:cNvCxnSpPr/>
           <p:nvPr/>
         </p:nvCxnSpPr>
@@ -13852,7 +14065,7 @@
       </p:cxnSp>
       <p:sp>
         <p:nvSpPr>
-          <p:cNvPr id="251" name="FIG_E_m3_low"/>
+          <p:cNvPr id="257" name="FIG_E_m3_low"/>
           <p:cNvSpPr/>
           <p:nvPr/>
         </p:nvSpPr>
@@ -13900,7 +14113,7 @@
       </p:sp>
       <p:sp>
         <p:nvSpPr>
-          <p:cNvPr id="252" name="FIG_T_m3_low"/>
+          <p:cNvPr id="258" name="FIG_T_m3_low"/>
           <p:cNvSpPr txBox="1"/>
           <p:nvPr/>
         </p:nvSpPr>
@@ -13937,7 +14150,7 @@
       </p:sp>
       <p:sp>
         <p:nvSpPr>
-          <p:cNvPr id="253" name="FIG_E_m3_add"/>
+          <p:cNvPr id="259" name="FIG_E_m3_add"/>
           <p:cNvSpPr/>
           <p:nvPr/>
         </p:nvSpPr>
@@ -13983,7 +14196,7 @@
       </p:sp>
       <p:sp>
         <p:nvSpPr>
-          <p:cNvPr id="254" name="FIG_E_m3_add_text"/>
+          <p:cNvPr id="260" name="FIG_E_m3_add_text"/>
           <p:cNvSpPr txBox="1"/>
           <p:nvPr/>
         </p:nvSpPr>
@@ -14019,7 +14232,7 @@
       </p:sp>
       <p:sp>
         <p:nvSpPr>
-          <p:cNvPr id="255" name="FIG_G_m3_out_bg"/>
+          <p:cNvPr id="261" name="FIG_G_m3_out_bg"/>
           <p:cNvSpPr/>
           <p:nvPr/>
         </p:nvSpPr>
@@ -14065,7 +14278,7 @@
       </p:sp>
       <p:cxnSp>
         <p:nvCxnSpPr>
-          <p:cNvPr id="256" name="FIG_G_m3_out_v1"/>
+          <p:cNvPr id="262" name="FIG_G_m3_out_v1"/>
           <p:cNvCxnSpPr/>
           <p:nvPr/>
         </p:nvCxnSpPr>
@@ -14100,7 +14313,7 @@
       </p:cxnSp>
       <p:cxnSp>
         <p:nvCxnSpPr>
-          <p:cNvPr id="257" name="FIG_G_m3_out_v2"/>
+          <p:cNvPr id="263" name="FIG_G_m3_out_v2"/>
           <p:cNvCxnSpPr/>
           <p:nvPr/>
         </p:nvCxnSpPr>
@@ -14135,7 +14348,7 @@
       </p:cxnSp>
       <p:cxnSp>
         <p:nvCxnSpPr>
-          <p:cNvPr id="258" name="FIG_G_m3_out_h1"/>
+          <p:cNvPr id="264" name="FIG_G_m3_out_h1"/>
           <p:cNvCxnSpPr/>
           <p:nvPr/>
         </p:nvCxnSpPr>
@@ -14170,7 +14383,7 @@
       </p:cxnSp>
       <p:sp>
         <p:nvSpPr>
-          <p:cNvPr id="259" name="FIG_T_m3_out"/>
+          <p:cNvPr id="265" name="FIG_T_m3_out"/>
           <p:cNvSpPr txBox="1"/>
           <p:nvPr/>
         </p:nvSpPr>
@@ -14206,7 +14419,7 @@
       </p:sp>
       <p:cxnSp>
         <p:nvCxnSpPr>
-          <p:cNvPr id="260" name="FIG_L_m3_f1_1"/>
+          <p:cNvPr id="266" name="FIG_L_m3_f1_1"/>
           <p:cNvCxnSpPr/>
           <p:nvPr/>
         </p:nvCxnSpPr>
@@ -14241,7 +14454,7 @@
       </p:cxnSp>
       <p:cxnSp>
         <p:nvCxnSpPr>
-          <p:cNvPr id="261" name="FIG_L_m3_f1_2"/>
+          <p:cNvPr id="267" name="FIG_L_m3_f1_2"/>
           <p:cNvCxnSpPr/>
           <p:nvPr/>
         </p:nvCxnSpPr>
@@ -14277,7 +14490,7 @@
       </p:cxnSp>
       <p:cxnSp>
         <p:nvCxnSpPr>
-          <p:cNvPr id="262" name="FIG_L_m3_f2"/>
+          <p:cNvPr id="268" name="FIG_L_m3_f2"/>
           <p:cNvCxnSpPr/>
           <p:nvPr/>
         </p:nvCxnSpPr>
@@ -14313,7 +14526,7 @@
       </p:cxnSp>
       <p:cxnSp>
         <p:nvCxnSpPr>
-          <p:cNvPr id="263" name="FIG_L_m3_f3"/>
+          <p:cNvPr id="269" name="FIG_L_m3_f3"/>
           <p:cNvCxnSpPr/>
           <p:nvPr/>
         </p:nvCxnSpPr>
@@ -14349,7 +14562,7 @@
       </p:cxnSp>
       <p:sp>
         <p:nvSpPr>
-          <p:cNvPr id="264" name="FIG_T_m3_p0"/>
+          <p:cNvPr id="270" name="FIG_T_m3_p0"/>
           <p:cNvSpPr txBox="1"/>
           <p:nvPr/>
         </p:nvSpPr>
@@ -14385,7 +14598,7 @@
       </p:sp>
       <p:sp>
         <p:nvSpPr>
-          <p:cNvPr id="265" name="FIG_T_m3_p1"/>
+          <p:cNvPr id="271" name="FIG_T_m3_p1"/>
           <p:cNvSpPr txBox="1"/>
           <p:nvPr/>
         </p:nvSpPr>
@@ -14421,7 +14634,7 @@
       </p:sp>
       <p:sp>
         <p:nvSpPr>
-          <p:cNvPr id="266" name="FIG_T_m3_p2"/>
+          <p:cNvPr id="272" name="FIG_T_m3_p2"/>
           <p:cNvSpPr txBox="1"/>
           <p:nvPr/>
         </p:nvSpPr>
@@ -14457,7 +14670,7 @@
       </p:sp>
       <p:sp>
         <p:nvSpPr>
-          <p:cNvPr id="267" name="FIG_T_m3_p3"/>
+          <p:cNvPr id="273" name="FIG_T_m3_p3"/>
           <p:cNvSpPr txBox="1"/>
           <p:nvPr/>
         </p:nvSpPr>
@@ -14493,7 +14706,7 @@
       </p:sp>
       <p:sp>
         <p:nvSpPr>
-          <p:cNvPr id="268" name="FIG_T_b1_title"/>
+          <p:cNvPr id="274" name="FIG_T_b1_title"/>
           <p:cNvSpPr txBox="1"/>
           <p:nvPr/>
         </p:nvSpPr>
@@ -14529,7 +14742,7 @@
       </p:sp>
       <p:sp>
         <p:nvSpPr>
-          <p:cNvPr id="269" name="FIG_E_out_p3_top"/>
+          <p:cNvPr id="275" name="FIG_E_out_p3_top"/>
           <p:cNvSpPr/>
           <p:nvPr/>
         </p:nvSpPr>
@@ -14596,7 +14809,7 @@
       </p:sp>
       <p:sp>
         <p:nvSpPr>
-          <p:cNvPr id="270" name="FIG_E_out_p3_front"/>
+          <p:cNvPr id="276" name="FIG_E_out_p3_front"/>
           <p:cNvSpPr/>
           <p:nvPr/>
         </p:nvSpPr>
@@ -14671,7 +14884,7 @@
       </p:sp>
       <p:sp>
         <p:nvSpPr>
-          <p:cNvPr id="271" name="FIG_E_out_p3_right"/>
+          <p:cNvPr id="277" name="FIG_E_out_p3_right"/>
           <p:cNvSpPr/>
           <p:nvPr/>
         </p:nvSpPr>
@@ -14738,7 +14951,7 @@
       </p:sp>
       <p:sp>
         <p:nvSpPr>
-          <p:cNvPr id="272" name="FIG_E_out_p3_label"/>
+          <p:cNvPr id="278" name="FIG_E_out_p3_label"/>
           <p:cNvSpPr txBox="1"/>
           <p:nvPr/>
         </p:nvSpPr>
@@ -14775,7 +14988,7 @@
       </p:sp>
       <p:sp>
         <p:nvSpPr>
-          <p:cNvPr id="273" name="FIG_E_out_p4_top"/>
+          <p:cNvPr id="279" name="FIG_E_out_p4_top"/>
           <p:cNvSpPr/>
           <p:nvPr/>
         </p:nvSpPr>
@@ -14842,7 +15055,7 @@
       </p:sp>
       <p:sp>
         <p:nvSpPr>
-          <p:cNvPr id="274" name="FIG_E_out_p4_front"/>
+          <p:cNvPr id="280" name="FIG_E_out_p4_front"/>
           <p:cNvSpPr/>
           <p:nvPr/>
         </p:nvSpPr>
@@ -14917,7 +15130,7 @@
       </p:sp>
       <p:sp>
         <p:nvSpPr>
-          <p:cNvPr id="275" name="FIG_E_out_p4_right"/>
+          <p:cNvPr id="281" name="FIG_E_out_p4_right"/>
           <p:cNvSpPr/>
           <p:nvPr/>
         </p:nvSpPr>
@@ -14984,7 +15197,7 @@
       </p:sp>
       <p:sp>
         <p:nvSpPr>
-          <p:cNvPr id="276" name="FIG_E_out_p4_label"/>
+          <p:cNvPr id="282" name="FIG_E_out_p4_label"/>
           <p:cNvSpPr txBox="1"/>
           <p:nvPr/>
         </p:nvSpPr>
@@ -15021,7 +15234,7 @@
       </p:sp>
       <p:sp>
         <p:nvSpPr>
-          <p:cNvPr id="277" name="FIG_E_out_p5_top"/>
+          <p:cNvPr id="283" name="FIG_E_out_p5_top"/>
           <p:cNvSpPr/>
           <p:nvPr/>
         </p:nvSpPr>
@@ -15088,7 +15301,7 @@
       </p:sp>
       <p:sp>
         <p:nvSpPr>
-          <p:cNvPr id="278" name="FIG_E_out_p5_front"/>
+          <p:cNvPr id="284" name="FIG_E_out_p5_front"/>
           <p:cNvSpPr/>
           <p:nvPr/>
         </p:nvSpPr>
@@ -15163,7 +15376,7 @@
       </p:sp>
       <p:sp>
         <p:nvSpPr>
-          <p:cNvPr id="279" name="FIG_E_out_p5_right"/>
+          <p:cNvPr id="285" name="FIG_E_out_p5_right"/>
           <p:cNvSpPr/>
           <p:nvPr/>
         </p:nvSpPr>
@@ -15230,7 +15443,7 @@
       </p:sp>
       <p:sp>
         <p:nvSpPr>
-          <p:cNvPr id="280" name="FIG_E_out_p5_label"/>
+          <p:cNvPr id="286" name="FIG_E_out_p5_label"/>
           <p:cNvSpPr txBox="1"/>
           <p:nvPr/>
         </p:nvSpPr>
@@ -15267,7 +15480,7 @@
       </p:sp>
       <p:sp>
         <p:nvSpPr>
-          <p:cNvPr id="281" name="FIG_T_b2_title"/>
+          <p:cNvPr id="287" name="FIG_T_b2_title"/>
           <p:cNvSpPr txBox="1"/>
           <p:nvPr/>
         </p:nvSpPr>
@@ -15303,7 +15516,7 @@
       </p:sp>
       <p:sp>
         <p:nvSpPr>
-          <p:cNvPr id="282" name="FIG_T_b2_iou"/>
+          <p:cNvPr id="288" name="FIG_T_b2_iou"/>
           <p:cNvSpPr txBox="1"/>
           <p:nvPr/>
         </p:nvSpPr>
@@ -15340,7 +15553,7 @@
       </p:sp>
       <p:sp>
         <p:nvSpPr>
-          <p:cNvPr id="283" name="FIG_E_b2_sq1_0"/>
+          <p:cNvPr id="289" name="FIG_E_b2_sq1_0"/>
           <p:cNvSpPr/>
           <p:nvPr/>
         </p:nvSpPr>
@@ -15386,7 +15599,7 @@
       </p:sp>
       <p:sp>
         <p:nvSpPr>
-          <p:cNvPr id="284" name="FIG_E_b2_sq1_1"/>
+          <p:cNvPr id="290" name="FIG_E_b2_sq1_1"/>
           <p:cNvSpPr/>
           <p:nvPr/>
         </p:nvSpPr>
@@ -15432,7 +15645,7 @@
       </p:sp>
       <p:sp>
         <p:nvSpPr>
-          <p:cNvPr id="285" name="FIG_E_b2_sq1_2"/>
+          <p:cNvPr id="291" name="FIG_E_b2_sq1_2"/>
           <p:cNvSpPr/>
           <p:nvPr/>
         </p:nvSpPr>
@@ -15478,7 +15691,7 @@
       </p:sp>
       <p:sp>
         <p:nvSpPr>
-          <p:cNvPr id="286" name="FIG_E_b2_sq1_3"/>
+          <p:cNvPr id="292" name="FIG_E_b2_sq1_3"/>
           <p:cNvSpPr/>
           <p:nvPr/>
         </p:nvSpPr>
@@ -15524,7 +15737,7 @@
       </p:sp>
       <p:sp>
         <p:nvSpPr>
-          <p:cNvPr id="287" name="FIG_E_b2_sq1_4"/>
+          <p:cNvPr id="293" name="FIG_E_b2_sq1_4"/>
           <p:cNvSpPr/>
           <p:nvPr/>
         </p:nvSpPr>
@@ -15570,7 +15783,7 @@
       </p:sp>
       <p:sp>
         <p:nvSpPr>
-          <p:cNvPr id="288" name="FIG_E_b2_sq1_5"/>
+          <p:cNvPr id="294" name="FIG_E_b2_sq1_5"/>
           <p:cNvSpPr/>
           <p:nvPr/>
         </p:nvSpPr>
@@ -15616,7 +15829,7 @@
       </p:sp>
       <p:sp>
         <p:nvSpPr>
-          <p:cNvPr id="289" name="FIG_E_b2_sq1_dots"/>
+          <p:cNvPr id="295" name="FIG_E_b2_sq1_dots"/>
           <p:cNvSpPr txBox="1"/>
           <p:nvPr/>
         </p:nvSpPr>
@@ -15652,7 +15865,7 @@
       </p:sp>
       <p:sp>
         <p:nvSpPr>
-          <p:cNvPr id="290" name="FIG_T_b2_dec"/>
+          <p:cNvPr id="296" name="FIG_T_b2_dec"/>
           <p:cNvSpPr txBox="1"/>
           <p:nvPr/>
         </p:nvSpPr>
@@ -15688,7 +15901,7 @@
       </p:sp>
       <p:sp>
         <p:nvSpPr>
-          <p:cNvPr id="291" name="FIG_E_b2_sq2_0"/>
+          <p:cNvPr id="297" name="FIG_E_b2_sq2_0"/>
           <p:cNvSpPr/>
           <p:nvPr/>
         </p:nvSpPr>
@@ -15734,7 +15947,7 @@
       </p:sp>
       <p:sp>
         <p:nvSpPr>
-          <p:cNvPr id="292" name="FIG_E_b2_sq2_1"/>
+          <p:cNvPr id="298" name="FIG_E_b2_sq2_1"/>
           <p:cNvSpPr/>
           <p:nvPr/>
         </p:nvSpPr>
@@ -15780,7 +15993,7 @@
       </p:sp>
       <p:sp>
         <p:nvSpPr>
-          <p:cNvPr id="293" name="FIG_E_b2_sq2_2"/>
+          <p:cNvPr id="299" name="FIG_E_b2_sq2_2"/>
           <p:cNvSpPr/>
           <p:nvPr/>
         </p:nvSpPr>
@@ -15826,7 +16039,7 @@
       </p:sp>
       <p:sp>
         <p:nvSpPr>
-          <p:cNvPr id="294" name="FIG_E_b2_sq2_3"/>
+          <p:cNvPr id="300" name="FIG_E_b2_sq2_3"/>
           <p:cNvSpPr/>
           <p:nvPr/>
         </p:nvSpPr>
@@ -15872,7 +16085,7 @@
       </p:sp>
       <p:sp>
         <p:nvSpPr>
-          <p:cNvPr id="295" name="FIG_E_b2_sq2_4"/>
+          <p:cNvPr id="301" name="FIG_E_b2_sq2_4"/>
           <p:cNvSpPr/>
           <p:nvPr/>
         </p:nvSpPr>
@@ -15918,7 +16131,7 @@
       </p:sp>
       <p:sp>
         <p:nvSpPr>
-          <p:cNvPr id="296" name="FIG_E_b2_sq2_dots"/>
+          <p:cNvPr id="302" name="FIG_E_b2_sq2_dots"/>
           <p:cNvSpPr txBox="1"/>
           <p:nvPr/>
         </p:nvSpPr>
@@ -15954,7 +16167,7 @@
       </p:sp>
       <p:sp>
         <p:nvSpPr>
-          <p:cNvPr id="297" name="FIG_E_b2_last"/>
+          <p:cNvPr id="303" name="FIG_E_b2_last"/>
           <p:cNvSpPr/>
           <p:nvPr/>
         </p:nvSpPr>
@@ -16000,7 +16213,7 @@
       </p:sp>
       <p:cxnSp>
         <p:nvCxnSpPr>
-          <p:cNvPr id="298" name="FIG_L_b2_flow"/>
+          <p:cNvPr id="304" name="FIG_L_b2_flow"/>
           <p:cNvCxnSpPr/>
           <p:nvPr/>
         </p:nvCxnSpPr>
@@ -16036,7 +16249,7 @@
       </p:cxnSp>
       <p:cxnSp>
         <p:nvCxnSpPr>
-          <p:cNvPr id="299" name="FIG_L_b1_b2"/>
+          <p:cNvPr id="305" name="FIG_L_b1_b2"/>
           <p:cNvCxnSpPr/>
           <p:nvPr/>
         </p:nvCxnSpPr>
@@ -16072,7 +16285,7 @@
       </p:cxnSp>
       <p:cxnSp>
         <p:nvCxnSpPr>
-          <p:cNvPr id="300" name="FIG_L_b2_b3"/>
+          <p:cNvPr id="306" name="FIG_L_b2_b3"/>
           <p:cNvCxnSpPr/>
           <p:nvPr/>
         </p:nvCxnSpPr>
@@ -16108,7 +16321,7 @@
       </p:cxnSp>
       <p:sp>
         <p:nvSpPr>
-          <p:cNvPr id="301" name="FIG_T_b3_title"/>
+          <p:cNvPr id="307" name="FIG_T_b3_title"/>
           <p:cNvSpPr txBox="1"/>
           <p:nvPr/>
         </p:nvSpPr>
@@ -16144,7 +16357,7 @@
       </p:sp>
       <p:sp>
         <p:nvSpPr>
-          <p:cNvPr id="302" name="FIG_E_b3_bars_0"/>
+          <p:cNvPr id="308" name="FIG_E_b3_bars_0"/>
           <p:cNvSpPr/>
           <p:nvPr/>
         </p:nvSpPr>
@@ -16188,7 +16401,7 @@
       </p:sp>
       <p:sp>
         <p:nvSpPr>
-          <p:cNvPr id="303" name="FIG_E_b3_bars_1"/>
+          <p:cNvPr id="309" name="FIG_E_b3_bars_1"/>
           <p:cNvSpPr/>
           <p:nvPr/>
         </p:nvSpPr>
@@ -16232,7 +16445,7 @@
       </p:sp>
       <p:sp>
         <p:nvSpPr>
-          <p:cNvPr id="304" name="FIG_E_b3_bars_2"/>
+          <p:cNvPr id="310" name="FIG_E_b3_bars_2"/>
           <p:cNvSpPr/>
           <p:nvPr/>
         </p:nvSpPr>
@@ -16276,7 +16489,7 @@
       </p:sp>
       <p:sp>
         <p:nvSpPr>
-          <p:cNvPr id="305" name="FIG_E_b3_bars_3"/>
+          <p:cNvPr id="311" name="FIG_E_b3_bars_3"/>
           <p:cNvSpPr/>
           <p:nvPr/>
         </p:nvSpPr>
@@ -16320,7 +16533,7 @@
       </p:sp>
       <p:cxnSp>
         <p:nvCxnSpPr>
-          <p:cNvPr id="306" name="FIG_E_b3_bars_axis"/>
+          <p:cNvPr id="312" name="FIG_E_b3_bars_axis"/>
           <p:cNvCxnSpPr/>
           <p:nvPr/>
         </p:nvCxnSpPr>
@@ -16355,7 +16568,7 @@
       </p:cxnSp>
       <p:sp>
         <p:nvSpPr>
-          <p:cNvPr id="307" name="FIG_T_b3_bars"/>
+          <p:cNvPr id="313" name="FIG_T_b3_bars"/>
           <p:cNvSpPr txBox="1"/>
           <p:nvPr/>
         </p:nvSpPr>
@@ -16391,7 +16604,7 @@
       </p:sp>
       <p:sp>
         <p:nvSpPr>
-          <p:cNvPr id="308" name="FIG_E_b3_box1"/>
+          <p:cNvPr id="314" name="FIG_E_b3_box1"/>
           <p:cNvSpPr/>
           <p:nvPr/>
         </p:nvSpPr>
@@ -16435,7 +16648,7 @@
       </p:sp>
       <p:sp>
         <p:nvSpPr>
-          <p:cNvPr id="309" name="FIG_E_b3_box2"/>
+          <p:cNvPr id="315" name="FIG_E_b3_box2"/>
           <p:cNvSpPr/>
           <p:nvPr/>
         </p:nvSpPr>
@@ -16479,7 +16692,7 @@
       </p:sp>
       <p:sp>
         <p:nvSpPr>
-          <p:cNvPr id="310" name="FIG_T_b3_box"/>
+          <p:cNvPr id="316" name="FIG_T_b3_box"/>
           <p:cNvSpPr txBox="1"/>
           <p:nvPr/>
         </p:nvSpPr>
@@ -16516,7 +16729,7 @@
       </p:sp>
       <p:sp>
         <p:nvSpPr>
-          <p:cNvPr id="311" name="FIG_T_b4_title"/>
+          <p:cNvPr id="317" name="FIG_T_b4_title"/>
           <p:cNvSpPr txBox="1"/>
           <p:nvPr/>
         </p:nvSpPr>
@@ -16552,7 +16765,7 @@
       </p:sp>
       <p:sp>
         <p:nvSpPr>
-          <p:cNvPr id="312" name="FIG_E_b4_icon0"/>
+          <p:cNvPr id="318" name="FIG_E_b4_icon0"/>
           <p:cNvSpPr/>
           <p:nvPr/>
         </p:nvSpPr>
@@ -16596,7 +16809,7 @@
       </p:sp>
       <p:sp>
         <p:nvSpPr>
-          <p:cNvPr id="313" name="FIG_T_b4_head0"/>
+          <p:cNvPr id="319" name="FIG_T_b4_head0"/>
           <p:cNvSpPr txBox="1"/>
           <p:nvPr/>
         </p:nvSpPr>
@@ -16632,7 +16845,7 @@
       </p:sp>
       <p:sp>
         <p:nvSpPr>
-          <p:cNvPr id="314" name="FIG_T_b4_tail0"/>
+          <p:cNvPr id="320" name="FIG_T_b4_tail0"/>
           <p:cNvSpPr txBox="1"/>
           <p:nvPr/>
         </p:nvSpPr>
@@ -16668,7 +16881,7 @@
       </p:sp>
       <p:sp>
         <p:nvSpPr>
-          <p:cNvPr id="315" name="FIG_E_b4_icon1"/>
+          <p:cNvPr id="321" name="FIG_E_b4_icon1"/>
           <p:cNvSpPr/>
           <p:nvPr/>
         </p:nvSpPr>
@@ -16712,7 +16925,7 @@
       </p:sp>
       <p:sp>
         <p:nvSpPr>
-          <p:cNvPr id="316" name="FIG_T_b4_head1"/>
+          <p:cNvPr id="322" name="FIG_T_b4_head1"/>
           <p:cNvSpPr txBox="1"/>
           <p:nvPr/>
         </p:nvSpPr>
@@ -16748,7 +16961,7 @@
       </p:sp>
       <p:sp>
         <p:nvSpPr>
-          <p:cNvPr id="317" name="FIG_T_b4_tail1"/>
+          <p:cNvPr id="323" name="FIG_T_b4_tail1"/>
           <p:cNvSpPr txBox="1"/>
           <p:nvPr/>
         </p:nvSpPr>
@@ -16784,7 +16997,7 @@
       </p:sp>
       <p:sp>
         <p:nvSpPr>
-          <p:cNvPr id="318" name="FIG_E_b4_icon2"/>
+          <p:cNvPr id="324" name="FIG_E_b4_icon2"/>
           <p:cNvSpPr/>
           <p:nvPr/>
         </p:nvSpPr>
@@ -16828,7 +17041,7 @@
       </p:sp>
       <p:sp>
         <p:nvSpPr>
-          <p:cNvPr id="319" name="FIG_T_b4_head2"/>
+          <p:cNvPr id="325" name="FIG_T_b4_head2"/>
           <p:cNvSpPr txBox="1"/>
           <p:nvPr/>
         </p:nvSpPr>
@@ -16864,7 +17077,7 @@
       </p:sp>
       <p:sp>
         <p:nvSpPr>
-          <p:cNvPr id="320" name="FIG_T_b4_tail2"/>
+          <p:cNvPr id="326" name="FIG_T_b4_tail2"/>
           <p:cNvSpPr txBox="1"/>
           <p:nvPr/>
         </p:nvSpPr>

--- a/examples/mphf-net/rebuild-v2/mphf_net_v2.pptx
+++ b/examples/mphf-net/rebuild-v2/mphf_net_v2.pptx
@@ -8386,7 +8386,7 @@
       </p:cxnSp>
       <p:cxnSp>
         <p:nvCxnSpPr>
-          <p:cNvPr id="119" name="FIG_LD_fusion1_addp5_1"/>
+          <p:cNvPr id="119" name="FIG_L_fusion1_addp5_1"/>
           <p:cNvCxnSpPr/>
           <p:nvPr/>
         </p:nvCxnSpPr>
@@ -8422,7 +8422,7 @@
       </p:cxnSp>
       <p:cxnSp>
         <p:nvCxnSpPr>
-          <p:cNvPr id="120" name="FIG_LD_fusion1_addp5_2"/>
+          <p:cNvPr id="120" name="FIG_L_fusion1_addp5_2"/>
           <p:cNvCxnSpPr/>
           <p:nvPr/>
         </p:nvCxnSpPr>
@@ -8458,7 +8458,7 @@
       </p:cxnSp>
       <p:cxnSp>
         <p:nvCxnSpPr>
-          <p:cNvPr id="121" name="FIG_LD_fusion1_addp5_3"/>
+          <p:cNvPr id="121" name="FIG_L_fusion1_addp5_3"/>
           <p:cNvCxnSpPr/>
           <p:nvPr/>
         </p:nvCxnSpPr>
@@ -8495,14 +8495,14 @@
       </p:cxnSp>
       <p:cxnSp>
         <p:nvCxnSpPr>
-          <p:cNvPr id="122" name="FIG_LD_fusion2_addp3_1"/>
+          <p:cNvPr id="122" name="FIG_L_fusion1_up2_1"/>
           <p:cNvCxnSpPr/>
           <p:nvPr/>
         </p:nvCxnSpPr>
         <p:spPr>
           <a:xfrm>
-            <a:off x="5969000" y="3333750"/>
-            <a:ext cx="301625" cy="0"/>
+            <a:off x="5603875" y="2341562"/>
+            <a:ext cx="0" cy="388938"/>
           </a:xfrm>
           <a:prstGeom prst="line">
             <a:avLst/>
@@ -8531,14 +8531,14 @@
       </p:cxnSp>
       <p:cxnSp>
         <p:nvCxnSpPr>
-          <p:cNvPr id="123" name="FIG_LD_fusion2_addp3_2"/>
+          <p:cNvPr id="123" name="FIG_L_fusion1_up2_2"/>
           <p:cNvCxnSpPr/>
           <p:nvPr/>
         </p:nvCxnSpPr>
         <p:spPr>
-          <a:xfrm>
-            <a:off x="6270625" y="3333750"/>
-            <a:ext cx="0" cy="381000"/>
+          <a:xfrm flipH="1">
+            <a:off x="4889500" y="2730500"/>
+            <a:ext cx="714375" cy="0"/>
           </a:xfrm>
           <a:prstGeom prst="line">
             <a:avLst/>
@@ -8548,6 +8548,7 @@
               <a:srgbClr val="787E8C"/>
             </a:solidFill>
             <a:prstDash val="dash"/>
+            <a:tailEnd type="triangle" w="sm" len="sm"/>
           </a:ln>
         </p:spPr>
         <p:style>
@@ -8567,14 +8568,14 @@
       </p:cxnSp>
       <p:cxnSp>
         <p:nvCxnSpPr>
-          <p:cNvPr id="124" name="FIG_LD_fusion2_addp3_3"/>
+          <p:cNvPr id="124" name="FIG_L_fusion2_addp4_1"/>
           <p:cNvCxnSpPr/>
           <p:nvPr/>
         </p:nvCxnSpPr>
         <p:spPr>
           <a:xfrm>
-            <a:off x="6270625" y="3714750"/>
-            <a:ext cx="706437" cy="0"/>
+            <a:off x="5969000" y="3333750"/>
+            <a:ext cx="301625" cy="0"/>
           </a:xfrm>
           <a:prstGeom prst="line">
             <a:avLst/>
@@ -8584,7 +8585,6 @@
               <a:srgbClr val="787E8C"/>
             </a:solidFill>
             <a:prstDash val="dash"/>
-            <a:tailEnd type="triangle" w="sm" len="sm"/>
           </a:ln>
         </p:spPr>
         <p:style>
@@ -8604,14 +8604,50 @@
       </p:cxnSp>
       <p:cxnSp>
         <p:nvCxnSpPr>
-          <p:cNvPr id="125" name="FIG_LD_fusion1_fusion2_1"/>
+          <p:cNvPr id="125" name="FIG_L_fusion2_addp4_2"/>
           <p:cNvCxnSpPr/>
           <p:nvPr/>
         </p:nvCxnSpPr>
         <p:spPr>
-          <a:xfrm>
-            <a:off x="5603875" y="2341562"/>
-            <a:ext cx="0" cy="873125"/>
+          <a:xfrm flipV="1">
+            <a:off x="6270625" y="2714625"/>
+            <a:ext cx="0" cy="619125"/>
+          </a:xfrm>
+          <a:prstGeom prst="line">
+            <a:avLst/>
+          </a:prstGeom>
+          <a:ln w="12700">
+            <a:solidFill>
+              <a:srgbClr val="787E8C"/>
+            </a:solidFill>
+            <a:prstDash val="dash"/>
+          </a:ln>
+        </p:spPr>
+        <p:style>
+          <a:lnRef idx="2">
+            <a:schemeClr val="accent1"/>
+          </a:lnRef>
+          <a:fillRef idx="0">
+            <a:schemeClr val="accent1"/>
+          </a:fillRef>
+          <a:effectRef idx="1">
+            <a:schemeClr val="accent1"/>
+          </a:effectRef>
+          <a:fontRef idx="minor">
+            <a:schemeClr val="tx1"/>
+          </a:fontRef>
+        </p:style>
+      </p:cxnSp>
+      <p:cxnSp>
+        <p:nvCxnSpPr>
+          <p:cNvPr id="126" name="FIG_L_fusion2_addp4_3"/>
+          <p:cNvCxnSpPr/>
+          <p:nvPr/>
+        </p:nvCxnSpPr>
+        <p:spPr>
+          <a:xfrm>
+            <a:off x="6270625" y="2714625"/>
+            <a:ext cx="706437" cy="0"/>
           </a:xfrm>
           <a:prstGeom prst="line">
             <a:avLst/>
@@ -8639,9 +8675,82 @@
           </a:fontRef>
         </p:style>
       </p:cxnSp>
-      <p:sp>
-        <p:nvSpPr>
-          <p:cNvPr id="126" name="FIG_E_neck_note_cga"/>
+      <p:cxnSp>
+        <p:nvCxnSpPr>
+          <p:cNvPr id="127" name="FIG_L_fusion2_addp3_1"/>
+          <p:cNvCxnSpPr/>
+          <p:nvPr/>
+        </p:nvCxnSpPr>
+        <p:spPr>
+          <a:xfrm>
+            <a:off x="5603875" y="3452812"/>
+            <a:ext cx="0" cy="261938"/>
+          </a:xfrm>
+          <a:prstGeom prst="line">
+            <a:avLst/>
+          </a:prstGeom>
+          <a:ln w="12700">
+            <a:solidFill>
+              <a:srgbClr val="787E8C"/>
+            </a:solidFill>
+            <a:prstDash val="dash"/>
+          </a:ln>
+        </p:spPr>
+        <p:style>
+          <a:lnRef idx="2">
+            <a:schemeClr val="accent1"/>
+          </a:lnRef>
+          <a:fillRef idx="0">
+            <a:schemeClr val="accent1"/>
+          </a:fillRef>
+          <a:effectRef idx="1">
+            <a:schemeClr val="accent1"/>
+          </a:effectRef>
+          <a:fontRef idx="minor">
+            <a:schemeClr val="tx1"/>
+          </a:fontRef>
+        </p:style>
+      </p:cxnSp>
+      <p:cxnSp>
+        <p:nvCxnSpPr>
+          <p:cNvPr id="128" name="FIG_L_fusion2_addp3_2"/>
+          <p:cNvCxnSpPr/>
+          <p:nvPr/>
+        </p:nvCxnSpPr>
+        <p:spPr>
+          <a:xfrm>
+            <a:off x="5603875" y="3714750"/>
+            <a:ext cx="1373187" cy="0"/>
+          </a:xfrm>
+          <a:prstGeom prst="line">
+            <a:avLst/>
+          </a:prstGeom>
+          <a:ln w="12700">
+            <a:solidFill>
+              <a:srgbClr val="787E8C"/>
+            </a:solidFill>
+            <a:prstDash val="dash"/>
+            <a:tailEnd type="triangle" w="sm" len="sm"/>
+          </a:ln>
+        </p:spPr>
+        <p:style>
+          <a:lnRef idx="2">
+            <a:schemeClr val="accent1"/>
+          </a:lnRef>
+          <a:fillRef idx="0">
+            <a:schemeClr val="accent1"/>
+          </a:fillRef>
+          <a:effectRef idx="1">
+            <a:schemeClr val="accent1"/>
+          </a:effectRef>
+          <a:fontRef idx="minor">
+            <a:schemeClr val="tx1"/>
+          </a:fontRef>
+        </p:style>
+      </p:cxnSp>
+      <p:sp>
+        <p:nvSpPr>
+          <p:cNvPr id="129" name="FIG_E_neck_note_cga"/>
           <p:cNvSpPr/>
           <p:nvPr/>
         </p:nvSpPr>
@@ -8689,7 +8798,7 @@
       </p:sp>
       <p:sp>
         <p:nvSpPr>
-          <p:cNvPr id="127" name="FIG_T_neck_note_cga"/>
+          <p:cNvPr id="130" name="FIG_T_neck_note_cga"/>
           <p:cNvSpPr txBox="1"/>
           <p:nvPr/>
         </p:nvSpPr>
@@ -8725,7 +8834,7 @@
       </p:sp>
       <p:sp>
         <p:nvSpPr>
-          <p:cNvPr id="128" name="FIG_E_neck_note_losc"/>
+          <p:cNvPr id="131" name="FIG_E_neck_note_losc"/>
           <p:cNvSpPr/>
           <p:nvPr/>
         </p:nvSpPr>
@@ -8773,7 +8882,7 @@
       </p:sp>
       <p:sp>
         <p:nvSpPr>
-          <p:cNvPr id="129" name="FIG_T_neck_note_losc"/>
+          <p:cNvPr id="132" name="FIG_T_neck_note_losc"/>
           <p:cNvSpPr txBox="1"/>
           <p:nvPr/>
         </p:nvSpPr>
@@ -8809,7 +8918,7 @@
       </p:sp>
       <p:sp>
         <p:nvSpPr>
-          <p:cNvPr id="130" name="FIG_T_head_title"/>
+          <p:cNvPr id="133" name="FIG_T_head_title"/>
           <p:cNvSpPr txBox="1"/>
           <p:nvPr/>
         </p:nvSpPr>
@@ -8845,7 +8954,7 @@
       </p:sp>
       <p:sp>
         <p:nvSpPr>
-          <p:cNvPr id="131" name="FIG_E_head_iou"/>
+          <p:cNvPr id="134" name="FIG_E_head_iou"/>
           <p:cNvSpPr/>
           <p:nvPr/>
         </p:nvSpPr>
@@ -8893,7 +9002,7 @@
       </p:sp>
       <p:sp>
         <p:nvSpPr>
-          <p:cNvPr id="132" name="FIG_T_head_iou"/>
+          <p:cNvPr id="135" name="FIG_T_head_iou"/>
           <p:cNvSpPr txBox="1"/>
           <p:nvPr/>
         </p:nvSpPr>
@@ -8930,7 +9039,7 @@
       </p:sp>
       <p:sp>
         <p:nvSpPr>
-          <p:cNvPr id="133" name="FIG_E_head_iou_sq_0"/>
+          <p:cNvPr id="136" name="FIG_E_head_iou_sq_0"/>
           <p:cNvSpPr/>
           <p:nvPr/>
         </p:nvSpPr>
@@ -8976,7 +9085,7 @@
       </p:sp>
       <p:sp>
         <p:nvSpPr>
-          <p:cNvPr id="134" name="FIG_E_head_iou_sq_1"/>
+          <p:cNvPr id="137" name="FIG_E_head_iou_sq_1"/>
           <p:cNvSpPr/>
           <p:nvPr/>
         </p:nvSpPr>
@@ -9022,7 +9131,7 @@
       </p:sp>
       <p:sp>
         <p:nvSpPr>
-          <p:cNvPr id="135" name="FIG_E_head_iou_sq_2"/>
+          <p:cNvPr id="138" name="FIG_E_head_iou_sq_2"/>
           <p:cNvSpPr/>
           <p:nvPr/>
         </p:nvSpPr>
@@ -9068,7 +9177,7 @@
       </p:sp>
       <p:sp>
         <p:nvSpPr>
-          <p:cNvPr id="136" name="FIG_E_head_iou_sq_3"/>
+          <p:cNvPr id="139" name="FIG_E_head_iou_sq_3"/>
           <p:cNvSpPr/>
           <p:nvPr/>
         </p:nvSpPr>
@@ -9114,7 +9223,7 @@
       </p:sp>
       <p:sp>
         <p:nvSpPr>
-          <p:cNvPr id="137" name="FIG_E_head_iou_sq_4"/>
+          <p:cNvPr id="140" name="FIG_E_head_iou_sq_4"/>
           <p:cNvSpPr/>
           <p:nvPr/>
         </p:nvSpPr>
@@ -9160,7 +9269,7 @@
       </p:sp>
       <p:sp>
         <p:nvSpPr>
-          <p:cNvPr id="138" name="FIG_E_head_iou_sq_5"/>
+          <p:cNvPr id="141" name="FIG_E_head_iou_sq_5"/>
           <p:cNvSpPr/>
           <p:nvPr/>
         </p:nvSpPr>
@@ -9206,7 +9315,7 @@
       </p:sp>
       <p:sp>
         <p:nvSpPr>
-          <p:cNvPr id="139" name="FIG_E_head_iou_sq_6"/>
+          <p:cNvPr id="142" name="FIG_E_head_iou_sq_6"/>
           <p:cNvSpPr/>
           <p:nvPr/>
         </p:nvSpPr>
@@ -9252,7 +9361,7 @@
       </p:sp>
       <p:sp>
         <p:nvSpPr>
-          <p:cNvPr id="140" name="FIG_E_head_iou_sq_dots"/>
+          <p:cNvPr id="143" name="FIG_E_head_iou_sq_dots"/>
           <p:cNvSpPr txBox="1"/>
           <p:nvPr/>
         </p:nvSpPr>
@@ -9288,7 +9397,7 @@
       </p:sp>
       <p:cxnSp>
         <p:nvCxnSpPr>
-          <p:cNvPr id="141" name="FIG_L_head_iou_dec"/>
+          <p:cNvPr id="144" name="FIG_L_head_iou_dec"/>
           <p:cNvCxnSpPr/>
           <p:nvPr/>
         </p:nvCxnSpPr>
@@ -9324,7 +9433,7 @@
       </p:cxnSp>
       <p:sp>
         <p:nvSpPr>
-          <p:cNvPr id="142" name="FIG_E_head_dec"/>
+          <p:cNvPr id="145" name="FIG_E_head_dec"/>
           <p:cNvSpPr/>
           <p:nvPr/>
         </p:nvSpPr>
@@ -9372,7 +9481,7 @@
       </p:sp>
       <p:sp>
         <p:nvSpPr>
-          <p:cNvPr id="143" name="FIG_T_head_dec"/>
+          <p:cNvPr id="146" name="FIG_T_head_dec"/>
           <p:cNvSpPr txBox="1"/>
           <p:nvPr/>
         </p:nvSpPr>
@@ -9408,7 +9517,7 @@
       </p:sp>
       <p:sp>
         <p:nvSpPr>
-          <p:cNvPr id="144" name="FIG_E_head_dec_sq_0"/>
+          <p:cNvPr id="147" name="FIG_E_head_dec_sq_0"/>
           <p:cNvSpPr/>
           <p:nvPr/>
         </p:nvSpPr>
@@ -9454,7 +9563,7 @@
       </p:sp>
       <p:sp>
         <p:nvSpPr>
-          <p:cNvPr id="145" name="FIG_E_head_dec_sq_1"/>
+          <p:cNvPr id="148" name="FIG_E_head_dec_sq_1"/>
           <p:cNvSpPr/>
           <p:nvPr/>
         </p:nvSpPr>
@@ -9500,7 +9609,7 @@
       </p:sp>
       <p:sp>
         <p:nvSpPr>
-          <p:cNvPr id="146" name="FIG_E_head_dec_sq_2"/>
+          <p:cNvPr id="149" name="FIG_E_head_dec_sq_2"/>
           <p:cNvSpPr/>
           <p:nvPr/>
         </p:nvSpPr>
@@ -9546,7 +9655,7 @@
       </p:sp>
       <p:sp>
         <p:nvSpPr>
-          <p:cNvPr id="147" name="FIG_E_head_dec_sq_3"/>
+          <p:cNvPr id="150" name="FIG_E_head_dec_sq_3"/>
           <p:cNvSpPr/>
           <p:nvPr/>
         </p:nvSpPr>
@@ -9592,7 +9701,7 @@
       </p:sp>
       <p:sp>
         <p:nvSpPr>
-          <p:cNvPr id="148" name="FIG_E_head_dec_sq_4"/>
+          <p:cNvPr id="151" name="FIG_E_head_dec_sq_4"/>
           <p:cNvSpPr/>
           <p:nvPr/>
         </p:nvSpPr>
@@ -9638,7 +9747,7 @@
       </p:sp>
       <p:sp>
         <p:nvSpPr>
-          <p:cNvPr id="149" name="FIG_E_head_dec_sq_5"/>
+          <p:cNvPr id="152" name="FIG_E_head_dec_sq_5"/>
           <p:cNvSpPr/>
           <p:nvPr/>
         </p:nvSpPr>
@@ -9684,7 +9793,7 @@
       </p:sp>
       <p:sp>
         <p:nvSpPr>
-          <p:cNvPr id="150" name="FIG_E_head_dec_sq_dots"/>
+          <p:cNvPr id="153" name="FIG_E_head_dec_sq_dots"/>
           <p:cNvSpPr txBox="1"/>
           <p:nvPr/>
         </p:nvSpPr>
@@ -9720,7 +9829,182 @@
       </p:sp>
       <p:cxnSp>
         <p:nvCxnSpPr>
-          <p:cNvPr id="151" name="FIG_L_head_dec_out"/>
+          <p:cNvPr id="154" name="FIG_L_head_dec_link1"/>
+          <p:cNvCxnSpPr/>
+          <p:nvPr/>
+        </p:nvCxnSpPr>
+        <p:spPr>
+          <a:xfrm>
+            <a:off x="8953500" y="2754312"/>
+            <a:ext cx="55562" cy="0"/>
+          </a:xfrm>
+          <a:prstGeom prst="line">
+            <a:avLst/>
+          </a:prstGeom>
+          <a:ln w="11430">
+            <a:solidFill>
+              <a:srgbClr val="282C3C"/>
+            </a:solidFill>
+          </a:ln>
+        </p:spPr>
+        <p:style>
+          <a:lnRef idx="2">
+            <a:schemeClr val="accent1"/>
+          </a:lnRef>
+          <a:fillRef idx="0">
+            <a:schemeClr val="accent1"/>
+          </a:fillRef>
+          <a:effectRef idx="1">
+            <a:schemeClr val="accent1"/>
+          </a:effectRef>
+          <a:fontRef idx="minor">
+            <a:schemeClr val="tx1"/>
+          </a:fontRef>
+        </p:style>
+      </p:cxnSp>
+      <p:cxnSp>
+        <p:nvCxnSpPr>
+          <p:cNvPr id="155" name="FIG_L_head_dec_link2"/>
+          <p:cNvCxnSpPr/>
+          <p:nvPr/>
+        </p:nvCxnSpPr>
+        <p:spPr>
+          <a:xfrm>
+            <a:off x="9120187" y="2754312"/>
+            <a:ext cx="55563" cy="0"/>
+          </a:xfrm>
+          <a:prstGeom prst="line">
+            <a:avLst/>
+          </a:prstGeom>
+          <a:ln w="11430">
+            <a:solidFill>
+              <a:srgbClr val="282C3C"/>
+            </a:solidFill>
+          </a:ln>
+        </p:spPr>
+        <p:style>
+          <a:lnRef idx="2">
+            <a:schemeClr val="accent1"/>
+          </a:lnRef>
+          <a:fillRef idx="0">
+            <a:schemeClr val="accent1"/>
+          </a:fillRef>
+          <a:effectRef idx="1">
+            <a:schemeClr val="accent1"/>
+          </a:effectRef>
+          <a:fontRef idx="minor">
+            <a:schemeClr val="tx1"/>
+          </a:fontRef>
+        </p:style>
+      </p:cxnSp>
+      <p:cxnSp>
+        <p:nvCxnSpPr>
+          <p:cNvPr id="156" name="FIG_L_head_dec_link3"/>
+          <p:cNvCxnSpPr/>
+          <p:nvPr/>
+        </p:nvCxnSpPr>
+        <p:spPr>
+          <a:xfrm>
+            <a:off x="9286875" y="2754312"/>
+            <a:ext cx="55562" cy="0"/>
+          </a:xfrm>
+          <a:prstGeom prst="line">
+            <a:avLst/>
+          </a:prstGeom>
+          <a:ln w="11430">
+            <a:solidFill>
+              <a:srgbClr val="282C3C"/>
+            </a:solidFill>
+          </a:ln>
+        </p:spPr>
+        <p:style>
+          <a:lnRef idx="2">
+            <a:schemeClr val="accent1"/>
+          </a:lnRef>
+          <a:fillRef idx="0">
+            <a:schemeClr val="accent1"/>
+          </a:fillRef>
+          <a:effectRef idx="1">
+            <a:schemeClr val="accent1"/>
+          </a:effectRef>
+          <a:fontRef idx="minor">
+            <a:schemeClr val="tx1"/>
+          </a:fontRef>
+        </p:style>
+      </p:cxnSp>
+      <p:cxnSp>
+        <p:nvCxnSpPr>
+          <p:cNvPr id="157" name="FIG_L_head_dec_link4"/>
+          <p:cNvCxnSpPr/>
+          <p:nvPr/>
+        </p:nvCxnSpPr>
+        <p:spPr>
+          <a:xfrm>
+            <a:off x="9453562" y="2754312"/>
+            <a:ext cx="55563" cy="0"/>
+          </a:xfrm>
+          <a:prstGeom prst="line">
+            <a:avLst/>
+          </a:prstGeom>
+          <a:ln w="11430">
+            <a:solidFill>
+              <a:srgbClr val="282C3C"/>
+            </a:solidFill>
+          </a:ln>
+        </p:spPr>
+        <p:style>
+          <a:lnRef idx="2">
+            <a:schemeClr val="accent1"/>
+          </a:lnRef>
+          <a:fillRef idx="0">
+            <a:schemeClr val="accent1"/>
+          </a:fillRef>
+          <a:effectRef idx="1">
+            <a:schemeClr val="accent1"/>
+          </a:effectRef>
+          <a:fontRef idx="minor">
+            <a:schemeClr val="tx1"/>
+          </a:fontRef>
+        </p:style>
+      </p:cxnSp>
+      <p:cxnSp>
+        <p:nvCxnSpPr>
+          <p:cNvPr id="158" name="FIG_L_head_dec_link5"/>
+          <p:cNvCxnSpPr/>
+          <p:nvPr/>
+        </p:nvCxnSpPr>
+        <p:spPr>
+          <a:xfrm>
+            <a:off x="9620250" y="2754312"/>
+            <a:ext cx="55562" cy="0"/>
+          </a:xfrm>
+          <a:prstGeom prst="line">
+            <a:avLst/>
+          </a:prstGeom>
+          <a:ln w="11430">
+            <a:solidFill>
+              <a:srgbClr val="282C3C"/>
+            </a:solidFill>
+          </a:ln>
+        </p:spPr>
+        <p:style>
+          <a:lnRef idx="2">
+            <a:schemeClr val="accent1"/>
+          </a:lnRef>
+          <a:fillRef idx="0">
+            <a:schemeClr val="accent1"/>
+          </a:fillRef>
+          <a:effectRef idx="1">
+            <a:schemeClr val="accent1"/>
+          </a:effectRef>
+          <a:fontRef idx="minor">
+            <a:schemeClr val="tx1"/>
+          </a:fontRef>
+        </p:style>
+      </p:cxnSp>
+      <p:cxnSp>
+        <p:nvCxnSpPr>
+          <p:cNvPr id="159" name="FIG_L_head_dec_out"/>
           <p:cNvCxnSpPr/>
           <p:nvPr/>
         </p:nvCxnSpPr>
@@ -9756,7 +10040,7 @@
       </p:cxnSp>
       <p:sp>
         <p:nvSpPr>
-          <p:cNvPr id="152" name="FIG_E_head_out"/>
+          <p:cNvPr id="160" name="FIG_E_head_out"/>
           <p:cNvSpPr/>
           <p:nvPr/>
         </p:nvSpPr>
@@ -9804,7 +10088,7 @@
       </p:sp>
       <p:sp>
         <p:nvSpPr>
-          <p:cNvPr id="153" name="FIG_T_head_out"/>
+          <p:cNvPr id="161" name="FIG_T_head_out"/>
           <p:cNvSpPr txBox="1"/>
           <p:nvPr/>
         </p:nvSpPr>
@@ -9841,7 +10125,7 @@
       </p:sp>
       <p:sp>
         <p:nvSpPr>
-          <p:cNvPr id="154" name="FIG_E_head_bars_0"/>
+          <p:cNvPr id="162" name="FIG_E_head_bars_0"/>
           <p:cNvSpPr/>
           <p:nvPr/>
         </p:nvSpPr>
@@ -9885,7 +10169,7 @@
       </p:sp>
       <p:sp>
         <p:nvSpPr>
-          <p:cNvPr id="155" name="FIG_E_head_bars_1"/>
+          <p:cNvPr id="163" name="FIG_E_head_bars_1"/>
           <p:cNvSpPr/>
           <p:nvPr/>
         </p:nvSpPr>
@@ -9929,7 +10213,7 @@
       </p:sp>
       <p:sp>
         <p:nvSpPr>
-          <p:cNvPr id="156" name="FIG_E_head_bars_2"/>
+          <p:cNvPr id="164" name="FIG_E_head_bars_2"/>
           <p:cNvSpPr/>
           <p:nvPr/>
         </p:nvSpPr>
@@ -9973,7 +10257,7 @@
       </p:sp>
       <p:sp>
         <p:nvSpPr>
-          <p:cNvPr id="157" name="FIG_E_head_bars_3"/>
+          <p:cNvPr id="165" name="FIG_E_head_bars_3"/>
           <p:cNvSpPr/>
           <p:nvPr/>
         </p:nvSpPr>
@@ -10017,7 +10301,7 @@
       </p:sp>
       <p:cxnSp>
         <p:nvCxnSpPr>
-          <p:cNvPr id="158" name="FIG_E_head_bars_axis"/>
+          <p:cNvPr id="166" name="FIG_E_head_bars_axis"/>
           <p:cNvCxnSpPr/>
           <p:nvPr/>
         </p:nvCxnSpPr>
@@ -10052,7 +10336,7 @@
       </p:cxnSp>
       <p:sp>
         <p:nvSpPr>
-          <p:cNvPr id="159" name="FIG_E_head_bbox"/>
+          <p:cNvPr id="167" name="FIG_E_head_bbox"/>
           <p:cNvSpPr/>
           <p:nvPr/>
         </p:nvSpPr>
@@ -10097,7 +10381,7 @@
       </p:sp>
       <p:sp>
         <p:nvSpPr>
-          <p:cNvPr id="160" name="FIG_T_legend_title"/>
+          <p:cNvPr id="168" name="FIG_T_legend_title"/>
           <p:cNvSpPr txBox="1"/>
           <p:nvPr/>
         </p:nvSpPr>
@@ -10133,7 +10417,7 @@
       </p:sp>
       <p:sp>
         <p:nvSpPr>
-          <p:cNvPr id="161" name="FIG_E_lg_p5_top"/>
+          <p:cNvPr id="169" name="FIG_E_lg_p5_top"/>
           <p:cNvSpPr/>
           <p:nvPr/>
         </p:nvSpPr>
@@ -10200,7 +10484,7 @@
       </p:sp>
       <p:sp>
         <p:nvSpPr>
-          <p:cNvPr id="162" name="FIG_E_lg_p5_front"/>
+          <p:cNvPr id="170" name="FIG_E_lg_p5_front"/>
           <p:cNvSpPr/>
           <p:nvPr/>
         </p:nvSpPr>
@@ -10275,7 +10559,7 @@
       </p:sp>
       <p:sp>
         <p:nvSpPr>
-          <p:cNvPr id="163" name="FIG_E_lg_p5_right"/>
+          <p:cNvPr id="171" name="FIG_E_lg_p5_right"/>
           <p:cNvSpPr/>
           <p:nvPr/>
         </p:nvSpPr>
@@ -10342,7 +10626,7 @@
       </p:sp>
       <p:sp>
         <p:nvSpPr>
-          <p:cNvPr id="164" name="FIG_T_lg_p5"/>
+          <p:cNvPr id="172" name="FIG_T_lg_p5"/>
           <p:cNvSpPr txBox="1"/>
           <p:nvPr/>
         </p:nvSpPr>
@@ -10378,7 +10662,7 @@
       </p:sp>
       <p:sp>
         <p:nvSpPr>
-          <p:cNvPr id="165" name="FIG_E_lg_p4_top"/>
+          <p:cNvPr id="173" name="FIG_E_lg_p4_top"/>
           <p:cNvSpPr/>
           <p:nvPr/>
         </p:nvSpPr>
@@ -10445,7 +10729,7 @@
       </p:sp>
       <p:sp>
         <p:nvSpPr>
-          <p:cNvPr id="166" name="FIG_E_lg_p4_front"/>
+          <p:cNvPr id="174" name="FIG_E_lg_p4_front"/>
           <p:cNvSpPr/>
           <p:nvPr/>
         </p:nvSpPr>
@@ -10520,7 +10804,7 @@
       </p:sp>
       <p:sp>
         <p:nvSpPr>
-          <p:cNvPr id="167" name="FIG_E_lg_p4_right"/>
+          <p:cNvPr id="175" name="FIG_E_lg_p4_right"/>
           <p:cNvSpPr/>
           <p:nvPr/>
         </p:nvSpPr>
@@ -10587,7 +10871,7 @@
       </p:sp>
       <p:sp>
         <p:nvSpPr>
-          <p:cNvPr id="168" name="FIG_T_lg_p4"/>
+          <p:cNvPr id="176" name="FIG_T_lg_p4"/>
           <p:cNvSpPr txBox="1"/>
           <p:nvPr/>
         </p:nvSpPr>
@@ -10623,7 +10907,7 @@
       </p:sp>
       <p:sp>
         <p:nvSpPr>
-          <p:cNvPr id="169" name="FIG_E_lg_p3_top"/>
+          <p:cNvPr id="177" name="FIG_E_lg_p3_top"/>
           <p:cNvSpPr/>
           <p:nvPr/>
         </p:nvSpPr>
@@ -10690,7 +10974,7 @@
       </p:sp>
       <p:sp>
         <p:nvSpPr>
-          <p:cNvPr id="170" name="FIG_E_lg_p3_front"/>
+          <p:cNvPr id="178" name="FIG_E_lg_p3_front"/>
           <p:cNvSpPr/>
           <p:nvPr/>
         </p:nvSpPr>
@@ -10765,7 +11049,7 @@
       </p:sp>
       <p:sp>
         <p:nvSpPr>
-          <p:cNvPr id="171" name="FIG_E_lg_p3_right"/>
+          <p:cNvPr id="179" name="FIG_E_lg_p3_right"/>
           <p:cNvSpPr/>
           <p:nvPr/>
         </p:nvSpPr>
@@ -10832,7 +11116,7 @@
       </p:sp>
       <p:sp>
         <p:nvSpPr>
-          <p:cNvPr id="172" name="FIG_T_lg_p3"/>
+          <p:cNvPr id="180" name="FIG_T_lg_p3"/>
           <p:cNvSpPr txBox="1"/>
           <p:nvPr/>
         </p:nvSpPr>
@@ -10868,7 +11152,7 @@
       </p:sp>
       <p:sp>
         <p:nvSpPr>
-          <p:cNvPr id="173" name="FIG_E_lg_up"/>
+          <p:cNvPr id="181" name="FIG_E_lg_up"/>
           <p:cNvSpPr/>
           <p:nvPr/>
         </p:nvSpPr>
@@ -10914,7 +11198,7 @@
       </p:sp>
       <p:sp>
         <p:nvSpPr>
-          <p:cNvPr id="174" name="FIG_E_lg_up_text"/>
+          <p:cNvPr id="182" name="FIG_E_lg_up_text"/>
           <p:cNvSpPr txBox="1"/>
           <p:nvPr/>
         </p:nvSpPr>
@@ -10950,7 +11234,7 @@
       </p:sp>
       <p:sp>
         <p:nvSpPr>
-          <p:cNvPr id="175" name="FIG_T_lg_up"/>
+          <p:cNvPr id="183" name="FIG_T_lg_up"/>
           <p:cNvSpPr txBox="1"/>
           <p:nvPr/>
         </p:nvSpPr>
@@ -10986,7 +11270,7 @@
       </p:sp>
       <p:sp>
         <p:nvSpPr>
-          <p:cNvPr id="176" name="FIG_E_lg_down"/>
+          <p:cNvPr id="184" name="FIG_E_lg_down"/>
           <p:cNvSpPr/>
           <p:nvPr/>
         </p:nvSpPr>
@@ -11032,7 +11316,7 @@
       </p:sp>
       <p:sp>
         <p:nvSpPr>
-          <p:cNvPr id="177" name="FIG_E_lg_down_text"/>
+          <p:cNvPr id="185" name="FIG_E_lg_down_text"/>
           <p:cNvSpPr txBox="1"/>
           <p:nvPr/>
         </p:nvSpPr>
@@ -11068,7 +11352,7 @@
       </p:sp>
       <p:sp>
         <p:nvSpPr>
-          <p:cNvPr id="178" name="FIG_T_lg_down"/>
+          <p:cNvPr id="186" name="FIG_T_lg_down"/>
           <p:cNvSpPr txBox="1"/>
           <p:nvPr/>
         </p:nvSpPr>
@@ -11104,7 +11388,7 @@
       </p:sp>
       <p:sp>
         <p:nvSpPr>
-          <p:cNvPr id="179" name="FIG_E_lg_add"/>
+          <p:cNvPr id="187" name="FIG_E_lg_add"/>
           <p:cNvSpPr/>
           <p:nvPr/>
         </p:nvSpPr>
@@ -11150,7 +11434,7 @@
       </p:sp>
       <p:sp>
         <p:nvSpPr>
-          <p:cNvPr id="180" name="FIG_E_lg_add_text"/>
+          <p:cNvPr id="188" name="FIG_E_lg_add_text"/>
           <p:cNvSpPr txBox="1"/>
           <p:nvPr/>
         </p:nvSpPr>
@@ -11186,7 +11470,7 @@
       </p:sp>
       <p:sp>
         <p:nvSpPr>
-          <p:cNvPr id="181" name="FIG_T_lg_add"/>
+          <p:cNvPr id="189" name="FIG_T_lg_add"/>
           <p:cNvSpPr txBox="1"/>
           <p:nvPr/>
         </p:nvSpPr>
@@ -11222,7 +11506,7 @@
       </p:sp>
       <p:sp>
         <p:nvSpPr>
-          <p:cNvPr id="182" name="FIG_E_lg_losc"/>
+          <p:cNvPr id="190" name="FIG_E_lg_losc"/>
           <p:cNvSpPr/>
           <p:nvPr/>
         </p:nvSpPr>
@@ -11270,7 +11554,7 @@
       </p:sp>
       <p:sp>
         <p:nvSpPr>
-          <p:cNvPr id="183" name="FIG_T_lg_losc_tag"/>
+          <p:cNvPr id="191" name="FIG_T_lg_losc_tag"/>
           <p:cNvSpPr txBox="1"/>
           <p:nvPr/>
         </p:nvSpPr>
@@ -11306,7 +11590,7 @@
       </p:sp>
       <p:sp>
         <p:nvSpPr>
-          <p:cNvPr id="184" name="FIG_T_lg_losc"/>
+          <p:cNvPr id="192" name="FIG_T_lg_losc"/>
           <p:cNvSpPr txBox="1"/>
           <p:nvPr/>
         </p:nvSpPr>
@@ -11342,7 +11626,7 @@
       </p:sp>
       <p:sp>
         <p:nvSpPr>
-          <p:cNvPr id="185" name="FIG_E_lg_cga"/>
+          <p:cNvPr id="193" name="FIG_E_lg_cga"/>
           <p:cNvSpPr/>
           <p:nvPr/>
         </p:nvSpPr>
@@ -11390,7 +11674,7 @@
       </p:sp>
       <p:sp>
         <p:nvSpPr>
-          <p:cNvPr id="186" name="FIG_T_lg_cga_tag"/>
+          <p:cNvPr id="194" name="FIG_T_lg_cga_tag"/>
           <p:cNvSpPr txBox="1"/>
           <p:nvPr/>
         </p:nvSpPr>
@@ -11426,7 +11710,7 @@
       </p:sp>
       <p:sp>
         <p:nvSpPr>
-          <p:cNvPr id="187" name="FIG_T_lg_cga"/>
+          <p:cNvPr id="195" name="FIG_T_lg_cga"/>
           <p:cNvSpPr txBox="1"/>
           <p:nvPr/>
         </p:nvSpPr>
@@ -11462,7 +11746,7 @@
       </p:sp>
       <p:cxnSp>
         <p:nvCxnSpPr>
-          <p:cNvPr id="188" name="FIG_LD_lg_solid"/>
+          <p:cNvPr id="196" name="FIG_LD_lg_solid"/>
           <p:cNvCxnSpPr/>
           <p:nvPr/>
         </p:nvCxnSpPr>
@@ -11498,7 +11782,7 @@
       </p:cxnSp>
       <p:sp>
         <p:nvSpPr>
-          <p:cNvPr id="189" name="FIG_T_lg_solid"/>
+          <p:cNvPr id="197" name="FIG_T_lg_solid"/>
           <p:cNvSpPr txBox="1"/>
           <p:nvPr/>
         </p:nvSpPr>
@@ -11534,7 +11818,7 @@
       </p:sp>
       <p:cxnSp>
         <p:nvCxnSpPr>
-          <p:cNvPr id="190" name="FIG_LD_lg_dash"/>
+          <p:cNvPr id="198" name="FIG_LD_lg_dash"/>
           <p:cNvCxnSpPr/>
           <p:nvPr/>
         </p:nvCxnSpPr>
@@ -11571,7 +11855,7 @@
       </p:cxnSp>
       <p:sp>
         <p:nvSpPr>
-          <p:cNvPr id="191" name="FIG_T_lg_dash"/>
+          <p:cNvPr id="199" name="FIG_T_lg_dash"/>
           <p:cNvSpPr txBox="1"/>
           <p:nvPr/>
         </p:nvSpPr>
@@ -11607,7 +11891,7 @@
       </p:sp>
       <p:cxnSp>
         <p:nvCxnSpPr>
-          <p:cNvPr id="192" name="FIG_L_input_backbone"/>
+          <p:cNvPr id="200" name="FIG_L_input_backbone"/>
           <p:cNvCxnSpPr/>
           <p:nvPr/>
         </p:nvCxnSpPr>
@@ -11643,7 +11927,7 @@
       </p:cxnSp>
       <p:cxnSp>
         <p:nvCxnSpPr>
-          <p:cNvPr id="193" name="FIG_L_backbone_neck"/>
+          <p:cNvPr id="201" name="FIG_L_backbone_neck"/>
           <p:cNvCxnSpPr/>
           <p:nvPr/>
         </p:nvCxnSpPr>
@@ -11679,7 +11963,7 @@
       </p:cxnSp>
       <p:cxnSp>
         <p:nvCxnSpPr>
-          <p:cNvPr id="194" name="FIG_L_neck_head"/>
+          <p:cNvPr id="202" name="FIG_L_neck_head"/>
           <p:cNvCxnSpPr/>
           <p:nvPr/>
         </p:nvCxnSpPr>
@@ -11715,7 +11999,7 @@
       </p:cxnSp>
       <p:sp>
         <p:nvSpPr>
-          <p:cNvPr id="195" name="FIG_T_m1_title"/>
+          <p:cNvPr id="203" name="FIG_T_m1_title"/>
           <p:cNvSpPr txBox="1"/>
           <p:nvPr/>
         </p:nvSpPr>
@@ -11751,7 +12035,7 @@
       </p:sp>
       <p:sp>
         <p:nvSpPr>
-          <p:cNvPr id="196" name="FIG_T_m1_in"/>
+          <p:cNvPr id="204" name="FIG_T_m1_in"/>
           <p:cNvSpPr txBox="1"/>
           <p:nvPr/>
         </p:nvSpPr>
@@ -11787,7 +12071,7 @@
       </p:sp>
       <p:sp>
         <p:nvSpPr>
-          <p:cNvPr id="197" name="FIG_E_m1_csp"/>
+          <p:cNvPr id="205" name="FIG_E_m1_csp"/>
           <p:cNvSpPr/>
           <p:nvPr/>
         </p:nvSpPr>
@@ -11835,7 +12119,7 @@
       </p:sp>
       <p:sp>
         <p:nvSpPr>
-          <p:cNvPr id="198" name="FIG_T_m1_csp"/>
+          <p:cNvPr id="206" name="FIG_T_m1_csp"/>
           <p:cNvSpPr txBox="1"/>
           <p:nvPr/>
         </p:nvSpPr>
@@ -11871,7 +12155,7 @@
       </p:sp>
       <p:sp>
         <p:nvSpPr>
-          <p:cNvPr id="199" name="FIG_E_m1_b0"/>
+          <p:cNvPr id="207" name="FIG_E_m1_b0"/>
           <p:cNvSpPr/>
           <p:nvPr/>
         </p:nvSpPr>
@@ -11919,7 +12203,7 @@
       </p:sp>
       <p:sp>
         <p:nvSpPr>
-          <p:cNvPr id="200" name="FIG_T_m1_b0"/>
+          <p:cNvPr id="208" name="FIG_T_m1_b0"/>
           <p:cNvSpPr txBox="1"/>
           <p:nvPr/>
         </p:nvSpPr>
@@ -11955,7 +12239,7 @@
       </p:sp>
       <p:sp>
         <p:nvSpPr>
-          <p:cNvPr id="201" name="FIG_E_m1_b1"/>
+          <p:cNvPr id="209" name="FIG_E_m1_b1"/>
           <p:cNvSpPr/>
           <p:nvPr/>
         </p:nvSpPr>
@@ -12003,7 +12287,7 @@
       </p:sp>
       <p:sp>
         <p:nvSpPr>
-          <p:cNvPr id="202" name="FIG_T_m1_b1"/>
+          <p:cNvPr id="210" name="FIG_T_m1_b1"/>
           <p:cNvSpPr txBox="1"/>
           <p:nvPr/>
         </p:nvSpPr>
@@ -12039,7 +12323,7 @@
       </p:sp>
       <p:sp>
         <p:nvSpPr>
-          <p:cNvPr id="203" name="FIG_E_m1_b2"/>
+          <p:cNvPr id="211" name="FIG_E_m1_b2"/>
           <p:cNvSpPr/>
           <p:nvPr/>
         </p:nvSpPr>
@@ -12087,7 +12371,7 @@
       </p:sp>
       <p:sp>
         <p:nvSpPr>
-          <p:cNvPr id="204" name="FIG_T_m1_b2"/>
+          <p:cNvPr id="212" name="FIG_T_m1_b2"/>
           <p:cNvSpPr txBox="1"/>
           <p:nvPr/>
         </p:nvSpPr>
@@ -12123,7 +12407,7 @@
       </p:sp>
       <p:sp>
         <p:nvSpPr>
-          <p:cNvPr id="205" name="FIG_T_m1_bdots"/>
+          <p:cNvPr id="213" name="FIG_T_m1_bdots"/>
           <p:cNvSpPr txBox="1"/>
           <p:nvPr/>
         </p:nvSpPr>
@@ -12159,7 +12443,7 @@
       </p:sp>
       <p:sp>
         <p:nvSpPr>
-          <p:cNvPr id="206" name="FIG_E_m1_fuse"/>
+          <p:cNvPr id="214" name="FIG_E_m1_fuse"/>
           <p:cNvSpPr/>
           <p:nvPr/>
         </p:nvSpPr>
@@ -12207,7 +12491,7 @@
       </p:sp>
       <p:sp>
         <p:nvSpPr>
-          <p:cNvPr id="207" name="FIG_T_m1_fuse"/>
+          <p:cNvPr id="215" name="FIG_T_m1_fuse"/>
           <p:cNvSpPr txBox="1"/>
           <p:nvPr/>
         </p:nvSpPr>
@@ -12243,7 +12527,7 @@
       </p:sp>
       <p:sp>
         <p:nvSpPr>
-          <p:cNvPr id="208" name="FIG_E_m1_ema"/>
+          <p:cNvPr id="216" name="FIG_E_m1_ema"/>
           <p:cNvSpPr/>
           <p:nvPr/>
         </p:nvSpPr>
@@ -12291,7 +12575,7 @@
       </p:sp>
       <p:sp>
         <p:nvSpPr>
-          <p:cNvPr id="209" name="FIG_T_m1_ema"/>
+          <p:cNvPr id="217" name="FIG_T_m1_ema"/>
           <p:cNvSpPr txBox="1"/>
           <p:nvPr/>
         </p:nvSpPr>
@@ -12327,7 +12611,7 @@
       </p:sp>
       <p:sp>
         <p:nvSpPr>
-          <p:cNvPr id="210" name="FIG_T_m1_out"/>
+          <p:cNvPr id="218" name="FIG_T_m1_out"/>
           <p:cNvSpPr txBox="1"/>
           <p:nvPr/>
         </p:nvSpPr>
@@ -12363,7 +12647,7 @@
       </p:sp>
       <p:cxnSp>
         <p:nvCxnSpPr>
-          <p:cNvPr id="211" name="FIG_L_m1_f1"/>
+          <p:cNvPr id="219" name="FIG_L_m1_f1"/>
           <p:cNvCxnSpPr/>
           <p:nvPr/>
         </p:nvCxnSpPr>
@@ -12399,14 +12683,14 @@
       </p:cxnSp>
       <p:cxnSp>
         <p:nvCxnSpPr>
-          <p:cNvPr id="212" name="FIG_L_m1_f2"/>
+          <p:cNvPr id="220" name="FIG_L_m1_fan_out0"/>
           <p:cNvCxnSpPr/>
           <p:nvPr/>
         </p:nvCxnSpPr>
         <p:spPr>
-          <a:xfrm>
-            <a:off x="952500" y="5175250"/>
-            <a:ext cx="0" cy="174625"/>
+          <a:xfrm flipH="1">
+            <a:off x="428625" y="5175250"/>
+            <a:ext cx="523875" cy="174625"/>
           </a:xfrm>
           <a:prstGeom prst="line">
             <a:avLst/>
@@ -12435,14 +12719,14 @@
       </p:cxnSp>
       <p:cxnSp>
         <p:nvCxnSpPr>
-          <p:cNvPr id="213" name="FIG_L_m1_f3"/>
+          <p:cNvPr id="221" name="FIG_L_m1_fan_in0"/>
           <p:cNvCxnSpPr/>
           <p:nvPr/>
         </p:nvCxnSpPr>
         <p:spPr>
           <a:xfrm>
-            <a:off x="952500" y="5556250"/>
-            <a:ext cx="0" cy="127000"/>
+            <a:off x="428625" y="5556250"/>
+            <a:ext cx="523875" cy="127000"/>
           </a:xfrm>
           <a:prstGeom prst="line">
             <a:avLst/>
@@ -12471,14 +12755,14 @@
       </p:cxnSp>
       <p:cxnSp>
         <p:nvCxnSpPr>
-          <p:cNvPr id="214" name="FIG_L_m1_f4"/>
+          <p:cNvPr id="222" name="FIG_L_m1_fan_out1"/>
           <p:cNvCxnSpPr/>
           <p:nvPr/>
         </p:nvCxnSpPr>
         <p:spPr>
           <a:xfrm>
-            <a:off x="952500" y="5889625"/>
-            <a:ext cx="0" cy="95250"/>
+            <a:off x="952500" y="5175250"/>
+            <a:ext cx="0" cy="174625"/>
           </a:xfrm>
           <a:prstGeom prst="line">
             <a:avLst/>
@@ -12507,7 +12791,151 @@
       </p:cxnSp>
       <p:cxnSp>
         <p:nvCxnSpPr>
-          <p:cNvPr id="215" name="FIG_L_m1_f5"/>
+          <p:cNvPr id="223" name="FIG_L_m1_fan_in1"/>
+          <p:cNvCxnSpPr/>
+          <p:nvPr/>
+        </p:nvCxnSpPr>
+        <p:spPr>
+          <a:xfrm>
+            <a:off x="952500" y="5556250"/>
+            <a:ext cx="0" cy="127000"/>
+          </a:xfrm>
+          <a:prstGeom prst="line">
+            <a:avLst/>
+          </a:prstGeom>
+          <a:ln w="12700">
+            <a:solidFill>
+              <a:srgbClr val="282C3C"/>
+            </a:solidFill>
+            <a:tailEnd type="triangle" w="sm" len="sm"/>
+          </a:ln>
+        </p:spPr>
+        <p:style>
+          <a:lnRef idx="2">
+            <a:schemeClr val="accent1"/>
+          </a:lnRef>
+          <a:fillRef idx="0">
+            <a:schemeClr val="accent1"/>
+          </a:fillRef>
+          <a:effectRef idx="1">
+            <a:schemeClr val="accent1"/>
+          </a:effectRef>
+          <a:fontRef idx="minor">
+            <a:schemeClr val="tx1"/>
+          </a:fontRef>
+        </p:style>
+      </p:cxnSp>
+      <p:cxnSp>
+        <p:nvCxnSpPr>
+          <p:cNvPr id="224" name="FIG_L_m1_fan_out2"/>
+          <p:cNvCxnSpPr/>
+          <p:nvPr/>
+        </p:nvCxnSpPr>
+        <p:spPr>
+          <a:xfrm>
+            <a:off x="952500" y="5175250"/>
+            <a:ext cx="523875" cy="174625"/>
+          </a:xfrm>
+          <a:prstGeom prst="line">
+            <a:avLst/>
+          </a:prstGeom>
+          <a:ln w="12700">
+            <a:solidFill>
+              <a:srgbClr val="282C3C"/>
+            </a:solidFill>
+            <a:tailEnd type="triangle" w="sm" len="sm"/>
+          </a:ln>
+        </p:spPr>
+        <p:style>
+          <a:lnRef idx="2">
+            <a:schemeClr val="accent1"/>
+          </a:lnRef>
+          <a:fillRef idx="0">
+            <a:schemeClr val="accent1"/>
+          </a:fillRef>
+          <a:effectRef idx="1">
+            <a:schemeClr val="accent1"/>
+          </a:effectRef>
+          <a:fontRef idx="minor">
+            <a:schemeClr val="tx1"/>
+          </a:fontRef>
+        </p:style>
+      </p:cxnSp>
+      <p:cxnSp>
+        <p:nvCxnSpPr>
+          <p:cNvPr id="225" name="FIG_L_m1_fan_in2"/>
+          <p:cNvCxnSpPr/>
+          <p:nvPr/>
+        </p:nvCxnSpPr>
+        <p:spPr>
+          <a:xfrm flipH="1">
+            <a:off x="952500" y="5556250"/>
+            <a:ext cx="523875" cy="127000"/>
+          </a:xfrm>
+          <a:prstGeom prst="line">
+            <a:avLst/>
+          </a:prstGeom>
+          <a:ln w="12700">
+            <a:solidFill>
+              <a:srgbClr val="282C3C"/>
+            </a:solidFill>
+            <a:tailEnd type="triangle" w="sm" len="sm"/>
+          </a:ln>
+        </p:spPr>
+        <p:style>
+          <a:lnRef idx="2">
+            <a:schemeClr val="accent1"/>
+          </a:lnRef>
+          <a:fillRef idx="0">
+            <a:schemeClr val="accent1"/>
+          </a:fillRef>
+          <a:effectRef idx="1">
+            <a:schemeClr val="accent1"/>
+          </a:effectRef>
+          <a:fontRef idx="minor">
+            <a:schemeClr val="tx1"/>
+          </a:fontRef>
+        </p:style>
+      </p:cxnSp>
+      <p:cxnSp>
+        <p:nvCxnSpPr>
+          <p:cNvPr id="226" name="FIG_L_m1_f4"/>
+          <p:cNvCxnSpPr/>
+          <p:nvPr/>
+        </p:nvCxnSpPr>
+        <p:spPr>
+          <a:xfrm>
+            <a:off x="952500" y="5889625"/>
+            <a:ext cx="0" cy="95250"/>
+          </a:xfrm>
+          <a:prstGeom prst="line">
+            <a:avLst/>
+          </a:prstGeom>
+          <a:ln w="12700">
+            <a:solidFill>
+              <a:srgbClr val="282C3C"/>
+            </a:solidFill>
+            <a:tailEnd type="triangle" w="sm" len="sm"/>
+          </a:ln>
+        </p:spPr>
+        <p:style>
+          <a:lnRef idx="2">
+            <a:schemeClr val="accent1"/>
+          </a:lnRef>
+          <a:fillRef idx="0">
+            <a:schemeClr val="accent1"/>
+          </a:fillRef>
+          <a:effectRef idx="1">
+            <a:schemeClr val="accent1"/>
+          </a:effectRef>
+          <a:fontRef idx="minor">
+            <a:schemeClr val="tx1"/>
+          </a:fontRef>
+        </p:style>
+      </p:cxnSp>
+      <p:cxnSp>
+        <p:nvCxnSpPr>
+          <p:cNvPr id="227" name="FIG_L_m1_f5"/>
           <p:cNvCxnSpPr/>
           <p:nvPr/>
         </p:nvCxnSpPr>
@@ -12543,7 +12971,7 @@
       </p:cxnSp>
       <p:sp>
         <p:nvSpPr>
-          <p:cNvPr id="216" name="FIG_T_m1_p0"/>
+          <p:cNvPr id="228" name="FIG_T_m1_p0"/>
           <p:cNvSpPr txBox="1"/>
           <p:nvPr/>
         </p:nvSpPr>
@@ -12579,7 +13007,7 @@
       </p:sp>
       <p:sp>
         <p:nvSpPr>
-          <p:cNvPr id="217" name="FIG_T_m1_p1"/>
+          <p:cNvPr id="229" name="FIG_T_m1_p1"/>
           <p:cNvSpPr txBox="1"/>
           <p:nvPr/>
         </p:nvSpPr>
@@ -12615,7 +13043,7 @@
       </p:sp>
       <p:sp>
         <p:nvSpPr>
-          <p:cNvPr id="218" name="FIG_T_m1_p2"/>
+          <p:cNvPr id="230" name="FIG_T_m1_p2"/>
           <p:cNvSpPr txBox="1"/>
           <p:nvPr/>
         </p:nvSpPr>
@@ -12651,7 +13079,7 @@
       </p:sp>
       <p:sp>
         <p:nvSpPr>
-          <p:cNvPr id="219" name="FIG_T_m2_title"/>
+          <p:cNvPr id="231" name="FIG_T_m2_title"/>
           <p:cNvSpPr txBox="1"/>
           <p:nvPr/>
         </p:nvSpPr>
@@ -12687,7 +13115,7 @@
       </p:sp>
       <p:sp>
         <p:nvSpPr>
-          <p:cNvPr id="220" name="FIG_T_m2_in"/>
+          <p:cNvPr id="232" name="FIG_T_m2_in"/>
           <p:cNvSpPr txBox="1"/>
           <p:nvPr/>
         </p:nvSpPr>
@@ -12723,7 +13151,7 @@
       </p:sp>
       <p:sp>
         <p:nvSpPr>
-          <p:cNvPr id="221" name="FIG_G_m2_in_bg"/>
+          <p:cNvPr id="233" name="FIG_G_m2_in_bg"/>
           <p:cNvSpPr/>
           <p:nvPr/>
         </p:nvSpPr>
@@ -12769,7 +13197,7 @@
       </p:sp>
       <p:cxnSp>
         <p:nvCxnSpPr>
-          <p:cNvPr id="222" name="FIG_G_m2_in_v1"/>
+          <p:cNvPr id="234" name="FIG_G_m2_in_v1"/>
           <p:cNvCxnSpPr/>
           <p:nvPr/>
         </p:nvCxnSpPr>
@@ -12804,7 +13232,7 @@
       </p:cxnSp>
       <p:cxnSp>
         <p:nvCxnSpPr>
-          <p:cNvPr id="223" name="FIG_G_m2_in_v2"/>
+          <p:cNvPr id="235" name="FIG_G_m2_in_v2"/>
           <p:cNvCxnSpPr/>
           <p:nvPr/>
         </p:nvCxnSpPr>
@@ -12839,7 +13267,7 @@
       </p:cxnSp>
       <p:cxnSp>
         <p:nvCxnSpPr>
-          <p:cNvPr id="224" name="FIG_G_m2_in_v3"/>
+          <p:cNvPr id="236" name="FIG_G_m2_in_v3"/>
           <p:cNvCxnSpPr/>
           <p:nvPr/>
         </p:nvCxnSpPr>
@@ -12874,7 +13302,7 @@
       </p:cxnSp>
       <p:cxnSp>
         <p:nvCxnSpPr>
-          <p:cNvPr id="225" name="FIG_G_m2_in_h1"/>
+          <p:cNvPr id="237" name="FIG_G_m2_in_h1"/>
           <p:cNvCxnSpPr/>
           <p:nvPr/>
         </p:nvCxnSpPr>
@@ -12909,7 +13337,7 @@
       </p:cxnSp>
       <p:cxnSp>
         <p:nvCxnSpPr>
-          <p:cNvPr id="226" name="FIG_G_m2_in_h2"/>
+          <p:cNvPr id="238" name="FIG_G_m2_in_h2"/>
           <p:cNvCxnSpPr/>
           <p:nvPr/>
         </p:nvCxnSpPr>
@@ -12944,7 +13372,7 @@
       </p:cxnSp>
       <p:sp>
         <p:nvSpPr>
-          <p:cNvPr id="227" name="FIG_E_m2_down"/>
+          <p:cNvPr id="239" name="FIG_E_m2_down"/>
           <p:cNvSpPr/>
           <p:nvPr/>
         </p:nvSpPr>
@@ -12990,7 +13418,7 @@
       </p:sp>
       <p:sp>
         <p:nvSpPr>
-          <p:cNvPr id="228" name="FIG_E_m2_down_text"/>
+          <p:cNvPr id="240" name="FIG_E_m2_down_text"/>
           <p:cNvSpPr txBox="1"/>
           <p:nvPr/>
         </p:nvSpPr>
@@ -13027,7 +13455,7 @@
       </p:sp>
       <p:sp>
         <p:nvSpPr>
-          <p:cNvPr id="229" name="FIG_G_m2_out_bg"/>
+          <p:cNvPr id="241" name="FIG_G_m2_out_bg"/>
           <p:cNvSpPr/>
           <p:nvPr/>
         </p:nvSpPr>
@@ -13073,7 +13501,7 @@
       </p:sp>
       <p:cxnSp>
         <p:nvCxnSpPr>
-          <p:cNvPr id="230" name="FIG_G_m2_out_v1"/>
+          <p:cNvPr id="242" name="FIG_G_m2_out_v1"/>
           <p:cNvCxnSpPr/>
           <p:nvPr/>
         </p:nvCxnSpPr>
@@ -13108,7 +13536,7 @@
       </p:cxnSp>
       <p:cxnSp>
         <p:nvCxnSpPr>
-          <p:cNvPr id="231" name="FIG_G_m2_out_v2"/>
+          <p:cNvPr id="243" name="FIG_G_m2_out_v2"/>
           <p:cNvCxnSpPr/>
           <p:nvPr/>
         </p:nvCxnSpPr>
@@ -13143,7 +13571,7 @@
       </p:cxnSp>
       <p:cxnSp>
         <p:nvCxnSpPr>
-          <p:cNvPr id="232" name="FIG_G_m2_out_h1"/>
+          <p:cNvPr id="244" name="FIG_G_m2_out_h1"/>
           <p:cNvCxnSpPr/>
           <p:nvPr/>
         </p:nvCxnSpPr>
@@ -13178,7 +13606,7 @@
       </p:cxnSp>
       <p:sp>
         <p:nvSpPr>
-          <p:cNvPr id="233" name="FIG_T_m2_out"/>
+          <p:cNvPr id="245" name="FIG_T_m2_out"/>
           <p:cNvSpPr txBox="1"/>
           <p:nvPr/>
         </p:nvSpPr>
@@ -13214,7 +13642,7 @@
       </p:sp>
       <p:cxnSp>
         <p:nvCxnSpPr>
-          <p:cNvPr id="234" name="FIG_L_m2_f1"/>
+          <p:cNvPr id="246" name="FIG_L_m2_f1"/>
           <p:cNvCxnSpPr/>
           <p:nvPr/>
         </p:nvCxnSpPr>
@@ -13250,7 +13678,7 @@
       </p:cxnSp>
       <p:cxnSp>
         <p:nvCxnSpPr>
-          <p:cNvPr id="235" name="FIG_L_m2_f2"/>
+          <p:cNvPr id="247" name="FIG_L_m2_f2"/>
           <p:cNvCxnSpPr/>
           <p:nvPr/>
         </p:nvCxnSpPr>
@@ -13286,7 +13714,7 @@
       </p:cxnSp>
       <p:sp>
         <p:nvSpPr>
-          <p:cNvPr id="236" name="FIG_T_m2_p0"/>
+          <p:cNvPr id="248" name="FIG_T_m2_p0"/>
           <p:cNvSpPr txBox="1"/>
           <p:nvPr/>
         </p:nvSpPr>
@@ -13322,7 +13750,7 @@
       </p:sp>
       <p:sp>
         <p:nvSpPr>
-          <p:cNvPr id="237" name="FIG_T_m2_p1"/>
+          <p:cNvPr id="249" name="FIG_T_m2_p1"/>
           <p:cNvSpPr txBox="1"/>
           <p:nvPr/>
         </p:nvSpPr>
@@ -13358,7 +13786,7 @@
       </p:sp>
       <p:sp>
         <p:nvSpPr>
-          <p:cNvPr id="238" name="FIG_T_m2_p2"/>
+          <p:cNvPr id="250" name="FIG_T_m2_p2"/>
           <p:cNvSpPr txBox="1"/>
           <p:nvPr/>
         </p:nvSpPr>
@@ -13394,7 +13822,7 @@
       </p:sp>
       <p:sp>
         <p:nvSpPr>
-          <p:cNvPr id="239" name="FIG_T_m2_p3"/>
+          <p:cNvPr id="251" name="FIG_T_m2_p3"/>
           <p:cNvSpPr txBox="1"/>
           <p:nvPr/>
         </p:nvSpPr>
@@ -13430,7 +13858,7 @@
       </p:sp>
       <p:sp>
         <p:nvSpPr>
-          <p:cNvPr id="240" name="FIG_T_m3_title"/>
+          <p:cNvPr id="252" name="FIG_T_m3_title"/>
           <p:cNvSpPr txBox="1"/>
           <p:nvPr/>
         </p:nvSpPr>
@@ -13466,7 +13894,7 @@
       </p:sp>
       <p:sp>
         <p:nvSpPr>
-          <p:cNvPr id="241" name="FIG_T_m3_fh"/>
+          <p:cNvPr id="253" name="FIG_T_m3_fh"/>
           <p:cNvSpPr txBox="1"/>
           <p:nvPr/>
         </p:nvSpPr>
@@ -13502,7 +13930,7 @@
       </p:sp>
       <p:sp>
         <p:nvSpPr>
-          <p:cNvPr id="242" name="FIG_G_m3_fh_bg"/>
+          <p:cNvPr id="254" name="FIG_G_m3_fh_bg"/>
           <p:cNvSpPr/>
           <p:nvPr/>
         </p:nvSpPr>
@@ -13548,7 +13976,7 @@
       </p:sp>
       <p:cxnSp>
         <p:nvCxnSpPr>
-          <p:cNvPr id="243" name="FIG_G_m3_fh_v1"/>
+          <p:cNvPr id="255" name="FIG_G_m3_fh_v1"/>
           <p:cNvCxnSpPr/>
           <p:nvPr/>
         </p:nvCxnSpPr>
@@ -13583,7 +14011,7 @@
       </p:cxnSp>
       <p:cxnSp>
         <p:nvCxnSpPr>
-          <p:cNvPr id="244" name="FIG_G_m3_fh_v2"/>
+          <p:cNvPr id="256" name="FIG_G_m3_fh_v2"/>
           <p:cNvCxnSpPr/>
           <p:nvPr/>
         </p:nvCxnSpPr>
@@ -13618,7 +14046,7 @@
       </p:cxnSp>
       <p:cxnSp>
         <p:nvCxnSpPr>
-          <p:cNvPr id="245" name="FIG_G_m3_fh_v3"/>
+          <p:cNvPr id="257" name="FIG_G_m3_fh_v3"/>
           <p:cNvCxnSpPr/>
           <p:nvPr/>
         </p:nvCxnSpPr>
@@ -13653,7 +14081,7 @@
       </p:cxnSp>
       <p:cxnSp>
         <p:nvCxnSpPr>
-          <p:cNvPr id="246" name="FIG_G_m3_fh_h1"/>
+          <p:cNvPr id="258" name="FIG_G_m3_fh_h1"/>
           <p:cNvCxnSpPr/>
           <p:nvPr/>
         </p:nvCxnSpPr>
@@ -13688,7 +14116,7 @@
       </p:cxnSp>
       <p:cxnSp>
         <p:nvCxnSpPr>
-          <p:cNvPr id="247" name="FIG_G_m3_fh_h2"/>
+          <p:cNvPr id="259" name="FIG_G_m3_fh_h2"/>
           <p:cNvCxnSpPr/>
           <p:nvPr/>
         </p:nvCxnSpPr>
@@ -13723,7 +14151,7 @@
       </p:cxnSp>
       <p:sp>
         <p:nvSpPr>
-          <p:cNvPr id="248" name="FIG_E_m3_high"/>
+          <p:cNvPr id="260" name="FIG_E_m3_high"/>
           <p:cNvSpPr/>
           <p:nvPr/>
         </p:nvSpPr>
@@ -13771,7 +14199,7 @@
       </p:sp>
       <p:sp>
         <p:nvSpPr>
-          <p:cNvPr id="249" name="FIG_T_m3_high"/>
+          <p:cNvPr id="261" name="FIG_T_m3_high"/>
           <p:cNvSpPr txBox="1"/>
           <p:nvPr/>
         </p:nvSpPr>
@@ -13808,7 +14236,7 @@
       </p:sp>
       <p:sp>
         <p:nvSpPr>
-          <p:cNvPr id="250" name="FIG_T_m3_fl"/>
+          <p:cNvPr id="262" name="FIG_T_m3_fl"/>
           <p:cNvSpPr txBox="1"/>
           <p:nvPr/>
         </p:nvSpPr>
@@ -13844,7 +14272,7 @@
       </p:sp>
       <p:sp>
         <p:nvSpPr>
-          <p:cNvPr id="251" name="FIG_G_m3_fl_bg"/>
+          <p:cNvPr id="263" name="FIG_G_m3_fl_bg"/>
           <p:cNvSpPr/>
           <p:nvPr/>
         </p:nvSpPr>
@@ -13890,7 +14318,7 @@
       </p:sp>
       <p:cxnSp>
         <p:nvCxnSpPr>
-          <p:cNvPr id="252" name="FIG_G_m3_fl_v1"/>
+          <p:cNvPr id="264" name="FIG_G_m3_fl_v1"/>
           <p:cNvCxnSpPr/>
           <p:nvPr/>
         </p:nvCxnSpPr>
@@ -13925,7 +14353,7 @@
       </p:cxnSp>
       <p:cxnSp>
         <p:nvCxnSpPr>
-          <p:cNvPr id="253" name="FIG_G_m3_fl_v2"/>
+          <p:cNvPr id="265" name="FIG_G_m3_fl_v2"/>
           <p:cNvCxnSpPr/>
           <p:nvPr/>
         </p:nvCxnSpPr>
@@ -13960,7 +14388,7 @@
       </p:cxnSp>
       <p:cxnSp>
         <p:nvCxnSpPr>
-          <p:cNvPr id="254" name="FIG_G_m3_fl_v3"/>
+          <p:cNvPr id="266" name="FIG_G_m3_fl_v3"/>
           <p:cNvCxnSpPr/>
           <p:nvPr/>
         </p:nvCxnSpPr>
@@ -13995,7 +14423,7 @@
       </p:cxnSp>
       <p:cxnSp>
         <p:nvCxnSpPr>
-          <p:cNvPr id="255" name="FIG_G_m3_fl_h1"/>
+          <p:cNvPr id="267" name="FIG_G_m3_fl_h1"/>
           <p:cNvCxnSpPr/>
           <p:nvPr/>
         </p:nvCxnSpPr>
@@ -14030,7 +14458,7 @@
       </p:cxnSp>
       <p:cxnSp>
         <p:nvCxnSpPr>
-          <p:cNvPr id="256" name="FIG_G_m3_fl_h2"/>
+          <p:cNvPr id="268" name="FIG_G_m3_fl_h2"/>
           <p:cNvCxnSpPr/>
           <p:nvPr/>
         </p:nvCxnSpPr>
@@ -14065,7 +14493,7 @@
       </p:cxnSp>
       <p:sp>
         <p:nvSpPr>
-          <p:cNvPr id="257" name="FIG_E_m3_low"/>
+          <p:cNvPr id="269" name="FIG_E_m3_low"/>
           <p:cNvSpPr/>
           <p:nvPr/>
         </p:nvSpPr>
@@ -14113,7 +14541,7 @@
       </p:sp>
       <p:sp>
         <p:nvSpPr>
-          <p:cNvPr id="258" name="FIG_T_m3_low"/>
+          <p:cNvPr id="270" name="FIG_T_m3_low"/>
           <p:cNvSpPr txBox="1"/>
           <p:nvPr/>
         </p:nvSpPr>
@@ -14150,7 +14578,7 @@
       </p:sp>
       <p:sp>
         <p:nvSpPr>
-          <p:cNvPr id="259" name="FIG_E_m3_add"/>
+          <p:cNvPr id="271" name="FIG_E_m3_add"/>
           <p:cNvSpPr/>
           <p:nvPr/>
         </p:nvSpPr>
@@ -14196,7 +14624,7 @@
       </p:sp>
       <p:sp>
         <p:nvSpPr>
-          <p:cNvPr id="260" name="FIG_E_m3_add_text"/>
+          <p:cNvPr id="272" name="FIG_E_m3_add_text"/>
           <p:cNvSpPr txBox="1"/>
           <p:nvPr/>
         </p:nvSpPr>
@@ -14232,7 +14660,7 @@
       </p:sp>
       <p:sp>
         <p:nvSpPr>
-          <p:cNvPr id="261" name="FIG_G_m3_out_bg"/>
+          <p:cNvPr id="273" name="FIG_G_m3_out_bg"/>
           <p:cNvSpPr/>
           <p:nvPr/>
         </p:nvSpPr>
@@ -14278,7 +14706,7 @@
       </p:sp>
       <p:cxnSp>
         <p:nvCxnSpPr>
-          <p:cNvPr id="262" name="FIG_G_m3_out_v1"/>
+          <p:cNvPr id="274" name="FIG_G_m3_out_v1"/>
           <p:cNvCxnSpPr/>
           <p:nvPr/>
         </p:nvCxnSpPr>
@@ -14313,7 +14741,7 @@
       </p:cxnSp>
       <p:cxnSp>
         <p:nvCxnSpPr>
-          <p:cNvPr id="263" name="FIG_G_m3_out_v2"/>
+          <p:cNvPr id="275" name="FIG_G_m3_out_v2"/>
           <p:cNvCxnSpPr/>
           <p:nvPr/>
         </p:nvCxnSpPr>
@@ -14348,7 +14776,7 @@
       </p:cxnSp>
       <p:cxnSp>
         <p:nvCxnSpPr>
-          <p:cNvPr id="264" name="FIG_G_m3_out_h1"/>
+          <p:cNvPr id="276" name="FIG_G_m3_out_h1"/>
           <p:cNvCxnSpPr/>
           <p:nvPr/>
         </p:nvCxnSpPr>
@@ -14383,7 +14811,7 @@
       </p:cxnSp>
       <p:sp>
         <p:nvSpPr>
-          <p:cNvPr id="265" name="FIG_T_m3_out"/>
+          <p:cNvPr id="277" name="FIG_T_m3_out"/>
           <p:cNvSpPr txBox="1"/>
           <p:nvPr/>
         </p:nvSpPr>
@@ -14419,14 +14847,14 @@
       </p:sp>
       <p:cxnSp>
         <p:nvCxnSpPr>
-          <p:cNvPr id="266" name="FIG_L_m3_f1_1"/>
+          <p:cNvPr id="278" name="FIG_L_m3_in_high"/>
           <p:cNvCxnSpPr/>
           <p:nvPr/>
         </p:nvCxnSpPr>
         <p:spPr>
           <a:xfrm>
-            <a:off x="9064625" y="5080000"/>
-            <a:ext cx="269875" cy="0"/>
+            <a:off x="8016875" y="5080000"/>
+            <a:ext cx="285750" cy="0"/>
           </a:xfrm>
           <a:prstGeom prst="line">
             <a:avLst/>
@@ -14435,6 +14863,7 @@
             <a:solidFill>
               <a:srgbClr val="282C3C"/>
             </a:solidFill>
+            <a:tailEnd type="triangle" w="sm" len="sm"/>
           </a:ln>
         </p:spPr>
         <p:style>
@@ -14454,14 +14883,14 @@
       </p:cxnSp>
       <p:cxnSp>
         <p:nvCxnSpPr>
-          <p:cNvPr id="267" name="FIG_L_m3_f1_2"/>
+          <p:cNvPr id="279" name="FIG_L_m3_in_low"/>
           <p:cNvCxnSpPr/>
           <p:nvPr/>
         </p:nvCxnSpPr>
         <p:spPr>
           <a:xfrm>
-            <a:off x="9334500" y="5080000"/>
-            <a:ext cx="0" cy="254000"/>
+            <a:off x="8016875" y="5746750"/>
+            <a:ext cx="285750" cy="0"/>
           </a:xfrm>
           <a:prstGeom prst="line">
             <a:avLst/>
@@ -14490,7 +14919,78 @@
       </p:cxnSp>
       <p:cxnSp>
         <p:nvCxnSpPr>
-          <p:cNvPr id="268" name="FIG_L_m3_f2"/>
+          <p:cNvPr id="280" name="FIG_L_m3_f1_1"/>
+          <p:cNvCxnSpPr/>
+          <p:nvPr/>
+        </p:nvCxnSpPr>
+        <p:spPr>
+          <a:xfrm>
+            <a:off x="9064625" y="5080000"/>
+            <a:ext cx="269875" cy="0"/>
+          </a:xfrm>
+          <a:prstGeom prst="line">
+            <a:avLst/>
+          </a:prstGeom>
+          <a:ln w="12700">
+            <a:solidFill>
+              <a:srgbClr val="282C3C"/>
+            </a:solidFill>
+          </a:ln>
+        </p:spPr>
+        <p:style>
+          <a:lnRef idx="2">
+            <a:schemeClr val="accent1"/>
+          </a:lnRef>
+          <a:fillRef idx="0">
+            <a:schemeClr val="accent1"/>
+          </a:fillRef>
+          <a:effectRef idx="1">
+            <a:schemeClr val="accent1"/>
+          </a:effectRef>
+          <a:fontRef idx="minor">
+            <a:schemeClr val="tx1"/>
+          </a:fontRef>
+        </p:style>
+      </p:cxnSp>
+      <p:cxnSp>
+        <p:nvCxnSpPr>
+          <p:cNvPr id="281" name="FIG_L_m3_f1_2"/>
+          <p:cNvCxnSpPr/>
+          <p:nvPr/>
+        </p:nvCxnSpPr>
+        <p:spPr>
+          <a:xfrm>
+            <a:off x="9334500" y="5080000"/>
+            <a:ext cx="0" cy="254000"/>
+          </a:xfrm>
+          <a:prstGeom prst="line">
+            <a:avLst/>
+          </a:prstGeom>
+          <a:ln w="12700">
+            <a:solidFill>
+              <a:srgbClr val="282C3C"/>
+            </a:solidFill>
+            <a:tailEnd type="triangle" w="sm" len="sm"/>
+          </a:ln>
+        </p:spPr>
+        <p:style>
+          <a:lnRef idx="2">
+            <a:schemeClr val="accent1"/>
+          </a:lnRef>
+          <a:fillRef idx="0">
+            <a:schemeClr val="accent1"/>
+          </a:fillRef>
+          <a:effectRef idx="1">
+            <a:schemeClr val="accent1"/>
+          </a:effectRef>
+          <a:fontRef idx="minor">
+            <a:schemeClr val="tx1"/>
+          </a:fontRef>
+        </p:style>
+      </p:cxnSp>
+      <p:cxnSp>
+        <p:nvCxnSpPr>
+          <p:cNvPr id="282" name="FIG_L_m3_f2"/>
           <p:cNvCxnSpPr/>
           <p:nvPr/>
         </p:nvCxnSpPr>
@@ -14526,7 +15026,7 @@
       </p:cxnSp>
       <p:cxnSp>
         <p:nvCxnSpPr>
-          <p:cNvPr id="269" name="FIG_L_m3_f3"/>
+          <p:cNvPr id="283" name="FIG_L_m3_f3"/>
           <p:cNvCxnSpPr/>
           <p:nvPr/>
         </p:nvCxnSpPr>
@@ -14562,7 +15062,7 @@
       </p:cxnSp>
       <p:sp>
         <p:nvSpPr>
-          <p:cNvPr id="270" name="FIG_T_m3_p0"/>
+          <p:cNvPr id="284" name="FIG_T_m3_p0"/>
           <p:cNvSpPr txBox="1"/>
           <p:nvPr/>
         </p:nvSpPr>
@@ -14598,7 +15098,7 @@
       </p:sp>
       <p:sp>
         <p:nvSpPr>
-          <p:cNvPr id="271" name="FIG_T_m3_p1"/>
+          <p:cNvPr id="285" name="FIG_T_m3_p1"/>
           <p:cNvSpPr txBox="1"/>
           <p:nvPr/>
         </p:nvSpPr>
@@ -14634,7 +15134,7 @@
       </p:sp>
       <p:sp>
         <p:nvSpPr>
-          <p:cNvPr id="272" name="FIG_T_m3_p2"/>
+          <p:cNvPr id="286" name="FIG_T_m3_p2"/>
           <p:cNvSpPr txBox="1"/>
           <p:nvPr/>
         </p:nvSpPr>
@@ -14670,7 +15170,7 @@
       </p:sp>
       <p:sp>
         <p:nvSpPr>
-          <p:cNvPr id="273" name="FIG_T_m3_p3"/>
+          <p:cNvPr id="287" name="FIG_T_m3_p3"/>
           <p:cNvSpPr txBox="1"/>
           <p:nvPr/>
         </p:nvSpPr>
@@ -14706,7 +15206,7 @@
       </p:sp>
       <p:sp>
         <p:nvSpPr>
-          <p:cNvPr id="274" name="FIG_T_b1_title"/>
+          <p:cNvPr id="288" name="FIG_T_b1_title"/>
           <p:cNvSpPr txBox="1"/>
           <p:nvPr/>
         </p:nvSpPr>
@@ -14742,7 +15242,7 @@
       </p:sp>
       <p:sp>
         <p:nvSpPr>
-          <p:cNvPr id="275" name="FIG_E_out_p3_top"/>
+          <p:cNvPr id="289" name="FIG_E_out_p3_top"/>
           <p:cNvSpPr/>
           <p:nvPr/>
         </p:nvSpPr>
@@ -14809,7 +15309,7 @@
       </p:sp>
       <p:sp>
         <p:nvSpPr>
-          <p:cNvPr id="276" name="FIG_E_out_p3_front"/>
+          <p:cNvPr id="290" name="FIG_E_out_p3_front"/>
           <p:cNvSpPr/>
           <p:nvPr/>
         </p:nvSpPr>
@@ -14884,7 +15384,7 @@
       </p:sp>
       <p:sp>
         <p:nvSpPr>
-          <p:cNvPr id="277" name="FIG_E_out_p3_right"/>
+          <p:cNvPr id="291" name="FIG_E_out_p3_right"/>
           <p:cNvSpPr/>
           <p:nvPr/>
         </p:nvSpPr>
@@ -14951,7 +15451,7 @@
       </p:sp>
       <p:sp>
         <p:nvSpPr>
-          <p:cNvPr id="278" name="FIG_E_out_p3_label"/>
+          <p:cNvPr id="292" name="FIG_E_out_p3_label"/>
           <p:cNvSpPr txBox="1"/>
           <p:nvPr/>
         </p:nvSpPr>
@@ -14988,7 +15488,7 @@
       </p:sp>
       <p:sp>
         <p:nvSpPr>
-          <p:cNvPr id="279" name="FIG_E_out_p4_top"/>
+          <p:cNvPr id="293" name="FIG_E_out_p4_top"/>
           <p:cNvSpPr/>
           <p:nvPr/>
         </p:nvSpPr>
@@ -15055,7 +15555,7 @@
       </p:sp>
       <p:sp>
         <p:nvSpPr>
-          <p:cNvPr id="280" name="FIG_E_out_p4_front"/>
+          <p:cNvPr id="294" name="FIG_E_out_p4_front"/>
           <p:cNvSpPr/>
           <p:nvPr/>
         </p:nvSpPr>
@@ -15130,7 +15630,7 @@
       </p:sp>
       <p:sp>
         <p:nvSpPr>
-          <p:cNvPr id="281" name="FIG_E_out_p4_right"/>
+          <p:cNvPr id="295" name="FIG_E_out_p4_right"/>
           <p:cNvSpPr/>
           <p:nvPr/>
         </p:nvSpPr>
@@ -15197,7 +15697,7 @@
       </p:sp>
       <p:sp>
         <p:nvSpPr>
-          <p:cNvPr id="282" name="FIG_E_out_p4_label"/>
+          <p:cNvPr id="296" name="FIG_E_out_p4_label"/>
           <p:cNvSpPr txBox="1"/>
           <p:nvPr/>
         </p:nvSpPr>
@@ -15234,7 +15734,7 @@
       </p:sp>
       <p:sp>
         <p:nvSpPr>
-          <p:cNvPr id="283" name="FIG_E_out_p5_top"/>
+          <p:cNvPr id="297" name="FIG_E_out_p5_top"/>
           <p:cNvSpPr/>
           <p:nvPr/>
         </p:nvSpPr>
@@ -15301,7 +15801,7 @@
       </p:sp>
       <p:sp>
         <p:nvSpPr>
-          <p:cNvPr id="284" name="FIG_E_out_p5_front"/>
+          <p:cNvPr id="298" name="FIG_E_out_p5_front"/>
           <p:cNvSpPr/>
           <p:nvPr/>
         </p:nvSpPr>
@@ -15376,7 +15876,7 @@
       </p:sp>
       <p:sp>
         <p:nvSpPr>
-          <p:cNvPr id="285" name="FIG_E_out_p5_right"/>
+          <p:cNvPr id="299" name="FIG_E_out_p5_right"/>
           <p:cNvSpPr/>
           <p:nvPr/>
         </p:nvSpPr>
@@ -15443,7 +15943,7 @@
       </p:sp>
       <p:sp>
         <p:nvSpPr>
-          <p:cNvPr id="286" name="FIG_E_out_p5_label"/>
+          <p:cNvPr id="300" name="FIG_E_out_p5_label"/>
           <p:cNvSpPr txBox="1"/>
           <p:nvPr/>
         </p:nvSpPr>
@@ -15480,7 +15980,7 @@
       </p:sp>
       <p:sp>
         <p:nvSpPr>
-          <p:cNvPr id="287" name="FIG_T_b2_title"/>
+          <p:cNvPr id="301" name="FIG_T_b2_title"/>
           <p:cNvSpPr txBox="1"/>
           <p:nvPr/>
         </p:nvSpPr>
@@ -15516,7 +16016,7 @@
       </p:sp>
       <p:sp>
         <p:nvSpPr>
-          <p:cNvPr id="288" name="FIG_T_b2_iou"/>
+          <p:cNvPr id="302" name="FIG_T_b2_iou"/>
           <p:cNvSpPr txBox="1"/>
           <p:nvPr/>
         </p:nvSpPr>
@@ -15553,7 +16053,7 @@
       </p:sp>
       <p:sp>
         <p:nvSpPr>
-          <p:cNvPr id="289" name="FIG_E_b2_sq1_0"/>
+          <p:cNvPr id="303" name="FIG_E_b2_sq1_0"/>
           <p:cNvSpPr/>
           <p:nvPr/>
         </p:nvSpPr>
@@ -15599,7 +16099,7 @@
       </p:sp>
       <p:sp>
         <p:nvSpPr>
-          <p:cNvPr id="290" name="FIG_E_b2_sq1_1"/>
+          <p:cNvPr id="304" name="FIG_E_b2_sq1_1"/>
           <p:cNvSpPr/>
           <p:nvPr/>
         </p:nvSpPr>
@@ -15645,7 +16145,7 @@
       </p:sp>
       <p:sp>
         <p:nvSpPr>
-          <p:cNvPr id="291" name="FIG_E_b2_sq1_2"/>
+          <p:cNvPr id="305" name="FIG_E_b2_sq1_2"/>
           <p:cNvSpPr/>
           <p:nvPr/>
         </p:nvSpPr>
@@ -15691,7 +16191,7 @@
       </p:sp>
       <p:sp>
         <p:nvSpPr>
-          <p:cNvPr id="292" name="FIG_E_b2_sq1_3"/>
+          <p:cNvPr id="306" name="FIG_E_b2_sq1_3"/>
           <p:cNvSpPr/>
           <p:nvPr/>
         </p:nvSpPr>
@@ -15737,7 +16237,7 @@
       </p:sp>
       <p:sp>
         <p:nvSpPr>
-          <p:cNvPr id="293" name="FIG_E_b2_sq1_4"/>
+          <p:cNvPr id="307" name="FIG_E_b2_sq1_4"/>
           <p:cNvSpPr/>
           <p:nvPr/>
         </p:nvSpPr>
@@ -15783,7 +16283,7 @@
       </p:sp>
       <p:sp>
         <p:nvSpPr>
-          <p:cNvPr id="294" name="FIG_E_b2_sq1_5"/>
+          <p:cNvPr id="308" name="FIG_E_b2_sq1_5"/>
           <p:cNvSpPr/>
           <p:nvPr/>
         </p:nvSpPr>
@@ -15829,7 +16329,7 @@
       </p:sp>
       <p:sp>
         <p:nvSpPr>
-          <p:cNvPr id="295" name="FIG_E_b2_sq1_dots"/>
+          <p:cNvPr id="309" name="FIG_E_b2_sq1_dots"/>
           <p:cNvSpPr txBox="1"/>
           <p:nvPr/>
         </p:nvSpPr>
@@ -15865,7 +16365,7 @@
       </p:sp>
       <p:sp>
         <p:nvSpPr>
-          <p:cNvPr id="296" name="FIG_T_b2_dec"/>
+          <p:cNvPr id="310" name="FIG_T_b2_dec"/>
           <p:cNvSpPr txBox="1"/>
           <p:nvPr/>
         </p:nvSpPr>
@@ -15901,7 +16401,7 @@
       </p:sp>
       <p:sp>
         <p:nvSpPr>
-          <p:cNvPr id="297" name="FIG_E_b2_sq2_0"/>
+          <p:cNvPr id="311" name="FIG_E_b2_sq2_0"/>
           <p:cNvSpPr/>
           <p:nvPr/>
         </p:nvSpPr>
@@ -15947,7 +16447,7 @@
       </p:sp>
       <p:sp>
         <p:nvSpPr>
-          <p:cNvPr id="298" name="FIG_E_b2_sq2_1"/>
+          <p:cNvPr id="312" name="FIG_E_b2_sq2_1"/>
           <p:cNvSpPr/>
           <p:nvPr/>
         </p:nvSpPr>
@@ -15993,7 +16493,7 @@
       </p:sp>
       <p:sp>
         <p:nvSpPr>
-          <p:cNvPr id="299" name="FIG_E_b2_sq2_2"/>
+          <p:cNvPr id="313" name="FIG_E_b2_sq2_2"/>
           <p:cNvSpPr/>
           <p:nvPr/>
         </p:nvSpPr>
@@ -16039,7 +16539,7 @@
       </p:sp>
       <p:sp>
         <p:nvSpPr>
-          <p:cNvPr id="300" name="FIG_E_b2_sq2_3"/>
+          <p:cNvPr id="314" name="FIG_E_b2_sq2_3"/>
           <p:cNvSpPr/>
           <p:nvPr/>
         </p:nvSpPr>
@@ -16085,7 +16585,7 @@
       </p:sp>
       <p:sp>
         <p:nvSpPr>
-          <p:cNvPr id="301" name="FIG_E_b2_sq2_4"/>
+          <p:cNvPr id="315" name="FIG_E_b2_sq2_4"/>
           <p:cNvSpPr/>
           <p:nvPr/>
         </p:nvSpPr>
@@ -16131,7 +16631,7 @@
       </p:sp>
       <p:sp>
         <p:nvSpPr>
-          <p:cNvPr id="302" name="FIG_E_b2_sq2_dots"/>
+          <p:cNvPr id="316" name="FIG_E_b2_sq2_dots"/>
           <p:cNvSpPr txBox="1"/>
           <p:nvPr/>
         </p:nvSpPr>
@@ -16165,9 +16665,149 @@
           </a:p>
         </p:txBody>
       </p:sp>
-      <p:sp>
-        <p:nvSpPr>
-          <p:cNvPr id="303" name="FIG_E_b2_last"/>
+      <p:cxnSp>
+        <p:nvCxnSpPr>
+          <p:cNvPr id="317" name="FIG_L_b2_dec_link1"/>
+          <p:cNvCxnSpPr/>
+          <p:nvPr/>
+        </p:nvCxnSpPr>
+        <p:spPr>
+          <a:xfrm>
+            <a:off x="4762500" y="7381875"/>
+            <a:ext cx="71437" cy="0"/>
+          </a:xfrm>
+          <a:prstGeom prst="line">
+            <a:avLst/>
+          </a:prstGeom>
+          <a:ln w="11430">
+            <a:solidFill>
+              <a:srgbClr val="282C3C"/>
+            </a:solidFill>
+          </a:ln>
+        </p:spPr>
+        <p:style>
+          <a:lnRef idx="2">
+            <a:schemeClr val="accent1"/>
+          </a:lnRef>
+          <a:fillRef idx="0">
+            <a:schemeClr val="accent1"/>
+          </a:fillRef>
+          <a:effectRef idx="1">
+            <a:schemeClr val="accent1"/>
+          </a:effectRef>
+          <a:fontRef idx="minor">
+            <a:schemeClr val="tx1"/>
+          </a:fontRef>
+        </p:style>
+      </p:cxnSp>
+      <p:cxnSp>
+        <p:nvCxnSpPr>
+          <p:cNvPr id="318" name="FIG_L_b2_dec_link2"/>
+          <p:cNvCxnSpPr/>
+          <p:nvPr/>
+        </p:nvCxnSpPr>
+        <p:spPr>
+          <a:xfrm>
+            <a:off x="4960937" y="7381875"/>
+            <a:ext cx="71438" cy="0"/>
+          </a:xfrm>
+          <a:prstGeom prst="line">
+            <a:avLst/>
+          </a:prstGeom>
+          <a:ln w="11430">
+            <a:solidFill>
+              <a:srgbClr val="282C3C"/>
+            </a:solidFill>
+          </a:ln>
+        </p:spPr>
+        <p:style>
+          <a:lnRef idx="2">
+            <a:schemeClr val="accent1"/>
+          </a:lnRef>
+          <a:fillRef idx="0">
+            <a:schemeClr val="accent1"/>
+          </a:fillRef>
+          <a:effectRef idx="1">
+            <a:schemeClr val="accent1"/>
+          </a:effectRef>
+          <a:fontRef idx="minor">
+            <a:schemeClr val="tx1"/>
+          </a:fontRef>
+        </p:style>
+      </p:cxnSp>
+      <p:cxnSp>
+        <p:nvCxnSpPr>
+          <p:cNvPr id="319" name="FIG_L_b2_dec_link3"/>
+          <p:cNvCxnSpPr/>
+          <p:nvPr/>
+        </p:nvCxnSpPr>
+        <p:spPr>
+          <a:xfrm>
+            <a:off x="5159375" y="7381875"/>
+            <a:ext cx="71437" cy="0"/>
+          </a:xfrm>
+          <a:prstGeom prst="line">
+            <a:avLst/>
+          </a:prstGeom>
+          <a:ln w="11430">
+            <a:solidFill>
+              <a:srgbClr val="282C3C"/>
+            </a:solidFill>
+          </a:ln>
+        </p:spPr>
+        <p:style>
+          <a:lnRef idx="2">
+            <a:schemeClr val="accent1"/>
+          </a:lnRef>
+          <a:fillRef idx="0">
+            <a:schemeClr val="accent1"/>
+          </a:fillRef>
+          <a:effectRef idx="1">
+            <a:schemeClr val="accent1"/>
+          </a:effectRef>
+          <a:fontRef idx="minor">
+            <a:schemeClr val="tx1"/>
+          </a:fontRef>
+        </p:style>
+      </p:cxnSp>
+      <p:cxnSp>
+        <p:nvCxnSpPr>
+          <p:cNvPr id="320" name="FIG_L_b2_dec_link4"/>
+          <p:cNvCxnSpPr/>
+          <p:nvPr/>
+        </p:nvCxnSpPr>
+        <p:spPr>
+          <a:xfrm>
+            <a:off x="5357812" y="7381875"/>
+            <a:ext cx="71438" cy="0"/>
+          </a:xfrm>
+          <a:prstGeom prst="line">
+            <a:avLst/>
+          </a:prstGeom>
+          <a:ln w="11430">
+            <a:solidFill>
+              <a:srgbClr val="282C3C"/>
+            </a:solidFill>
+          </a:ln>
+        </p:spPr>
+        <p:style>
+          <a:lnRef idx="2">
+            <a:schemeClr val="accent1"/>
+          </a:lnRef>
+          <a:fillRef idx="0">
+            <a:schemeClr val="accent1"/>
+          </a:fillRef>
+          <a:effectRef idx="1">
+            <a:schemeClr val="accent1"/>
+          </a:effectRef>
+          <a:fontRef idx="minor">
+            <a:schemeClr val="tx1"/>
+          </a:fontRef>
+        </p:style>
+      </p:cxnSp>
+      <p:sp>
+        <p:nvSpPr>
+          <p:cNvPr id="321" name="FIG_E_b2_last"/>
           <p:cNvSpPr/>
           <p:nvPr/>
         </p:nvSpPr>
@@ -16213,7 +16853,7 @@
       </p:sp>
       <p:cxnSp>
         <p:nvCxnSpPr>
-          <p:cNvPr id="304" name="FIG_L_b2_flow"/>
+          <p:cNvPr id="322" name="FIG_L_b2_flow"/>
           <p:cNvCxnSpPr/>
           <p:nvPr/>
         </p:nvCxnSpPr>
@@ -16249,7 +16889,7 @@
       </p:cxnSp>
       <p:cxnSp>
         <p:nvCxnSpPr>
-          <p:cNvPr id="305" name="FIG_L_b1_b2"/>
+          <p:cNvPr id="323" name="FIG_L_b1_b2"/>
           <p:cNvCxnSpPr/>
           <p:nvPr/>
         </p:nvCxnSpPr>
@@ -16285,7 +16925,7 @@
       </p:cxnSp>
       <p:cxnSp>
         <p:nvCxnSpPr>
-          <p:cNvPr id="306" name="FIG_L_b2_b3"/>
+          <p:cNvPr id="324" name="FIG_L_b2_b3"/>
           <p:cNvCxnSpPr/>
           <p:nvPr/>
         </p:nvCxnSpPr>
@@ -16321,7 +16961,7 @@
       </p:cxnSp>
       <p:sp>
         <p:nvSpPr>
-          <p:cNvPr id="307" name="FIG_T_b3_title"/>
+          <p:cNvPr id="325" name="FIG_T_b3_title"/>
           <p:cNvSpPr txBox="1"/>
           <p:nvPr/>
         </p:nvSpPr>
@@ -16357,7 +16997,7 @@
       </p:sp>
       <p:sp>
         <p:nvSpPr>
-          <p:cNvPr id="308" name="FIG_E_b3_bars_0"/>
+          <p:cNvPr id="326" name="FIG_E_b3_bars_0"/>
           <p:cNvSpPr/>
           <p:nvPr/>
         </p:nvSpPr>
@@ -16401,7 +17041,7 @@
       </p:sp>
       <p:sp>
         <p:nvSpPr>
-          <p:cNvPr id="309" name="FIG_E_b3_bars_1"/>
+          <p:cNvPr id="327" name="FIG_E_b3_bars_1"/>
           <p:cNvSpPr/>
           <p:nvPr/>
         </p:nvSpPr>
@@ -16445,7 +17085,7 @@
       </p:sp>
       <p:sp>
         <p:nvSpPr>
-          <p:cNvPr id="310" name="FIG_E_b3_bars_2"/>
+          <p:cNvPr id="328" name="FIG_E_b3_bars_2"/>
           <p:cNvSpPr/>
           <p:nvPr/>
         </p:nvSpPr>
@@ -16489,7 +17129,7 @@
       </p:sp>
       <p:sp>
         <p:nvSpPr>
-          <p:cNvPr id="311" name="FIG_E_b3_bars_3"/>
+          <p:cNvPr id="329" name="FIG_E_b3_bars_3"/>
           <p:cNvSpPr/>
           <p:nvPr/>
         </p:nvSpPr>
@@ -16533,7 +17173,7 @@
       </p:sp>
       <p:cxnSp>
         <p:nvCxnSpPr>
-          <p:cNvPr id="312" name="FIG_E_b3_bars_axis"/>
+          <p:cNvPr id="330" name="FIG_E_b3_bars_axis"/>
           <p:cNvCxnSpPr/>
           <p:nvPr/>
         </p:nvCxnSpPr>
@@ -16568,7 +17208,7 @@
       </p:cxnSp>
       <p:sp>
         <p:nvSpPr>
-          <p:cNvPr id="313" name="FIG_T_b3_bars"/>
+          <p:cNvPr id="331" name="FIG_T_b3_bars"/>
           <p:cNvSpPr txBox="1"/>
           <p:nvPr/>
         </p:nvSpPr>
@@ -16604,7 +17244,7 @@
       </p:sp>
       <p:sp>
         <p:nvSpPr>
-          <p:cNvPr id="314" name="FIG_E_b3_box1"/>
+          <p:cNvPr id="332" name="FIG_E_b3_box1"/>
           <p:cNvSpPr/>
           <p:nvPr/>
         </p:nvSpPr>
@@ -16648,7 +17288,7 @@
       </p:sp>
       <p:sp>
         <p:nvSpPr>
-          <p:cNvPr id="315" name="FIG_E_b3_box2"/>
+          <p:cNvPr id="333" name="FIG_E_b3_box2"/>
           <p:cNvSpPr/>
           <p:nvPr/>
         </p:nvSpPr>
@@ -16692,7 +17332,7 @@
       </p:sp>
       <p:sp>
         <p:nvSpPr>
-          <p:cNvPr id="316" name="FIG_T_b3_box"/>
+          <p:cNvPr id="334" name="FIG_T_b3_box"/>
           <p:cNvSpPr txBox="1"/>
           <p:nvPr/>
         </p:nvSpPr>
@@ -16729,7 +17369,7 @@
       </p:sp>
       <p:sp>
         <p:nvSpPr>
-          <p:cNvPr id="317" name="FIG_T_b4_title"/>
+          <p:cNvPr id="335" name="FIG_T_b4_title"/>
           <p:cNvSpPr txBox="1"/>
           <p:nvPr/>
         </p:nvSpPr>
@@ -16765,7 +17405,7 @@
       </p:sp>
       <p:sp>
         <p:nvSpPr>
-          <p:cNvPr id="318" name="FIG_E_b4_icon0"/>
+          <p:cNvPr id="336" name="FIG_E_b4_icon0"/>
           <p:cNvSpPr/>
           <p:nvPr/>
         </p:nvSpPr>
@@ -16809,7 +17449,7 @@
       </p:sp>
       <p:sp>
         <p:nvSpPr>
-          <p:cNvPr id="319" name="FIG_T_b4_head0"/>
+          <p:cNvPr id="337" name="FIG_T_b4_head0"/>
           <p:cNvSpPr txBox="1"/>
           <p:nvPr/>
         </p:nvSpPr>
@@ -16845,7 +17485,7 @@
       </p:sp>
       <p:sp>
         <p:nvSpPr>
-          <p:cNvPr id="320" name="FIG_T_b4_tail0"/>
+          <p:cNvPr id="338" name="FIG_T_b4_tail0"/>
           <p:cNvSpPr txBox="1"/>
           <p:nvPr/>
         </p:nvSpPr>
@@ -16881,7 +17521,7 @@
       </p:sp>
       <p:sp>
         <p:nvSpPr>
-          <p:cNvPr id="321" name="FIG_E_b4_icon1"/>
+          <p:cNvPr id="339" name="FIG_E_b4_icon1"/>
           <p:cNvSpPr/>
           <p:nvPr/>
         </p:nvSpPr>
@@ -16925,7 +17565,7 @@
       </p:sp>
       <p:sp>
         <p:nvSpPr>
-          <p:cNvPr id="322" name="FIG_T_b4_head1"/>
+          <p:cNvPr id="340" name="FIG_T_b4_head1"/>
           <p:cNvSpPr txBox="1"/>
           <p:nvPr/>
         </p:nvSpPr>
@@ -16961,7 +17601,7 @@
       </p:sp>
       <p:sp>
         <p:nvSpPr>
-          <p:cNvPr id="323" name="FIG_T_b4_tail1"/>
+          <p:cNvPr id="341" name="FIG_T_b4_tail1"/>
           <p:cNvSpPr txBox="1"/>
           <p:nvPr/>
         </p:nvSpPr>
@@ -16997,7 +17637,7 @@
       </p:sp>
       <p:sp>
         <p:nvSpPr>
-          <p:cNvPr id="324" name="FIG_E_b4_icon2"/>
+          <p:cNvPr id="342" name="FIG_E_b4_icon2"/>
           <p:cNvSpPr/>
           <p:nvPr/>
         </p:nvSpPr>
@@ -17041,7 +17681,7 @@
       </p:sp>
       <p:sp>
         <p:nvSpPr>
-          <p:cNvPr id="325" name="FIG_T_b4_head2"/>
+          <p:cNvPr id="343" name="FIG_T_b4_head2"/>
           <p:cNvSpPr txBox="1"/>
           <p:nvPr/>
         </p:nvSpPr>
@@ -17077,7 +17717,7 @@
       </p:sp>
       <p:sp>
         <p:nvSpPr>
-          <p:cNvPr id="326" name="FIG_T_b4_tail2"/>
+          <p:cNvPr id="344" name="FIG_T_b4_tail2"/>
           <p:cNvSpPr txBox="1"/>
           <p:nvPr/>
         </p:nvSpPr>
